--- a/content/05-teaching-resources/slides/digital-infrastructure/05-health-safety-and-esd.pptx
+++ b/content/05-teaching-resources/slides/digital-infrastructure/05-health-safety-and-esd.pptx
@@ -8,12 +8,16 @@
     <p:sldId id="256" r:id="rId7"/>
     <p:sldId id="257" r:id="rId8"/>
     <p:sldId id="258" r:id="rId9"/>
-    <p:sldId id="259" r:id="rId11"/>
+    <p:sldId id="259" r:id="rId10"/>
     <p:sldId id="260" r:id="rId12"/>
     <p:sldId id="261" r:id="rId13"/>
     <p:sldId id="262" r:id="rId14"/>
     <p:sldId id="263" r:id="rId15"/>
     <p:sldId id="264" r:id="rId16"/>
+    <p:sldId id="265" r:id="rId17"/>
+    <p:sldId id="266" r:id="rId18"/>
+    <p:sldId id="267" r:id="rId19"/>
+    <p:sldId id="268" r:id="rId20"/>
   </p:sldIdLst>
   <p:sldSz cx="12191695" cy="6858000" type="screen4x3"/>
   <p:notesSz cx="6858000" cy="9144000"/>
@@ -580,7 +584,22 @@
           <a:lstStyle/>
           <a:p>
             <a:r>
-              <a:t>Give students a few minutes to answer on mini whiteboards or paper, then reveal the answers on the next slide.</a:t>
+              <a:t>Answers:</a:t>
+            </a:r>
+          </a:p>
+          <a:p>
+            <a:r>
+              <a:t>1. Components can fail later rather than immediately.</a:t>
+            </a:r>
+          </a:p>
+          <a:p>
+            <a:r>
+              <a:t>2. Any two: wrist strap, mat, anti-static bag.</a:t>
+            </a:r>
+          </a:p>
+          <a:p>
+            <a:r>
+              <a:t>3. By their edges.</a:t>
             </a:r>
           </a:p>
         </p:txBody>
@@ -650,7 +669,22 @@
           <a:lstStyle/>
           <a:p>
             <a:r>
-              <a:t>Talk through any answers the class found difficult.</a:t>
+              <a:t>Answers:</a:t>
+            </a:r>
+          </a:p>
+          <a:p>
+            <a:r>
+              <a:t>1. The Manual Handling Operations Regulations 1992.</a:t>
+            </a:r>
+          </a:p>
+          <a:p>
+            <a:r>
+              <a:t>2. Hazardous substances.</a:t>
+            </a:r>
+          </a:p>
+          <a:p>
+            <a:r>
+              <a:t>3. The WEEE Directive 2013.</a:t>
             </a:r>
           </a:p>
         </p:txBody>
@@ -676,6 +710,146 @@
 </file>
 
 <file path=ppt/notesSlides/notesSlide4.xml><?xml version="1.0" encoding="utf-8"?>
+<p:notes xmlns:a="http://schemas.openxmlformats.org/drawingml/2006/main" xmlns:p="http://schemas.openxmlformats.org/presentationml/2006/main" xmlns:r="http://schemas.openxmlformats.org/officeDocument/2006/relationships">
+  <p:cSld>
+    <p:spTree>
+      <p:nvGrpSpPr>
+        <p:cNvPr id="1" name=""/>
+        <p:cNvGrpSpPr/>
+        <p:nvPr/>
+      </p:nvGrpSpPr>
+      <p:grpSpPr>
+        <a:xfrm>
+          <a:off x="0" y="0"/>
+          <a:ext cx="0" cy="0"/>
+          <a:chOff x="0" y="0"/>
+          <a:chExt cx="0" cy="0"/>
+        </a:xfrm>
+      </p:grpSpPr>
+      <p:sp>
+        <p:nvSpPr>
+          <p:cNvPr id="2" name="Slide Image Placeholder 1"/>
+          <p:cNvSpPr>
+            <a:spLocks noGrp="1"/>
+          </p:cNvSpPr>
+          <p:nvPr>
+            <p:ph type="sldImg" idx="2"/>
+          </p:nvPr>
+        </p:nvSpPr>
+        <p:spPr/>
+      </p:sp>
+      <p:sp>
+        <p:nvSpPr>
+          <p:cNvPr id="3" name="Notes Placeholder 2"/>
+          <p:cNvSpPr>
+            <a:spLocks noGrp="1"/>
+          </p:cNvSpPr>
+          <p:nvPr>
+            <p:ph type="body" idx="3" sz="quarter"/>
+          </p:nvPr>
+        </p:nvSpPr>
+        <p:spPr/>
+        <p:txBody>
+          <a:bodyPr/>
+          <a:lstStyle/>
+          <a:p>
+            <a:r>
+              <a:t>Give students a few minutes to answer on mini whiteboards or paper, then reveal the answers on the next slide.</a:t>
+            </a:r>
+          </a:p>
+        </p:txBody>
+      </p:sp>
+      <p:sp>
+        <p:nvSpPr>
+          <p:cNvPr id="4" name="Slide Number Placeholder 3"/>
+          <p:cNvSpPr>
+            <a:spLocks noGrp="1"/>
+          </p:cNvSpPr>
+          <p:nvPr>
+            <p:ph type="sldNum" idx="5" sz="quarter"/>
+          </p:nvPr>
+        </p:nvSpPr>
+        <p:spPr/>
+      </p:sp>
+    </p:spTree>
+  </p:cSld>
+  <p:clrMapOvr>
+    <a:masterClrMapping/>
+  </p:clrMapOvr>
+</p:notes>
+</file>
+
+<file path=ppt/notesSlides/notesSlide5.xml><?xml version="1.0" encoding="utf-8"?>
+<p:notes xmlns:a="http://schemas.openxmlformats.org/drawingml/2006/main" xmlns:p="http://schemas.openxmlformats.org/presentationml/2006/main" xmlns:r="http://schemas.openxmlformats.org/officeDocument/2006/relationships">
+  <p:cSld>
+    <p:spTree>
+      <p:nvGrpSpPr>
+        <p:cNvPr id="1" name=""/>
+        <p:cNvGrpSpPr/>
+        <p:nvPr/>
+      </p:nvGrpSpPr>
+      <p:grpSpPr>
+        <a:xfrm>
+          <a:off x="0" y="0"/>
+          <a:ext cx="0" cy="0"/>
+          <a:chOff x="0" y="0"/>
+          <a:chExt cx="0" cy="0"/>
+        </a:xfrm>
+      </p:grpSpPr>
+      <p:sp>
+        <p:nvSpPr>
+          <p:cNvPr id="2" name="Slide Image Placeholder 1"/>
+          <p:cNvSpPr>
+            <a:spLocks noGrp="1"/>
+          </p:cNvSpPr>
+          <p:nvPr>
+            <p:ph type="sldImg" idx="2"/>
+          </p:nvPr>
+        </p:nvSpPr>
+        <p:spPr/>
+      </p:sp>
+      <p:sp>
+        <p:nvSpPr>
+          <p:cNvPr id="3" name="Notes Placeholder 2"/>
+          <p:cNvSpPr>
+            <a:spLocks noGrp="1"/>
+          </p:cNvSpPr>
+          <p:nvPr>
+            <p:ph type="body" idx="3" sz="quarter"/>
+          </p:nvPr>
+        </p:nvSpPr>
+        <p:spPr/>
+        <p:txBody>
+          <a:bodyPr/>
+          <a:lstStyle/>
+          <a:p>
+            <a:r>
+              <a:t>Talk through any answers the class found difficult.</a:t>
+            </a:r>
+          </a:p>
+        </p:txBody>
+      </p:sp>
+      <p:sp>
+        <p:nvSpPr>
+          <p:cNvPr id="4" name="Slide Number Placeholder 3"/>
+          <p:cNvSpPr>
+            <a:spLocks noGrp="1"/>
+          </p:cNvSpPr>
+          <p:nvPr>
+            <p:ph type="sldNum" idx="5" sz="quarter"/>
+          </p:nvPr>
+        </p:nvSpPr>
+        <p:spPr/>
+      </p:sp>
+    </p:spTree>
+  </p:cSld>
+  <p:clrMapOvr>
+    <a:masterClrMapping/>
+  </p:clrMapOvr>
+</p:notes>
+</file>
+
+<file path=ppt/notesSlides/notesSlide6.xml><?xml version="1.0" encoding="utf-8"?>
 <p:notes xmlns:a="http://schemas.openxmlformats.org/drawingml/2006/main" xmlns:p="http://schemas.openxmlformats.org/presentationml/2006/main" xmlns:r="http://schemas.openxmlformats.org/officeDocument/2006/relationships">
   <p:cSld>
     <p:spTree>
@@ -4045,6 +4219,2355 @@
 </p:sld>
 </file>
 
+<file path=ppt/slides/slide10.xml><?xml version="1.0" encoding="utf-8"?>
+<p:sld xmlns:a="http://schemas.openxmlformats.org/drawingml/2006/main" xmlns:p="http://schemas.openxmlformats.org/presentationml/2006/main" xmlns:r="http://schemas.openxmlformats.org/officeDocument/2006/relationships">
+  <p:cSld>
+    <p:bg>
+      <p:bgPr>
+        <a:solidFill>
+          <a:srgbClr val="FFFFFF"/>
+        </a:solidFill>
+        <a:effectLst/>
+      </p:bgPr>
+    </p:bg>
+    <p:spTree>
+      <p:nvGrpSpPr>
+        <p:cNvPr id="1" name=""/>
+        <p:cNvGrpSpPr/>
+        <p:nvPr/>
+      </p:nvGrpSpPr>
+      <p:grpSpPr/>
+      <p:sp>
+        <p:nvSpPr>
+          <p:cNvPr id="2" name="TextBox 1"/>
+          <p:cNvSpPr txBox="1"/>
+          <p:nvPr/>
+        </p:nvSpPr>
+        <p:spPr>
+          <a:xfrm>
+            <a:off x="548640" y="320040"/>
+            <a:ext cx="11094415" cy="274320"/>
+          </a:xfrm>
+          <a:prstGeom prst="rect">
+            <a:avLst/>
+          </a:prstGeom>
+          <a:noFill/>
+        </p:spPr>
+        <p:txBody>
+          <a:bodyPr wrap="square" anchor="t" lIns="0" rIns="0" tIns="0" bIns="0"/>
+          <a:lstStyle/>
+          <a:p>
+            <a:pPr algn="l"/>
+            <a:r>
+              <a:rPr sz="1100" b="1" i="0">
+                <a:solidFill>
+                  <a:srgbClr val="54595D"/>
+                </a:solidFill>
+                <a:latin typeface="Calibri"/>
+              </a:rPr>
+              <a:t>DIGITAL INFRASTRUCTURE  ·  Digital Infrastructure Content Area 2</a:t>
+            </a:r>
+          </a:p>
+        </p:txBody>
+      </p:sp>
+      <p:sp>
+        <p:nvSpPr>
+          <p:cNvPr id="3" name="TextBox 2"/>
+          <p:cNvSpPr txBox="1"/>
+          <p:nvPr/>
+        </p:nvSpPr>
+        <p:spPr>
+          <a:xfrm>
+            <a:off x="548640" y="566928"/>
+            <a:ext cx="11094415" cy="822960"/>
+          </a:xfrm>
+          <a:prstGeom prst="rect">
+            <a:avLst/>
+          </a:prstGeom>
+          <a:noFill/>
+        </p:spPr>
+        <p:txBody>
+          <a:bodyPr wrap="square" anchor="ctr" lIns="0" rIns="0" tIns="0" bIns="0"/>
+          <a:lstStyle/>
+          <a:p>
+            <a:pPr algn="l"/>
+            <a:r>
+              <a:rPr sz="3200" b="1" i="0">
+                <a:solidFill>
+                  <a:srgbClr val="03306E"/>
+                </a:solidFill>
+                <a:latin typeface="Cambria"/>
+              </a:rPr>
+              <a:t>Check your understanding</a:t>
+            </a:r>
+          </a:p>
+        </p:txBody>
+      </p:sp>
+      <p:sp>
+        <p:nvSpPr>
+          <p:cNvPr id="4" name="TextBox 3"/>
+          <p:cNvSpPr txBox="1"/>
+          <p:nvPr/>
+        </p:nvSpPr>
+        <p:spPr>
+          <a:xfrm>
+            <a:off x="548640" y="6446520"/>
+            <a:ext cx="8229600" cy="274320"/>
+          </a:xfrm>
+          <a:prstGeom prst="rect">
+            <a:avLst/>
+          </a:prstGeom>
+          <a:noFill/>
+        </p:spPr>
+        <p:txBody>
+          <a:bodyPr wrap="square" anchor="t" lIns="0" rIns="0" tIns="0" bIns="0"/>
+          <a:lstStyle/>
+          <a:p>
+            <a:pPr algn="l"/>
+            <a:r>
+              <a:rPr sz="1000" b="0" i="0">
+                <a:solidFill>
+                  <a:srgbClr val="54595D"/>
+                </a:solidFill>
+                <a:latin typeface="Calibri"/>
+              </a:rPr>
+              <a:t>Digital Support and Security T Level  ·  Health, Safety and ESD in Digital Infrastructure</a:t>
+            </a:r>
+          </a:p>
+        </p:txBody>
+      </p:sp>
+      <p:sp>
+        <p:nvSpPr>
+          <p:cNvPr id="5" name="TextBox 4"/>
+          <p:cNvSpPr txBox="1"/>
+          <p:nvPr/>
+        </p:nvSpPr>
+        <p:spPr>
+          <a:xfrm>
+            <a:off x="10728655" y="6446520"/>
+            <a:ext cx="914400" cy="274320"/>
+          </a:xfrm>
+          <a:prstGeom prst="rect">
+            <a:avLst/>
+          </a:prstGeom>
+          <a:noFill/>
+        </p:spPr>
+        <p:txBody>
+          <a:bodyPr wrap="square" anchor="t" lIns="0" rIns="0" tIns="0" bIns="0"/>
+          <a:lstStyle/>
+          <a:p>
+            <a:pPr algn="r"/>
+            <a:r>
+              <a:rPr sz="1000" b="0" i="0">
+                <a:solidFill>
+                  <a:srgbClr val="54595D"/>
+                </a:solidFill>
+                <a:latin typeface="Calibri"/>
+              </a:rPr>
+              <a:t>10</a:t>
+            </a:r>
+          </a:p>
+        </p:txBody>
+      </p:sp>
+      <p:sp>
+        <p:nvSpPr>
+          <p:cNvPr id="6" name="Oval 5"/>
+          <p:cNvSpPr/>
+          <p:nvPr/>
+        </p:nvSpPr>
+        <p:spPr>
+          <a:xfrm>
+            <a:off x="548640" y="1618488"/>
+            <a:ext cx="411480" cy="411480"/>
+          </a:xfrm>
+          <a:prstGeom prst="ellipse">
+            <a:avLst/>
+          </a:prstGeom>
+          <a:solidFill>
+            <a:srgbClr val="33C17A"/>
+          </a:solidFill>
+          <a:ln>
+            <a:noFill/>
+          </a:ln>
+          <a:effectLst/>
+        </p:spPr>
+        <p:style>
+          <a:lnRef idx="1">
+            <a:schemeClr val="accent1"/>
+          </a:lnRef>
+          <a:fillRef idx="3">
+            <a:schemeClr val="accent1"/>
+          </a:fillRef>
+          <a:effectRef idx="2">
+            <a:schemeClr val="accent1"/>
+          </a:effectRef>
+          <a:fontRef idx="minor">
+            <a:schemeClr val="lt1"/>
+          </a:fontRef>
+        </p:style>
+        <p:txBody>
+          <a:bodyPr rtlCol="0" anchor="ctr" lIns="0" rIns="0" tIns="0" bIns="0"/>
+          <a:lstStyle/>
+          <a:p>
+            <a:pPr algn="ctr"/>
+            <a:r>
+              <a:rPr sz="1400" b="1">
+                <a:solidFill>
+                  <a:srgbClr val="202122"/>
+                </a:solidFill>
+                <a:latin typeface="Calibri"/>
+              </a:rPr>
+              <a:t>1</a:t>
+            </a:r>
+          </a:p>
+        </p:txBody>
+      </p:sp>
+      <p:sp>
+        <p:nvSpPr>
+          <p:cNvPr id="7" name="TextBox 6"/>
+          <p:cNvSpPr txBox="1"/>
+          <p:nvPr/>
+        </p:nvSpPr>
+        <p:spPr>
+          <a:xfrm>
+            <a:off x="1234440" y="1600200"/>
+            <a:ext cx="10408615" cy="1030986"/>
+          </a:xfrm>
+          <a:prstGeom prst="rect">
+            <a:avLst/>
+          </a:prstGeom>
+          <a:noFill/>
+        </p:spPr>
+        <p:txBody>
+          <a:bodyPr wrap="square" anchor="t" lIns="0" rIns="0" tIns="0" bIns="0"/>
+          <a:lstStyle/>
+          <a:p>
+            <a:pPr algn="l"/>
+            <a:r>
+              <a:rPr sz="2200" b="0" i="0">
+                <a:solidFill>
+                  <a:srgbClr val="202122"/>
+                </a:solidFill>
+                <a:latin typeface="Calibri"/>
+              </a:rPr>
+              <a:t>Name two pieces of anti-static equipment.</a:t>
+            </a:r>
+          </a:p>
+        </p:txBody>
+      </p:sp>
+      <p:sp>
+        <p:nvSpPr>
+          <p:cNvPr id="8" name="Oval 7"/>
+          <p:cNvSpPr/>
+          <p:nvPr/>
+        </p:nvSpPr>
+        <p:spPr>
+          <a:xfrm>
+            <a:off x="548640" y="2814066"/>
+            <a:ext cx="411480" cy="411480"/>
+          </a:xfrm>
+          <a:prstGeom prst="ellipse">
+            <a:avLst/>
+          </a:prstGeom>
+          <a:solidFill>
+            <a:srgbClr val="33C17A"/>
+          </a:solidFill>
+          <a:ln>
+            <a:noFill/>
+          </a:ln>
+          <a:effectLst/>
+        </p:spPr>
+        <p:style>
+          <a:lnRef idx="1">
+            <a:schemeClr val="accent1"/>
+          </a:lnRef>
+          <a:fillRef idx="3">
+            <a:schemeClr val="accent1"/>
+          </a:fillRef>
+          <a:effectRef idx="2">
+            <a:schemeClr val="accent1"/>
+          </a:effectRef>
+          <a:fontRef idx="minor">
+            <a:schemeClr val="lt1"/>
+          </a:fontRef>
+        </p:style>
+        <p:txBody>
+          <a:bodyPr rtlCol="0" anchor="ctr" lIns="0" rIns="0" tIns="0" bIns="0"/>
+          <a:lstStyle/>
+          <a:p>
+            <a:pPr algn="ctr"/>
+            <a:r>
+              <a:rPr sz="1400" b="1">
+                <a:solidFill>
+                  <a:srgbClr val="202122"/>
+                </a:solidFill>
+                <a:latin typeface="Calibri"/>
+              </a:rPr>
+              <a:t>2</a:t>
+            </a:r>
+          </a:p>
+        </p:txBody>
+      </p:sp>
+      <p:sp>
+        <p:nvSpPr>
+          <p:cNvPr id="9" name="TextBox 8"/>
+          <p:cNvSpPr txBox="1"/>
+          <p:nvPr/>
+        </p:nvSpPr>
+        <p:spPr>
+          <a:xfrm>
+            <a:off x="1234440" y="2795778"/>
+            <a:ext cx="10408615" cy="1030986"/>
+          </a:xfrm>
+          <a:prstGeom prst="rect">
+            <a:avLst/>
+          </a:prstGeom>
+          <a:noFill/>
+        </p:spPr>
+        <p:txBody>
+          <a:bodyPr wrap="square" anchor="t" lIns="0" rIns="0" tIns="0" bIns="0"/>
+          <a:lstStyle/>
+          <a:p>
+            <a:pPr algn="l"/>
+            <a:r>
+              <a:rPr sz="2200" b="0" i="0">
+                <a:solidFill>
+                  <a:srgbClr val="202122"/>
+                </a:solidFill>
+                <a:latin typeface="Calibri"/>
+              </a:rPr>
+              <a:t>Why is ESD damage dangerous even if nothing seems wrong?</a:t>
+            </a:r>
+          </a:p>
+        </p:txBody>
+      </p:sp>
+      <p:sp>
+        <p:nvSpPr>
+          <p:cNvPr id="10" name="Oval 9"/>
+          <p:cNvSpPr/>
+          <p:nvPr/>
+        </p:nvSpPr>
+        <p:spPr>
+          <a:xfrm>
+            <a:off x="548640" y="4009644"/>
+            <a:ext cx="411480" cy="411480"/>
+          </a:xfrm>
+          <a:prstGeom prst="ellipse">
+            <a:avLst/>
+          </a:prstGeom>
+          <a:solidFill>
+            <a:srgbClr val="33C17A"/>
+          </a:solidFill>
+          <a:ln>
+            <a:noFill/>
+          </a:ln>
+          <a:effectLst/>
+        </p:spPr>
+        <p:style>
+          <a:lnRef idx="1">
+            <a:schemeClr val="accent1"/>
+          </a:lnRef>
+          <a:fillRef idx="3">
+            <a:schemeClr val="accent1"/>
+          </a:fillRef>
+          <a:effectRef idx="2">
+            <a:schemeClr val="accent1"/>
+          </a:effectRef>
+          <a:fontRef idx="minor">
+            <a:schemeClr val="lt1"/>
+          </a:fontRef>
+        </p:style>
+        <p:txBody>
+          <a:bodyPr rtlCol="0" anchor="ctr" lIns="0" rIns="0" tIns="0" bIns="0"/>
+          <a:lstStyle/>
+          <a:p>
+            <a:pPr algn="ctr"/>
+            <a:r>
+              <a:rPr sz="1400" b="1">
+                <a:solidFill>
+                  <a:srgbClr val="202122"/>
+                </a:solidFill>
+                <a:latin typeface="Calibri"/>
+              </a:rPr>
+              <a:t>3</a:t>
+            </a:r>
+          </a:p>
+        </p:txBody>
+      </p:sp>
+      <p:sp>
+        <p:nvSpPr>
+          <p:cNvPr id="11" name="TextBox 10"/>
+          <p:cNvSpPr txBox="1"/>
+          <p:nvPr/>
+        </p:nvSpPr>
+        <p:spPr>
+          <a:xfrm>
+            <a:off x="1234440" y="3991356"/>
+            <a:ext cx="10408615" cy="1030986"/>
+          </a:xfrm>
+          <a:prstGeom prst="rect">
+            <a:avLst/>
+          </a:prstGeom>
+          <a:noFill/>
+        </p:spPr>
+        <p:txBody>
+          <a:bodyPr wrap="square" anchor="t" lIns="0" rIns="0" tIns="0" bIns="0"/>
+          <a:lstStyle/>
+          <a:p>
+            <a:pPr algn="l"/>
+            <a:r>
+              <a:rPr sz="2200" b="0" i="0">
+                <a:solidFill>
+                  <a:srgbClr val="202122"/>
+                </a:solidFill>
+                <a:latin typeface="Calibri"/>
+              </a:rPr>
+              <a:t>Which regulations cover chemicals such as toner?</a:t>
+            </a:r>
+          </a:p>
+        </p:txBody>
+      </p:sp>
+      <p:sp>
+        <p:nvSpPr>
+          <p:cNvPr id="12" name="Oval 11"/>
+          <p:cNvSpPr/>
+          <p:nvPr/>
+        </p:nvSpPr>
+        <p:spPr>
+          <a:xfrm>
+            <a:off x="548640" y="5205221"/>
+            <a:ext cx="411480" cy="411480"/>
+          </a:xfrm>
+          <a:prstGeom prst="ellipse">
+            <a:avLst/>
+          </a:prstGeom>
+          <a:solidFill>
+            <a:srgbClr val="33C17A"/>
+          </a:solidFill>
+          <a:ln>
+            <a:noFill/>
+          </a:ln>
+          <a:effectLst/>
+        </p:spPr>
+        <p:style>
+          <a:lnRef idx="1">
+            <a:schemeClr val="accent1"/>
+          </a:lnRef>
+          <a:fillRef idx="3">
+            <a:schemeClr val="accent1"/>
+          </a:fillRef>
+          <a:effectRef idx="2">
+            <a:schemeClr val="accent1"/>
+          </a:effectRef>
+          <a:fontRef idx="minor">
+            <a:schemeClr val="lt1"/>
+          </a:fontRef>
+        </p:style>
+        <p:txBody>
+          <a:bodyPr rtlCol="0" anchor="ctr" lIns="0" rIns="0" tIns="0" bIns="0"/>
+          <a:lstStyle/>
+          <a:p>
+            <a:pPr algn="ctr"/>
+            <a:r>
+              <a:rPr sz="1400" b="1">
+                <a:solidFill>
+                  <a:srgbClr val="202122"/>
+                </a:solidFill>
+                <a:latin typeface="Calibri"/>
+              </a:rPr>
+              <a:t>4</a:t>
+            </a:r>
+          </a:p>
+        </p:txBody>
+      </p:sp>
+      <p:sp>
+        <p:nvSpPr>
+          <p:cNvPr id="13" name="TextBox 12"/>
+          <p:cNvSpPr txBox="1"/>
+          <p:nvPr/>
+        </p:nvSpPr>
+        <p:spPr>
+          <a:xfrm>
+            <a:off x="1234440" y="5186933"/>
+            <a:ext cx="10408615" cy="1030986"/>
+          </a:xfrm>
+          <a:prstGeom prst="rect">
+            <a:avLst/>
+          </a:prstGeom>
+          <a:noFill/>
+        </p:spPr>
+        <p:txBody>
+          <a:bodyPr wrap="square" anchor="t" lIns="0" rIns="0" tIns="0" bIns="0"/>
+          <a:lstStyle/>
+          <a:p>
+            <a:pPr algn="l"/>
+            <a:r>
+              <a:rPr sz="2200" b="0" i="0">
+                <a:solidFill>
+                  <a:srgbClr val="202122"/>
+                </a:solidFill>
+                <a:latin typeface="Calibri"/>
+              </a:rPr>
+              <a:t>Which law covers disposing of old switches?</a:t>
+            </a:r>
+          </a:p>
+        </p:txBody>
+      </p:sp>
+    </p:spTree>
+  </p:cSld>
+  <p:clrMapOvr>
+    <a:masterClrMapping/>
+  </p:clrMapOvr>
+</p:sld>
+</file>
+
+<file path=ppt/slides/slide11.xml><?xml version="1.0" encoding="utf-8"?>
+<p:sld xmlns:a="http://schemas.openxmlformats.org/drawingml/2006/main" xmlns:p="http://schemas.openxmlformats.org/presentationml/2006/main" xmlns:r="http://schemas.openxmlformats.org/officeDocument/2006/relationships">
+  <p:cSld>
+    <p:bg>
+      <p:bgPr>
+        <a:solidFill>
+          <a:srgbClr val="FFFFFF"/>
+        </a:solidFill>
+        <a:effectLst/>
+      </p:bgPr>
+    </p:bg>
+    <p:spTree>
+      <p:nvGrpSpPr>
+        <p:cNvPr id="1" name=""/>
+        <p:cNvGrpSpPr/>
+        <p:nvPr/>
+      </p:nvGrpSpPr>
+      <p:grpSpPr/>
+      <p:sp>
+        <p:nvSpPr>
+          <p:cNvPr id="2" name="TextBox 1"/>
+          <p:cNvSpPr txBox="1"/>
+          <p:nvPr/>
+        </p:nvSpPr>
+        <p:spPr>
+          <a:xfrm>
+            <a:off x="548640" y="320040"/>
+            <a:ext cx="11094415" cy="274320"/>
+          </a:xfrm>
+          <a:prstGeom prst="rect">
+            <a:avLst/>
+          </a:prstGeom>
+          <a:noFill/>
+        </p:spPr>
+        <p:txBody>
+          <a:bodyPr wrap="square" anchor="t" lIns="0" rIns="0" tIns="0" bIns="0"/>
+          <a:lstStyle/>
+          <a:p>
+            <a:pPr algn="l"/>
+            <a:r>
+              <a:rPr sz="1100" b="1" i="0">
+                <a:solidFill>
+                  <a:srgbClr val="54595D"/>
+                </a:solidFill>
+                <a:latin typeface="Calibri"/>
+              </a:rPr>
+              <a:t>DIGITAL INFRASTRUCTURE  ·  Digital Infrastructure Content Area 2</a:t>
+            </a:r>
+          </a:p>
+        </p:txBody>
+      </p:sp>
+      <p:sp>
+        <p:nvSpPr>
+          <p:cNvPr id="3" name="TextBox 2"/>
+          <p:cNvSpPr txBox="1"/>
+          <p:nvPr/>
+        </p:nvSpPr>
+        <p:spPr>
+          <a:xfrm>
+            <a:off x="548640" y="566928"/>
+            <a:ext cx="11094415" cy="822960"/>
+          </a:xfrm>
+          <a:prstGeom prst="rect">
+            <a:avLst/>
+          </a:prstGeom>
+          <a:noFill/>
+        </p:spPr>
+        <p:txBody>
+          <a:bodyPr wrap="square" anchor="ctr" lIns="0" rIns="0" tIns="0" bIns="0"/>
+          <a:lstStyle/>
+          <a:p>
+            <a:pPr algn="l"/>
+            <a:r>
+              <a:rPr sz="3200" b="1" i="0">
+                <a:solidFill>
+                  <a:srgbClr val="03306E"/>
+                </a:solidFill>
+                <a:latin typeface="Cambria"/>
+              </a:rPr>
+              <a:t>Answers</a:t>
+            </a:r>
+          </a:p>
+        </p:txBody>
+      </p:sp>
+      <p:sp>
+        <p:nvSpPr>
+          <p:cNvPr id="4" name="TextBox 3"/>
+          <p:cNvSpPr txBox="1"/>
+          <p:nvPr/>
+        </p:nvSpPr>
+        <p:spPr>
+          <a:xfrm>
+            <a:off x="548640" y="6446520"/>
+            <a:ext cx="8229600" cy="274320"/>
+          </a:xfrm>
+          <a:prstGeom prst="rect">
+            <a:avLst/>
+          </a:prstGeom>
+          <a:noFill/>
+        </p:spPr>
+        <p:txBody>
+          <a:bodyPr wrap="square" anchor="t" lIns="0" rIns="0" tIns="0" bIns="0"/>
+          <a:lstStyle/>
+          <a:p>
+            <a:pPr algn="l"/>
+            <a:r>
+              <a:rPr sz="1000" b="0" i="0">
+                <a:solidFill>
+                  <a:srgbClr val="54595D"/>
+                </a:solidFill>
+                <a:latin typeface="Calibri"/>
+              </a:rPr>
+              <a:t>Digital Support and Security T Level  ·  Health, Safety and ESD in Digital Infrastructure</a:t>
+            </a:r>
+          </a:p>
+        </p:txBody>
+      </p:sp>
+      <p:sp>
+        <p:nvSpPr>
+          <p:cNvPr id="5" name="TextBox 4"/>
+          <p:cNvSpPr txBox="1"/>
+          <p:nvPr/>
+        </p:nvSpPr>
+        <p:spPr>
+          <a:xfrm>
+            <a:off x="10728655" y="6446520"/>
+            <a:ext cx="914400" cy="274320"/>
+          </a:xfrm>
+          <a:prstGeom prst="rect">
+            <a:avLst/>
+          </a:prstGeom>
+          <a:noFill/>
+        </p:spPr>
+        <p:txBody>
+          <a:bodyPr wrap="square" anchor="t" lIns="0" rIns="0" tIns="0" bIns="0"/>
+          <a:lstStyle/>
+          <a:p>
+            <a:pPr algn="r"/>
+            <a:r>
+              <a:rPr sz="1000" b="0" i="0">
+                <a:solidFill>
+                  <a:srgbClr val="54595D"/>
+                </a:solidFill>
+                <a:latin typeface="Calibri"/>
+              </a:rPr>
+              <a:t>11</a:t>
+            </a:r>
+          </a:p>
+        </p:txBody>
+      </p:sp>
+      <p:sp>
+        <p:nvSpPr>
+          <p:cNvPr id="6" name="Oval 5"/>
+          <p:cNvSpPr/>
+          <p:nvPr/>
+        </p:nvSpPr>
+        <p:spPr>
+          <a:xfrm>
+            <a:off x="548640" y="1618488"/>
+            <a:ext cx="411480" cy="411480"/>
+          </a:xfrm>
+          <a:prstGeom prst="ellipse">
+            <a:avLst/>
+          </a:prstGeom>
+          <a:solidFill>
+            <a:srgbClr val="33C17A"/>
+          </a:solidFill>
+          <a:ln>
+            <a:noFill/>
+          </a:ln>
+          <a:effectLst/>
+        </p:spPr>
+        <p:style>
+          <a:lnRef idx="1">
+            <a:schemeClr val="accent1"/>
+          </a:lnRef>
+          <a:fillRef idx="3">
+            <a:schemeClr val="accent1"/>
+          </a:fillRef>
+          <a:effectRef idx="2">
+            <a:schemeClr val="accent1"/>
+          </a:effectRef>
+          <a:fontRef idx="minor">
+            <a:schemeClr val="lt1"/>
+          </a:fontRef>
+        </p:style>
+        <p:txBody>
+          <a:bodyPr rtlCol="0" anchor="ctr" lIns="0" rIns="0" tIns="0" bIns="0"/>
+          <a:lstStyle/>
+          <a:p>
+            <a:pPr algn="ctr"/>
+            <a:r>
+              <a:rPr sz="1400" b="1">
+                <a:solidFill>
+                  <a:srgbClr val="202122"/>
+                </a:solidFill>
+                <a:latin typeface="Calibri"/>
+              </a:rPr>
+              <a:t>1</a:t>
+            </a:r>
+          </a:p>
+        </p:txBody>
+      </p:sp>
+      <p:sp>
+        <p:nvSpPr>
+          <p:cNvPr id="7" name="TextBox 6"/>
+          <p:cNvSpPr txBox="1"/>
+          <p:nvPr/>
+        </p:nvSpPr>
+        <p:spPr>
+          <a:xfrm>
+            <a:off x="1234440" y="1600200"/>
+            <a:ext cx="10408615" cy="1030986"/>
+          </a:xfrm>
+          <a:prstGeom prst="rect">
+            <a:avLst/>
+          </a:prstGeom>
+          <a:noFill/>
+        </p:spPr>
+        <p:txBody>
+          <a:bodyPr wrap="square" anchor="t" lIns="0" rIns="0" tIns="0" bIns="0"/>
+          <a:lstStyle/>
+          <a:p>
+            <a:pPr algn="l"/>
+            <a:r>
+              <a:rPr sz="1800" b="0" i="0">
+                <a:solidFill>
+                  <a:srgbClr val="54595D"/>
+                </a:solidFill>
+                <a:latin typeface="Calibri"/>
+              </a:rPr>
+              <a:t>Name two pieces of anti-static equipment.</a:t>
+            </a:r>
+          </a:p>
+          <a:p>
+            <a:r>
+              <a:rPr sz="1800" b="1">
+                <a:solidFill>
+                  <a:srgbClr val="03306E"/>
+                </a:solidFill>
+                <a:latin typeface="Calibri"/>
+              </a:rPr>
+              <a:t>Any two of: wrist strap, mat, anti-static bag.</a:t>
+            </a:r>
+          </a:p>
+        </p:txBody>
+      </p:sp>
+      <p:sp>
+        <p:nvSpPr>
+          <p:cNvPr id="8" name="Oval 7"/>
+          <p:cNvSpPr/>
+          <p:nvPr/>
+        </p:nvSpPr>
+        <p:spPr>
+          <a:xfrm>
+            <a:off x="548640" y="2814066"/>
+            <a:ext cx="411480" cy="411480"/>
+          </a:xfrm>
+          <a:prstGeom prst="ellipse">
+            <a:avLst/>
+          </a:prstGeom>
+          <a:solidFill>
+            <a:srgbClr val="33C17A"/>
+          </a:solidFill>
+          <a:ln>
+            <a:noFill/>
+          </a:ln>
+          <a:effectLst/>
+        </p:spPr>
+        <p:style>
+          <a:lnRef idx="1">
+            <a:schemeClr val="accent1"/>
+          </a:lnRef>
+          <a:fillRef idx="3">
+            <a:schemeClr val="accent1"/>
+          </a:fillRef>
+          <a:effectRef idx="2">
+            <a:schemeClr val="accent1"/>
+          </a:effectRef>
+          <a:fontRef idx="minor">
+            <a:schemeClr val="lt1"/>
+          </a:fontRef>
+        </p:style>
+        <p:txBody>
+          <a:bodyPr rtlCol="0" anchor="ctr" lIns="0" rIns="0" tIns="0" bIns="0"/>
+          <a:lstStyle/>
+          <a:p>
+            <a:pPr algn="ctr"/>
+            <a:r>
+              <a:rPr sz="1400" b="1">
+                <a:solidFill>
+                  <a:srgbClr val="202122"/>
+                </a:solidFill>
+                <a:latin typeface="Calibri"/>
+              </a:rPr>
+              <a:t>2</a:t>
+            </a:r>
+          </a:p>
+        </p:txBody>
+      </p:sp>
+      <p:sp>
+        <p:nvSpPr>
+          <p:cNvPr id="9" name="TextBox 8"/>
+          <p:cNvSpPr txBox="1"/>
+          <p:nvPr/>
+        </p:nvSpPr>
+        <p:spPr>
+          <a:xfrm>
+            <a:off x="1234440" y="2795778"/>
+            <a:ext cx="10408615" cy="1030986"/>
+          </a:xfrm>
+          <a:prstGeom prst="rect">
+            <a:avLst/>
+          </a:prstGeom>
+          <a:noFill/>
+        </p:spPr>
+        <p:txBody>
+          <a:bodyPr wrap="square" anchor="t" lIns="0" rIns="0" tIns="0" bIns="0"/>
+          <a:lstStyle/>
+          <a:p>
+            <a:pPr algn="l"/>
+            <a:r>
+              <a:rPr sz="1800" b="0" i="0">
+                <a:solidFill>
+                  <a:srgbClr val="54595D"/>
+                </a:solidFill>
+                <a:latin typeface="Calibri"/>
+              </a:rPr>
+              <a:t>Why is ESD damage dangerous even if nothing seems wrong?</a:t>
+            </a:r>
+          </a:p>
+          <a:p>
+            <a:r>
+              <a:rPr sz="1800" b="1">
+                <a:solidFill>
+                  <a:srgbClr val="03306E"/>
+                </a:solidFill>
+                <a:latin typeface="Calibri"/>
+              </a:rPr>
+              <a:t>Components can be weakened and fail later.</a:t>
+            </a:r>
+          </a:p>
+        </p:txBody>
+      </p:sp>
+      <p:sp>
+        <p:nvSpPr>
+          <p:cNvPr id="10" name="Oval 9"/>
+          <p:cNvSpPr/>
+          <p:nvPr/>
+        </p:nvSpPr>
+        <p:spPr>
+          <a:xfrm>
+            <a:off x="548640" y="4009644"/>
+            <a:ext cx="411480" cy="411480"/>
+          </a:xfrm>
+          <a:prstGeom prst="ellipse">
+            <a:avLst/>
+          </a:prstGeom>
+          <a:solidFill>
+            <a:srgbClr val="33C17A"/>
+          </a:solidFill>
+          <a:ln>
+            <a:noFill/>
+          </a:ln>
+          <a:effectLst/>
+        </p:spPr>
+        <p:style>
+          <a:lnRef idx="1">
+            <a:schemeClr val="accent1"/>
+          </a:lnRef>
+          <a:fillRef idx="3">
+            <a:schemeClr val="accent1"/>
+          </a:fillRef>
+          <a:effectRef idx="2">
+            <a:schemeClr val="accent1"/>
+          </a:effectRef>
+          <a:fontRef idx="minor">
+            <a:schemeClr val="lt1"/>
+          </a:fontRef>
+        </p:style>
+        <p:txBody>
+          <a:bodyPr rtlCol="0" anchor="ctr" lIns="0" rIns="0" tIns="0" bIns="0"/>
+          <a:lstStyle/>
+          <a:p>
+            <a:pPr algn="ctr"/>
+            <a:r>
+              <a:rPr sz="1400" b="1">
+                <a:solidFill>
+                  <a:srgbClr val="202122"/>
+                </a:solidFill>
+                <a:latin typeface="Calibri"/>
+              </a:rPr>
+              <a:t>3</a:t>
+            </a:r>
+          </a:p>
+        </p:txBody>
+      </p:sp>
+      <p:sp>
+        <p:nvSpPr>
+          <p:cNvPr id="11" name="TextBox 10"/>
+          <p:cNvSpPr txBox="1"/>
+          <p:nvPr/>
+        </p:nvSpPr>
+        <p:spPr>
+          <a:xfrm>
+            <a:off x="1234440" y="3991356"/>
+            <a:ext cx="10408615" cy="1030986"/>
+          </a:xfrm>
+          <a:prstGeom prst="rect">
+            <a:avLst/>
+          </a:prstGeom>
+          <a:noFill/>
+        </p:spPr>
+        <p:txBody>
+          <a:bodyPr wrap="square" anchor="t" lIns="0" rIns="0" tIns="0" bIns="0"/>
+          <a:lstStyle/>
+          <a:p>
+            <a:pPr algn="l"/>
+            <a:r>
+              <a:rPr sz="1800" b="0" i="0">
+                <a:solidFill>
+                  <a:srgbClr val="54595D"/>
+                </a:solidFill>
+                <a:latin typeface="Calibri"/>
+              </a:rPr>
+              <a:t>Which regulations cover chemicals such as toner?</a:t>
+            </a:r>
+          </a:p>
+          <a:p>
+            <a:r>
+              <a:rPr sz="1800" b="1">
+                <a:solidFill>
+                  <a:srgbClr val="03306E"/>
+                </a:solidFill>
+                <a:latin typeface="Calibri"/>
+              </a:rPr>
+              <a:t>COSHH Regulations 2002.</a:t>
+            </a:r>
+          </a:p>
+        </p:txBody>
+      </p:sp>
+      <p:sp>
+        <p:nvSpPr>
+          <p:cNvPr id="12" name="Oval 11"/>
+          <p:cNvSpPr/>
+          <p:nvPr/>
+        </p:nvSpPr>
+        <p:spPr>
+          <a:xfrm>
+            <a:off x="548640" y="5205221"/>
+            <a:ext cx="411480" cy="411480"/>
+          </a:xfrm>
+          <a:prstGeom prst="ellipse">
+            <a:avLst/>
+          </a:prstGeom>
+          <a:solidFill>
+            <a:srgbClr val="33C17A"/>
+          </a:solidFill>
+          <a:ln>
+            <a:noFill/>
+          </a:ln>
+          <a:effectLst/>
+        </p:spPr>
+        <p:style>
+          <a:lnRef idx="1">
+            <a:schemeClr val="accent1"/>
+          </a:lnRef>
+          <a:fillRef idx="3">
+            <a:schemeClr val="accent1"/>
+          </a:fillRef>
+          <a:effectRef idx="2">
+            <a:schemeClr val="accent1"/>
+          </a:effectRef>
+          <a:fontRef idx="minor">
+            <a:schemeClr val="lt1"/>
+          </a:fontRef>
+        </p:style>
+        <p:txBody>
+          <a:bodyPr rtlCol="0" anchor="ctr" lIns="0" rIns="0" tIns="0" bIns="0"/>
+          <a:lstStyle/>
+          <a:p>
+            <a:pPr algn="ctr"/>
+            <a:r>
+              <a:rPr sz="1400" b="1">
+                <a:solidFill>
+                  <a:srgbClr val="202122"/>
+                </a:solidFill>
+                <a:latin typeface="Calibri"/>
+              </a:rPr>
+              <a:t>4</a:t>
+            </a:r>
+          </a:p>
+        </p:txBody>
+      </p:sp>
+      <p:sp>
+        <p:nvSpPr>
+          <p:cNvPr id="13" name="TextBox 12"/>
+          <p:cNvSpPr txBox="1"/>
+          <p:nvPr/>
+        </p:nvSpPr>
+        <p:spPr>
+          <a:xfrm>
+            <a:off x="1234440" y="5186933"/>
+            <a:ext cx="10408615" cy="1030986"/>
+          </a:xfrm>
+          <a:prstGeom prst="rect">
+            <a:avLst/>
+          </a:prstGeom>
+          <a:noFill/>
+        </p:spPr>
+        <p:txBody>
+          <a:bodyPr wrap="square" anchor="t" lIns="0" rIns="0" tIns="0" bIns="0"/>
+          <a:lstStyle/>
+          <a:p>
+            <a:pPr algn="l"/>
+            <a:r>
+              <a:rPr sz="1800" b="0" i="0">
+                <a:solidFill>
+                  <a:srgbClr val="54595D"/>
+                </a:solidFill>
+                <a:latin typeface="Calibri"/>
+              </a:rPr>
+              <a:t>Which law covers disposing of old switches?</a:t>
+            </a:r>
+          </a:p>
+          <a:p>
+            <a:r>
+              <a:rPr sz="1800" b="1">
+                <a:solidFill>
+                  <a:srgbClr val="03306E"/>
+                </a:solidFill>
+                <a:latin typeface="Calibri"/>
+              </a:rPr>
+              <a:t>WEEE Directive 2013.</a:t>
+            </a:r>
+          </a:p>
+        </p:txBody>
+      </p:sp>
+    </p:spTree>
+  </p:cSld>
+  <p:clrMapOvr>
+    <a:masterClrMapping/>
+  </p:clrMapOvr>
+</p:sld>
+</file>
+
+<file path=ppt/slides/slide12.xml><?xml version="1.0" encoding="utf-8"?>
+<p:sld xmlns:a="http://schemas.openxmlformats.org/drawingml/2006/main" xmlns:p="http://schemas.openxmlformats.org/presentationml/2006/main" xmlns:r="http://schemas.openxmlformats.org/officeDocument/2006/relationships">
+  <p:cSld>
+    <p:bg>
+      <p:bgPr>
+        <a:solidFill>
+          <a:srgbClr val="FFFFFF"/>
+        </a:solidFill>
+        <a:effectLst/>
+      </p:bgPr>
+    </p:bg>
+    <p:spTree>
+      <p:nvGrpSpPr>
+        <p:cNvPr id="1" name=""/>
+        <p:cNvGrpSpPr/>
+        <p:nvPr/>
+      </p:nvGrpSpPr>
+      <p:grpSpPr/>
+      <p:sp>
+        <p:nvSpPr>
+          <p:cNvPr id="2" name="TextBox 1"/>
+          <p:cNvSpPr txBox="1"/>
+          <p:nvPr/>
+        </p:nvSpPr>
+        <p:spPr>
+          <a:xfrm>
+            <a:off x="548640" y="320040"/>
+            <a:ext cx="11094415" cy="274320"/>
+          </a:xfrm>
+          <a:prstGeom prst="rect">
+            <a:avLst/>
+          </a:prstGeom>
+          <a:noFill/>
+        </p:spPr>
+        <p:txBody>
+          <a:bodyPr wrap="square" anchor="t" lIns="0" rIns="0" tIns="0" bIns="0"/>
+          <a:lstStyle/>
+          <a:p>
+            <a:pPr algn="l"/>
+            <a:r>
+              <a:rPr sz="1100" b="1" i="0">
+                <a:solidFill>
+                  <a:srgbClr val="54595D"/>
+                </a:solidFill>
+                <a:latin typeface="Calibri"/>
+              </a:rPr>
+              <a:t>DIGITAL INFRASTRUCTURE  ·  Digital Infrastructure Content Area 2</a:t>
+            </a:r>
+          </a:p>
+        </p:txBody>
+      </p:sp>
+      <p:sp>
+        <p:nvSpPr>
+          <p:cNvPr id="3" name="TextBox 2"/>
+          <p:cNvSpPr txBox="1"/>
+          <p:nvPr/>
+        </p:nvSpPr>
+        <p:spPr>
+          <a:xfrm>
+            <a:off x="548640" y="566928"/>
+            <a:ext cx="11094415" cy="822960"/>
+          </a:xfrm>
+          <a:prstGeom prst="rect">
+            <a:avLst/>
+          </a:prstGeom>
+          <a:noFill/>
+        </p:spPr>
+        <p:txBody>
+          <a:bodyPr wrap="square" anchor="ctr" lIns="0" rIns="0" tIns="0" bIns="0"/>
+          <a:lstStyle/>
+          <a:p>
+            <a:pPr algn="l"/>
+            <a:r>
+              <a:rPr sz="3200" b="1" i="0">
+                <a:solidFill>
+                  <a:srgbClr val="03306E"/>
+                </a:solidFill>
+                <a:latin typeface="Cambria"/>
+              </a:rPr>
+              <a:t>Activity: ESD risk assessment and RAM swap</a:t>
+            </a:r>
+          </a:p>
+        </p:txBody>
+      </p:sp>
+      <p:sp>
+        <p:nvSpPr>
+          <p:cNvPr id="4" name="TextBox 3"/>
+          <p:cNvSpPr txBox="1"/>
+          <p:nvPr/>
+        </p:nvSpPr>
+        <p:spPr>
+          <a:xfrm>
+            <a:off x="548640" y="6446520"/>
+            <a:ext cx="8229600" cy="274320"/>
+          </a:xfrm>
+          <a:prstGeom prst="rect">
+            <a:avLst/>
+          </a:prstGeom>
+          <a:noFill/>
+        </p:spPr>
+        <p:txBody>
+          <a:bodyPr wrap="square" anchor="t" lIns="0" rIns="0" tIns="0" bIns="0"/>
+          <a:lstStyle/>
+          <a:p>
+            <a:pPr algn="l"/>
+            <a:r>
+              <a:rPr sz="1000" b="0" i="0">
+                <a:solidFill>
+                  <a:srgbClr val="54595D"/>
+                </a:solidFill>
+                <a:latin typeface="Calibri"/>
+              </a:rPr>
+              <a:t>Digital Support and Security T Level  ·  Health, Safety and ESD in Digital Infrastructure</a:t>
+            </a:r>
+          </a:p>
+        </p:txBody>
+      </p:sp>
+      <p:sp>
+        <p:nvSpPr>
+          <p:cNvPr id="5" name="TextBox 4"/>
+          <p:cNvSpPr txBox="1"/>
+          <p:nvPr/>
+        </p:nvSpPr>
+        <p:spPr>
+          <a:xfrm>
+            <a:off x="10728655" y="6446520"/>
+            <a:ext cx="914400" cy="274320"/>
+          </a:xfrm>
+          <a:prstGeom prst="rect">
+            <a:avLst/>
+          </a:prstGeom>
+          <a:noFill/>
+        </p:spPr>
+        <p:txBody>
+          <a:bodyPr wrap="square" anchor="t" lIns="0" rIns="0" tIns="0" bIns="0"/>
+          <a:lstStyle/>
+          <a:p>
+            <a:pPr algn="r"/>
+            <a:r>
+              <a:rPr sz="1000" b="0" i="0">
+                <a:solidFill>
+                  <a:srgbClr val="54595D"/>
+                </a:solidFill>
+                <a:latin typeface="Calibri"/>
+              </a:rPr>
+              <a:t>12</a:t>
+            </a:r>
+          </a:p>
+        </p:txBody>
+      </p:sp>
+      <p:sp>
+        <p:nvSpPr>
+          <p:cNvPr id="6" name="Rounded Rectangle 5"/>
+          <p:cNvSpPr/>
+          <p:nvPr/>
+        </p:nvSpPr>
+        <p:spPr>
+          <a:xfrm>
+            <a:off x="548640" y="1508760"/>
+            <a:ext cx="2011680" cy="457200"/>
+          </a:xfrm>
+          <a:prstGeom prst="roundRect">
+            <a:avLst>
+              <a:gd name="adj" fmla="val 50000"/>
+            </a:avLst>
+          </a:prstGeom>
+          <a:solidFill>
+            <a:srgbClr val="33C17A"/>
+          </a:solidFill>
+          <a:ln>
+            <a:noFill/>
+          </a:ln>
+          <a:effectLst/>
+        </p:spPr>
+        <p:style>
+          <a:lnRef idx="1">
+            <a:schemeClr val="accent1"/>
+          </a:lnRef>
+          <a:fillRef idx="3">
+            <a:schemeClr val="accent1"/>
+          </a:fillRef>
+          <a:effectRef idx="2">
+            <a:schemeClr val="accent1"/>
+          </a:effectRef>
+          <a:fontRef idx="minor">
+            <a:schemeClr val="lt1"/>
+          </a:fontRef>
+        </p:style>
+        <p:txBody>
+          <a:bodyPr rtlCol="0" anchor="ctr"/>
+          <a:lstStyle/>
+          <a:p/>
+        </p:txBody>
+      </p:sp>
+      <p:sp>
+        <p:nvSpPr>
+          <p:cNvPr id="7" name="TextBox 6"/>
+          <p:cNvSpPr txBox="1"/>
+          <p:nvPr/>
+        </p:nvSpPr>
+        <p:spPr>
+          <a:xfrm>
+            <a:off x="548640" y="1508760"/>
+            <a:ext cx="2011680" cy="457200"/>
+          </a:xfrm>
+          <a:prstGeom prst="rect">
+            <a:avLst/>
+          </a:prstGeom>
+          <a:noFill/>
+        </p:spPr>
+        <p:txBody>
+          <a:bodyPr wrap="square" anchor="ctr" lIns="0" rIns="0" tIns="0" bIns="0"/>
+          <a:lstStyle/>
+          <a:p>
+            <a:pPr algn="ctr"/>
+            <a:r>
+              <a:rPr sz="1400" b="1" i="0">
+                <a:solidFill>
+                  <a:srgbClr val="202122"/>
+                </a:solidFill>
+                <a:latin typeface="Calibri"/>
+              </a:rPr>
+              <a:t>30 minutes</a:t>
+            </a:r>
+          </a:p>
+        </p:txBody>
+      </p:sp>
+      <p:sp>
+        <p:nvSpPr>
+          <p:cNvPr id="8" name="TextBox 7"/>
+          <p:cNvSpPr txBox="1"/>
+          <p:nvPr/>
+        </p:nvSpPr>
+        <p:spPr>
+          <a:xfrm>
+            <a:off x="2743200" y="1508760"/>
+            <a:ext cx="4754880" cy="457200"/>
+          </a:xfrm>
+          <a:prstGeom prst="rect">
+            <a:avLst/>
+          </a:prstGeom>
+          <a:noFill/>
+        </p:spPr>
+        <p:txBody>
+          <a:bodyPr wrap="square" anchor="ctr" lIns="0" rIns="0" tIns="0" bIns="0"/>
+          <a:lstStyle/>
+          <a:p>
+            <a:pPr algn="l"/>
+            <a:r>
+              <a:rPr sz="1400" b="0" i="1">
+                <a:solidFill>
+                  <a:srgbClr val="54595D"/>
+                </a:solidFill>
+                <a:latin typeface="Calibri"/>
+              </a:rPr>
+              <a:t>Pairs, practical</a:t>
+            </a:r>
+          </a:p>
+        </p:txBody>
+      </p:sp>
+      <p:sp>
+        <p:nvSpPr>
+          <p:cNvPr id="9" name="Oval 8"/>
+          <p:cNvSpPr/>
+          <p:nvPr/>
+        </p:nvSpPr>
+        <p:spPr>
+          <a:xfrm>
+            <a:off x="548640" y="2482596"/>
+            <a:ext cx="384048" cy="384048"/>
+          </a:xfrm>
+          <a:prstGeom prst="ellipse">
+            <a:avLst/>
+          </a:prstGeom>
+          <a:solidFill>
+            <a:srgbClr val="0645AD"/>
+          </a:solidFill>
+          <a:ln>
+            <a:noFill/>
+          </a:ln>
+          <a:effectLst/>
+        </p:spPr>
+        <p:style>
+          <a:lnRef idx="1">
+            <a:schemeClr val="accent1"/>
+          </a:lnRef>
+          <a:fillRef idx="3">
+            <a:schemeClr val="accent1"/>
+          </a:fillRef>
+          <a:effectRef idx="2">
+            <a:schemeClr val="accent1"/>
+          </a:effectRef>
+          <a:fontRef idx="minor">
+            <a:schemeClr val="lt1"/>
+          </a:fontRef>
+        </p:style>
+        <p:txBody>
+          <a:bodyPr rtlCol="0" anchor="ctr" lIns="0" rIns="0" tIns="0" bIns="0"/>
+          <a:lstStyle/>
+          <a:p>
+            <a:pPr algn="ctr"/>
+            <a:r>
+              <a:rPr sz="1300" b="1">
+                <a:solidFill>
+                  <a:srgbClr val="FFFFFF"/>
+                </a:solidFill>
+                <a:latin typeface="Calibri"/>
+              </a:rPr>
+              <a:t>1</a:t>
+            </a:r>
+          </a:p>
+        </p:txBody>
+      </p:sp>
+      <p:sp>
+        <p:nvSpPr>
+          <p:cNvPr id="10" name="TextBox 9"/>
+          <p:cNvSpPr txBox="1"/>
+          <p:nvPr/>
+        </p:nvSpPr>
+        <p:spPr>
+          <a:xfrm>
+            <a:off x="1143000" y="2240280"/>
+            <a:ext cx="5943600" cy="868680"/>
+          </a:xfrm>
+          <a:prstGeom prst="rect">
+            <a:avLst/>
+          </a:prstGeom>
+          <a:noFill/>
+        </p:spPr>
+        <p:txBody>
+          <a:bodyPr wrap="square" anchor="ctr" lIns="0" rIns="0" tIns="0" bIns="0"/>
+          <a:lstStyle/>
+          <a:p>
+            <a:pPr algn="l"/>
+            <a:r>
+              <a:rPr sz="1700" b="0" i="0">
+                <a:solidFill>
+                  <a:srgbClr val="202122"/>
+                </a:solidFill>
+                <a:latin typeface="Calibri"/>
+              </a:rPr>
+              <a:t>Complete an ESD risk assessment for upgrading RAM in a lab PC.</a:t>
+            </a:r>
+          </a:p>
+        </p:txBody>
+      </p:sp>
+      <p:sp>
+        <p:nvSpPr>
+          <p:cNvPr id="11" name="Oval 10"/>
+          <p:cNvSpPr/>
+          <p:nvPr/>
+        </p:nvSpPr>
+        <p:spPr>
+          <a:xfrm>
+            <a:off x="548640" y="3461004"/>
+            <a:ext cx="384048" cy="384048"/>
+          </a:xfrm>
+          <a:prstGeom prst="ellipse">
+            <a:avLst/>
+          </a:prstGeom>
+          <a:solidFill>
+            <a:srgbClr val="0645AD"/>
+          </a:solidFill>
+          <a:ln>
+            <a:noFill/>
+          </a:ln>
+          <a:effectLst/>
+        </p:spPr>
+        <p:style>
+          <a:lnRef idx="1">
+            <a:schemeClr val="accent1"/>
+          </a:lnRef>
+          <a:fillRef idx="3">
+            <a:schemeClr val="accent1"/>
+          </a:fillRef>
+          <a:effectRef idx="2">
+            <a:schemeClr val="accent1"/>
+          </a:effectRef>
+          <a:fontRef idx="minor">
+            <a:schemeClr val="lt1"/>
+          </a:fontRef>
+        </p:style>
+        <p:txBody>
+          <a:bodyPr rtlCol="0" anchor="ctr" lIns="0" rIns="0" tIns="0" bIns="0"/>
+          <a:lstStyle/>
+          <a:p>
+            <a:pPr algn="ctr"/>
+            <a:r>
+              <a:rPr sz="1300" b="1">
+                <a:solidFill>
+                  <a:srgbClr val="FFFFFF"/>
+                </a:solidFill>
+                <a:latin typeface="Calibri"/>
+              </a:rPr>
+              <a:t>2</a:t>
+            </a:r>
+          </a:p>
+        </p:txBody>
+      </p:sp>
+      <p:sp>
+        <p:nvSpPr>
+          <p:cNvPr id="12" name="TextBox 11"/>
+          <p:cNvSpPr txBox="1"/>
+          <p:nvPr/>
+        </p:nvSpPr>
+        <p:spPr>
+          <a:xfrm>
+            <a:off x="1143000" y="3218688"/>
+            <a:ext cx="5943600" cy="868680"/>
+          </a:xfrm>
+          <a:prstGeom prst="rect">
+            <a:avLst/>
+          </a:prstGeom>
+          <a:noFill/>
+        </p:spPr>
+        <p:txBody>
+          <a:bodyPr wrap="square" anchor="ctr" lIns="0" rIns="0" tIns="0" bIns="0"/>
+          <a:lstStyle/>
+          <a:p>
+            <a:pPr algn="l"/>
+            <a:r>
+              <a:rPr sz="1700" b="0" i="0">
+                <a:solidFill>
+                  <a:srgbClr val="202122"/>
+                </a:solidFill>
+                <a:latin typeface="Calibri"/>
+              </a:rPr>
+              <a:t>Set up the anti-static workstation.</a:t>
+            </a:r>
+          </a:p>
+        </p:txBody>
+      </p:sp>
+      <p:sp>
+        <p:nvSpPr>
+          <p:cNvPr id="13" name="Oval 12"/>
+          <p:cNvSpPr/>
+          <p:nvPr/>
+        </p:nvSpPr>
+        <p:spPr>
+          <a:xfrm>
+            <a:off x="548640" y="4439412"/>
+            <a:ext cx="384048" cy="384048"/>
+          </a:xfrm>
+          <a:prstGeom prst="ellipse">
+            <a:avLst/>
+          </a:prstGeom>
+          <a:solidFill>
+            <a:srgbClr val="0645AD"/>
+          </a:solidFill>
+          <a:ln>
+            <a:noFill/>
+          </a:ln>
+          <a:effectLst/>
+        </p:spPr>
+        <p:style>
+          <a:lnRef idx="1">
+            <a:schemeClr val="accent1"/>
+          </a:lnRef>
+          <a:fillRef idx="3">
+            <a:schemeClr val="accent1"/>
+          </a:fillRef>
+          <a:effectRef idx="2">
+            <a:schemeClr val="accent1"/>
+          </a:effectRef>
+          <a:fontRef idx="minor">
+            <a:schemeClr val="lt1"/>
+          </a:fontRef>
+        </p:style>
+        <p:txBody>
+          <a:bodyPr rtlCol="0" anchor="ctr" lIns="0" rIns="0" tIns="0" bIns="0"/>
+          <a:lstStyle/>
+          <a:p>
+            <a:pPr algn="ctr"/>
+            <a:r>
+              <a:rPr sz="1300" b="1">
+                <a:solidFill>
+                  <a:srgbClr val="FFFFFF"/>
+                </a:solidFill>
+                <a:latin typeface="Calibri"/>
+              </a:rPr>
+              <a:t>3</a:t>
+            </a:r>
+          </a:p>
+        </p:txBody>
+      </p:sp>
+      <p:sp>
+        <p:nvSpPr>
+          <p:cNvPr id="14" name="TextBox 13"/>
+          <p:cNvSpPr txBox="1"/>
+          <p:nvPr/>
+        </p:nvSpPr>
+        <p:spPr>
+          <a:xfrm>
+            <a:off x="1143000" y="4197096"/>
+            <a:ext cx="5943600" cy="868680"/>
+          </a:xfrm>
+          <a:prstGeom prst="rect">
+            <a:avLst/>
+          </a:prstGeom>
+          <a:noFill/>
+        </p:spPr>
+        <p:txBody>
+          <a:bodyPr wrap="square" anchor="ctr" lIns="0" rIns="0" tIns="0" bIns="0"/>
+          <a:lstStyle/>
+          <a:p>
+            <a:pPr algn="l"/>
+            <a:r>
+              <a:rPr sz="1700" b="0" i="0">
+                <a:solidFill>
+                  <a:srgbClr val="202122"/>
+                </a:solidFill>
+                <a:latin typeface="Calibri"/>
+              </a:rPr>
+              <a:t>Remove and replace the RAM following your assessment.</a:t>
+            </a:r>
+          </a:p>
+        </p:txBody>
+      </p:sp>
+      <p:sp>
+        <p:nvSpPr>
+          <p:cNvPr id="15" name="Oval 14"/>
+          <p:cNvSpPr/>
+          <p:nvPr/>
+        </p:nvSpPr>
+        <p:spPr>
+          <a:xfrm>
+            <a:off x="548640" y="5417820"/>
+            <a:ext cx="384048" cy="384048"/>
+          </a:xfrm>
+          <a:prstGeom prst="ellipse">
+            <a:avLst/>
+          </a:prstGeom>
+          <a:solidFill>
+            <a:srgbClr val="0645AD"/>
+          </a:solidFill>
+          <a:ln>
+            <a:noFill/>
+          </a:ln>
+          <a:effectLst/>
+        </p:spPr>
+        <p:style>
+          <a:lnRef idx="1">
+            <a:schemeClr val="accent1"/>
+          </a:lnRef>
+          <a:fillRef idx="3">
+            <a:schemeClr val="accent1"/>
+          </a:fillRef>
+          <a:effectRef idx="2">
+            <a:schemeClr val="accent1"/>
+          </a:effectRef>
+          <a:fontRef idx="minor">
+            <a:schemeClr val="lt1"/>
+          </a:fontRef>
+        </p:style>
+        <p:txBody>
+          <a:bodyPr rtlCol="0" anchor="ctr" lIns="0" rIns="0" tIns="0" bIns="0"/>
+          <a:lstStyle/>
+          <a:p>
+            <a:pPr algn="ctr"/>
+            <a:r>
+              <a:rPr sz="1300" b="1">
+                <a:solidFill>
+                  <a:srgbClr val="FFFFFF"/>
+                </a:solidFill>
+                <a:latin typeface="Calibri"/>
+              </a:rPr>
+              <a:t>4</a:t>
+            </a:r>
+          </a:p>
+        </p:txBody>
+      </p:sp>
+      <p:sp>
+        <p:nvSpPr>
+          <p:cNvPr id="16" name="TextBox 15"/>
+          <p:cNvSpPr txBox="1"/>
+          <p:nvPr/>
+        </p:nvSpPr>
+        <p:spPr>
+          <a:xfrm>
+            <a:off x="1143000" y="5175504"/>
+            <a:ext cx="5943600" cy="868680"/>
+          </a:xfrm>
+          <a:prstGeom prst="rect">
+            <a:avLst/>
+          </a:prstGeom>
+          <a:noFill/>
+        </p:spPr>
+        <p:txBody>
+          <a:bodyPr wrap="square" anchor="ctr" lIns="0" rIns="0" tIns="0" bIns="0"/>
+          <a:lstStyle/>
+          <a:p>
+            <a:pPr algn="l"/>
+            <a:r>
+              <a:rPr sz="1700" b="0" i="0">
+                <a:solidFill>
+                  <a:srgbClr val="202122"/>
+                </a:solidFill>
+                <a:latin typeface="Calibri"/>
+              </a:rPr>
+              <a:t>Record the outcome and any issues.</a:t>
+            </a:r>
+          </a:p>
+        </p:txBody>
+      </p:sp>
+      <p:sp>
+        <p:nvSpPr>
+          <p:cNvPr id="17" name="Rounded Rectangle 16"/>
+          <p:cNvSpPr/>
+          <p:nvPr/>
+        </p:nvSpPr>
+        <p:spPr>
+          <a:xfrm>
+            <a:off x="7772400" y="1508760"/>
+            <a:ext cx="3867912" cy="4572000"/>
+          </a:xfrm>
+          <a:prstGeom prst="roundRect">
+            <a:avLst>
+              <a:gd name="adj" fmla="val 8000"/>
+            </a:avLst>
+          </a:prstGeom>
+          <a:solidFill>
+            <a:srgbClr val="EAF3FF"/>
+          </a:solidFill>
+          <a:ln>
+            <a:noFill/>
+          </a:ln>
+          <a:effectLst/>
+        </p:spPr>
+        <p:style>
+          <a:lnRef idx="1">
+            <a:schemeClr val="accent1"/>
+          </a:lnRef>
+          <a:fillRef idx="3">
+            <a:schemeClr val="accent1"/>
+          </a:fillRef>
+          <a:effectRef idx="2">
+            <a:schemeClr val="accent1"/>
+          </a:effectRef>
+          <a:fontRef idx="minor">
+            <a:schemeClr val="lt1"/>
+          </a:fontRef>
+        </p:style>
+        <p:txBody>
+          <a:bodyPr rtlCol="0" anchor="ctr"/>
+          <a:lstStyle/>
+          <a:p/>
+        </p:txBody>
+      </p:sp>
+      <p:sp>
+        <p:nvSpPr>
+          <p:cNvPr id="18" name="TextBox 17"/>
+          <p:cNvSpPr txBox="1"/>
+          <p:nvPr/>
+        </p:nvSpPr>
+        <p:spPr>
+          <a:xfrm>
+            <a:off x="8046720" y="1737360"/>
+            <a:ext cx="3291840" cy="365760"/>
+          </a:xfrm>
+          <a:prstGeom prst="rect">
+            <a:avLst/>
+          </a:prstGeom>
+          <a:noFill/>
+        </p:spPr>
+        <p:txBody>
+          <a:bodyPr wrap="square" anchor="t" lIns="0" rIns="0" tIns="0" bIns="0"/>
+          <a:lstStyle/>
+          <a:p>
+            <a:pPr algn="l"/>
+            <a:r>
+              <a:rPr sz="1300" b="1" i="0">
+                <a:solidFill>
+                  <a:srgbClr val="0645AD"/>
+                </a:solidFill>
+                <a:latin typeface="Calibri"/>
+              </a:rPr>
+              <a:t>SUCCESS CRITERIA</a:t>
+            </a:r>
+          </a:p>
+        </p:txBody>
+      </p:sp>
+      <p:sp>
+        <p:nvSpPr>
+          <p:cNvPr id="19" name="TextBox 18"/>
+          <p:cNvSpPr txBox="1"/>
+          <p:nvPr/>
+        </p:nvSpPr>
+        <p:spPr>
+          <a:xfrm>
+            <a:off x="8046720" y="2240280"/>
+            <a:ext cx="3337560" cy="3657600"/>
+          </a:xfrm>
+          <a:prstGeom prst="rect">
+            <a:avLst/>
+          </a:prstGeom>
+          <a:noFill/>
+        </p:spPr>
+        <p:txBody>
+          <a:bodyPr wrap="square" lIns="0" rIns="0" tIns="0" bIns="0">
+            <a:spAutoFit/>
+          </a:bodyPr>
+          <a:lstStyle/>
+          <a:p>
+            <a:pPr marL="274320" indent="-274320">
+              <a:spcAft>
+                <a:spcPts val="810"/>
+              </a:spcAft>
+              <a:buClr>
+                <a:srgbClr val="0645AD"/>
+              </a:buClr>
+              <a:buFont typeface="Arial"/>
+              <a:buChar char="•"/>
+            </a:pPr>
+            <a:r>
+              <a:rPr sz="1800" b="0">
+                <a:solidFill>
+                  <a:srgbClr val="202122"/>
+                </a:solidFill>
+                <a:latin typeface="Calibri"/>
+              </a:rPr>
+              <a:t>Risk assessment completed before starting</a:t>
+            </a:r>
+          </a:p>
+          <a:p>
+            <a:pPr marL="274320" indent="-274320">
+              <a:spcAft>
+                <a:spcPts val="810"/>
+              </a:spcAft>
+              <a:buClr>
+                <a:srgbClr val="0645AD"/>
+              </a:buClr>
+              <a:buFont typeface="Arial"/>
+              <a:buChar char="•"/>
+            </a:pPr>
+            <a:r>
+              <a:rPr sz="1800" b="0">
+                <a:solidFill>
+                  <a:srgbClr val="202122"/>
+                </a:solidFill>
+                <a:latin typeface="Calibri"/>
+              </a:rPr>
+              <a:t>Wrist strap used correctly</a:t>
+            </a:r>
+          </a:p>
+          <a:p>
+            <a:pPr marL="274320" indent="-274320">
+              <a:spcAft>
+                <a:spcPts val="810"/>
+              </a:spcAft>
+              <a:buClr>
+                <a:srgbClr val="0645AD"/>
+              </a:buClr>
+              <a:buFont typeface="Arial"/>
+              <a:buChar char="•"/>
+            </a:pPr>
+            <a:r>
+              <a:rPr sz="1800" b="0">
+                <a:solidFill>
+                  <a:srgbClr val="202122"/>
+                </a:solidFill>
+                <a:latin typeface="Calibri"/>
+              </a:rPr>
+              <a:t>PC boots and detects the RAM</a:t>
+            </a:r>
+          </a:p>
+        </p:txBody>
+      </p:sp>
+    </p:spTree>
+  </p:cSld>
+  <p:clrMapOvr>
+    <a:masterClrMapping/>
+  </p:clrMapOvr>
+</p:sld>
+</file>
+
+<file path=ppt/slides/slide13.xml><?xml version="1.0" encoding="utf-8"?>
+<p:sld xmlns:a="http://schemas.openxmlformats.org/drawingml/2006/main" xmlns:p="http://schemas.openxmlformats.org/presentationml/2006/main" xmlns:r="http://schemas.openxmlformats.org/officeDocument/2006/relationships">
+  <p:cSld>
+    <p:bg>
+      <p:bgPr>
+        <a:solidFill>
+          <a:srgbClr val="03306E"/>
+        </a:solidFill>
+        <a:effectLst/>
+      </p:bgPr>
+    </p:bg>
+    <p:spTree>
+      <p:nvGrpSpPr>
+        <p:cNvPr id="1" name=""/>
+        <p:cNvGrpSpPr/>
+        <p:nvPr/>
+      </p:nvGrpSpPr>
+      <p:grpSpPr/>
+      <p:sp>
+        <p:nvSpPr>
+          <p:cNvPr id="2" name="TextBox 1"/>
+          <p:cNvSpPr txBox="1"/>
+          <p:nvPr/>
+        </p:nvSpPr>
+        <p:spPr>
+          <a:xfrm>
+            <a:off x="548640" y="320040"/>
+            <a:ext cx="11094415" cy="274320"/>
+          </a:xfrm>
+          <a:prstGeom prst="rect">
+            <a:avLst/>
+          </a:prstGeom>
+          <a:noFill/>
+        </p:spPr>
+        <p:txBody>
+          <a:bodyPr wrap="square" anchor="t" lIns="0" rIns="0" tIns="0" bIns="0"/>
+          <a:lstStyle/>
+          <a:p>
+            <a:pPr algn="l"/>
+            <a:r>
+              <a:rPr sz="1100" b="1" i="0">
+                <a:solidFill>
+                  <a:srgbClr val="A9C8F0"/>
+                </a:solidFill>
+                <a:latin typeface="Calibri"/>
+              </a:rPr>
+              <a:t>DIGITAL INFRASTRUCTURE  ·  Digital Infrastructure Content Area 2</a:t>
+            </a:r>
+          </a:p>
+        </p:txBody>
+      </p:sp>
+      <p:sp>
+        <p:nvSpPr>
+          <p:cNvPr id="3" name="TextBox 2"/>
+          <p:cNvSpPr txBox="1"/>
+          <p:nvPr/>
+        </p:nvSpPr>
+        <p:spPr>
+          <a:xfrm>
+            <a:off x="548640" y="566928"/>
+            <a:ext cx="11094415" cy="822960"/>
+          </a:xfrm>
+          <a:prstGeom prst="rect">
+            <a:avLst/>
+          </a:prstGeom>
+          <a:noFill/>
+        </p:spPr>
+        <p:txBody>
+          <a:bodyPr wrap="square" anchor="ctr" lIns="0" rIns="0" tIns="0" bIns="0"/>
+          <a:lstStyle/>
+          <a:p>
+            <a:pPr algn="l"/>
+            <a:r>
+              <a:rPr sz="3200" b="1" i="0">
+                <a:solidFill>
+                  <a:srgbClr val="FFFFFF"/>
+                </a:solidFill>
+                <a:latin typeface="Cambria"/>
+              </a:rPr>
+              <a:t>Exit ticket</a:t>
+            </a:r>
+          </a:p>
+        </p:txBody>
+      </p:sp>
+      <p:sp>
+        <p:nvSpPr>
+          <p:cNvPr id="4" name="Oval 3"/>
+          <p:cNvSpPr/>
+          <p:nvPr/>
+        </p:nvSpPr>
+        <p:spPr>
+          <a:xfrm>
+            <a:off x="548640" y="1737360"/>
+            <a:ext cx="502920" cy="502920"/>
+          </a:xfrm>
+          <a:prstGeom prst="ellipse">
+            <a:avLst/>
+          </a:prstGeom>
+          <a:solidFill>
+            <a:srgbClr val="33C17A"/>
+          </a:solidFill>
+          <a:ln>
+            <a:noFill/>
+          </a:ln>
+          <a:effectLst/>
+        </p:spPr>
+        <p:style>
+          <a:lnRef idx="1">
+            <a:schemeClr val="accent1"/>
+          </a:lnRef>
+          <a:fillRef idx="3">
+            <a:schemeClr val="accent1"/>
+          </a:fillRef>
+          <a:effectRef idx="2">
+            <a:schemeClr val="accent1"/>
+          </a:effectRef>
+          <a:fontRef idx="minor">
+            <a:schemeClr val="lt1"/>
+          </a:fontRef>
+        </p:style>
+        <p:txBody>
+          <a:bodyPr rtlCol="0" anchor="ctr" lIns="0" rIns="0" tIns="0" bIns="0"/>
+          <a:lstStyle/>
+          <a:p>
+            <a:pPr algn="ctr"/>
+            <a:r>
+              <a:rPr sz="1700" b="1">
+                <a:solidFill>
+                  <a:srgbClr val="202122"/>
+                </a:solidFill>
+                <a:latin typeface="Calibri"/>
+              </a:rPr>
+              <a:t>1</a:t>
+            </a:r>
+          </a:p>
+        </p:txBody>
+      </p:sp>
+      <p:sp>
+        <p:nvSpPr>
+          <p:cNvPr id="5" name="TextBox 4"/>
+          <p:cNvSpPr txBox="1"/>
+          <p:nvPr/>
+        </p:nvSpPr>
+        <p:spPr>
+          <a:xfrm>
+            <a:off x="1325880" y="1645920"/>
+            <a:ext cx="6583680" cy="822960"/>
+          </a:xfrm>
+          <a:prstGeom prst="rect">
+            <a:avLst/>
+          </a:prstGeom>
+          <a:noFill/>
+        </p:spPr>
+        <p:txBody>
+          <a:bodyPr wrap="square" anchor="ctr" lIns="0" rIns="0" tIns="0" bIns="0"/>
+          <a:lstStyle/>
+          <a:p>
+            <a:pPr algn="l"/>
+            <a:r>
+              <a:rPr sz="2000" b="0" i="0">
+                <a:solidFill>
+                  <a:srgbClr val="FFFFFF"/>
+                </a:solidFill>
+                <a:latin typeface="Calibri"/>
+              </a:rPr>
+              <a:t>Name one environmental factor that affects static.</a:t>
+            </a:r>
+          </a:p>
+        </p:txBody>
+      </p:sp>
+      <p:sp>
+        <p:nvSpPr>
+          <p:cNvPr id="6" name="Oval 5"/>
+          <p:cNvSpPr/>
+          <p:nvPr/>
+        </p:nvSpPr>
+        <p:spPr>
+          <a:xfrm>
+            <a:off x="548640" y="2697480"/>
+            <a:ext cx="502920" cy="502920"/>
+          </a:xfrm>
+          <a:prstGeom prst="ellipse">
+            <a:avLst/>
+          </a:prstGeom>
+          <a:solidFill>
+            <a:srgbClr val="33C17A"/>
+          </a:solidFill>
+          <a:ln>
+            <a:noFill/>
+          </a:ln>
+          <a:effectLst/>
+        </p:spPr>
+        <p:style>
+          <a:lnRef idx="1">
+            <a:schemeClr val="accent1"/>
+          </a:lnRef>
+          <a:fillRef idx="3">
+            <a:schemeClr val="accent1"/>
+          </a:fillRef>
+          <a:effectRef idx="2">
+            <a:schemeClr val="accent1"/>
+          </a:effectRef>
+          <a:fontRef idx="minor">
+            <a:schemeClr val="lt1"/>
+          </a:fontRef>
+        </p:style>
+        <p:txBody>
+          <a:bodyPr rtlCol="0" anchor="ctr" lIns="0" rIns="0" tIns="0" bIns="0"/>
+          <a:lstStyle/>
+          <a:p>
+            <a:pPr algn="ctr"/>
+            <a:r>
+              <a:rPr sz="1700" b="1">
+                <a:solidFill>
+                  <a:srgbClr val="202122"/>
+                </a:solidFill>
+                <a:latin typeface="Calibri"/>
+              </a:rPr>
+              <a:t>2</a:t>
+            </a:r>
+          </a:p>
+        </p:txBody>
+      </p:sp>
+      <p:sp>
+        <p:nvSpPr>
+          <p:cNvPr id="7" name="TextBox 6"/>
+          <p:cNvSpPr txBox="1"/>
+          <p:nvPr/>
+        </p:nvSpPr>
+        <p:spPr>
+          <a:xfrm>
+            <a:off x="1325880" y="2606040"/>
+            <a:ext cx="6583680" cy="822960"/>
+          </a:xfrm>
+          <a:prstGeom prst="rect">
+            <a:avLst/>
+          </a:prstGeom>
+          <a:noFill/>
+        </p:spPr>
+        <p:txBody>
+          <a:bodyPr wrap="square" anchor="ctr" lIns="0" rIns="0" tIns="0" bIns="0"/>
+          <a:lstStyle/>
+          <a:p>
+            <a:pPr algn="l"/>
+            <a:r>
+              <a:rPr sz="2000" b="0" i="0">
+                <a:solidFill>
+                  <a:srgbClr val="FFFFFF"/>
+                </a:solidFill>
+                <a:latin typeface="Calibri"/>
+              </a:rPr>
+              <a:t>Which Act sets out the employer's duty of care?</a:t>
+            </a:r>
+          </a:p>
+        </p:txBody>
+      </p:sp>
+      <p:sp>
+        <p:nvSpPr>
+          <p:cNvPr id="8" name="Oval 7"/>
+          <p:cNvSpPr/>
+          <p:nvPr/>
+        </p:nvSpPr>
+        <p:spPr>
+          <a:xfrm>
+            <a:off x="548640" y="3657600"/>
+            <a:ext cx="502920" cy="502920"/>
+          </a:xfrm>
+          <a:prstGeom prst="ellipse">
+            <a:avLst/>
+          </a:prstGeom>
+          <a:solidFill>
+            <a:srgbClr val="33C17A"/>
+          </a:solidFill>
+          <a:ln>
+            <a:noFill/>
+          </a:ln>
+          <a:effectLst/>
+        </p:spPr>
+        <p:style>
+          <a:lnRef idx="1">
+            <a:schemeClr val="accent1"/>
+          </a:lnRef>
+          <a:fillRef idx="3">
+            <a:schemeClr val="accent1"/>
+          </a:fillRef>
+          <a:effectRef idx="2">
+            <a:schemeClr val="accent1"/>
+          </a:effectRef>
+          <a:fontRef idx="minor">
+            <a:schemeClr val="lt1"/>
+          </a:fontRef>
+        </p:style>
+        <p:txBody>
+          <a:bodyPr rtlCol="0" anchor="ctr" lIns="0" rIns="0" tIns="0" bIns="0"/>
+          <a:lstStyle/>
+          <a:p>
+            <a:pPr algn="ctr"/>
+            <a:r>
+              <a:rPr sz="1700" b="1">
+                <a:solidFill>
+                  <a:srgbClr val="202122"/>
+                </a:solidFill>
+                <a:latin typeface="Calibri"/>
+              </a:rPr>
+              <a:t>3</a:t>
+            </a:r>
+          </a:p>
+        </p:txBody>
+      </p:sp>
+      <p:sp>
+        <p:nvSpPr>
+          <p:cNvPr id="9" name="TextBox 8"/>
+          <p:cNvSpPr txBox="1"/>
+          <p:nvPr/>
+        </p:nvSpPr>
+        <p:spPr>
+          <a:xfrm>
+            <a:off x="1325880" y="3566160"/>
+            <a:ext cx="6583680" cy="822960"/>
+          </a:xfrm>
+          <a:prstGeom prst="rect">
+            <a:avLst/>
+          </a:prstGeom>
+          <a:noFill/>
+        </p:spPr>
+        <p:txBody>
+          <a:bodyPr wrap="square" anchor="ctr" lIns="0" rIns="0" tIns="0" bIns="0"/>
+          <a:lstStyle/>
+          <a:p>
+            <a:pPr algn="l"/>
+            <a:r>
+              <a:rPr sz="2000" b="0" i="0">
+                <a:solidFill>
+                  <a:srgbClr val="FFFFFF"/>
+                </a:solidFill>
+                <a:latin typeface="Calibri"/>
+              </a:rPr>
+              <a:t>What should you do before opening a PC case?</a:t>
+            </a:r>
+          </a:p>
+        </p:txBody>
+      </p:sp>
+      <p:sp>
+        <p:nvSpPr>
+          <p:cNvPr id="10" name="Rounded Rectangle 9"/>
+          <p:cNvSpPr/>
+          <p:nvPr/>
+        </p:nvSpPr>
+        <p:spPr>
+          <a:xfrm>
+            <a:off x="8229600" y="1645920"/>
+            <a:ext cx="3410712" cy="2926080"/>
+          </a:xfrm>
+          <a:prstGeom prst="roundRect">
+            <a:avLst>
+              <a:gd name="adj" fmla="val 8000"/>
+            </a:avLst>
+          </a:prstGeom>
+          <a:solidFill>
+            <a:srgbClr val="0645AD"/>
+          </a:solidFill>
+          <a:ln>
+            <a:noFill/>
+          </a:ln>
+          <a:effectLst/>
+        </p:spPr>
+        <p:style>
+          <a:lnRef idx="1">
+            <a:schemeClr val="accent1"/>
+          </a:lnRef>
+          <a:fillRef idx="3">
+            <a:schemeClr val="accent1"/>
+          </a:fillRef>
+          <a:effectRef idx="2">
+            <a:schemeClr val="accent1"/>
+          </a:effectRef>
+          <a:fontRef idx="minor">
+            <a:schemeClr val="lt1"/>
+          </a:fontRef>
+        </p:style>
+        <p:txBody>
+          <a:bodyPr rtlCol="0" anchor="ctr"/>
+          <a:lstStyle/>
+          <a:p/>
+        </p:txBody>
+      </p:sp>
+      <p:sp>
+        <p:nvSpPr>
+          <p:cNvPr id="11" name="TextBox 10"/>
+          <p:cNvSpPr txBox="1"/>
+          <p:nvPr/>
+        </p:nvSpPr>
+        <p:spPr>
+          <a:xfrm>
+            <a:off x="8503920" y="1874519"/>
+            <a:ext cx="2926080" cy="365760"/>
+          </a:xfrm>
+          <a:prstGeom prst="rect">
+            <a:avLst/>
+          </a:prstGeom>
+          <a:noFill/>
+        </p:spPr>
+        <p:txBody>
+          <a:bodyPr wrap="square" anchor="t" lIns="0" rIns="0" tIns="0" bIns="0"/>
+          <a:lstStyle/>
+          <a:p>
+            <a:pPr algn="l"/>
+            <a:r>
+              <a:rPr sz="1300" b="1" i="0">
+                <a:solidFill>
+                  <a:srgbClr val="A9C8F0"/>
+                </a:solidFill>
+                <a:latin typeface="Calibri"/>
+              </a:rPr>
+              <a:t>REVISE THIS TOPIC</a:t>
+            </a:r>
+          </a:p>
+        </p:txBody>
+      </p:sp>
+      <p:sp>
+        <p:nvSpPr>
+          <p:cNvPr id="12" name="TextBox 11"/>
+          <p:cNvSpPr txBox="1"/>
+          <p:nvPr/>
+        </p:nvSpPr>
+        <p:spPr>
+          <a:xfrm>
+            <a:off x="8503920" y="2286000"/>
+            <a:ext cx="2926080" cy="548640"/>
+          </a:xfrm>
+          <a:prstGeom prst="rect">
+            <a:avLst/>
+          </a:prstGeom>
+          <a:noFill/>
+        </p:spPr>
+        <p:txBody>
+          <a:bodyPr wrap="square" anchor="t" lIns="0" rIns="0" tIns="0" bIns="0"/>
+          <a:lstStyle/>
+          <a:p>
+            <a:pPr algn="l"/>
+            <a:r>
+              <a:rPr sz="1400" b="0" i="0">
+                <a:solidFill>
+                  <a:srgbClr val="FFFFFF"/>
+                </a:solidFill>
+                <a:latin typeface="Calibri"/>
+              </a:rPr>
+              <a:t>Revision notes for this lesson are on the study wiki:</a:t>
+            </a:r>
+          </a:p>
+        </p:txBody>
+      </p:sp>
+      <p:sp>
+        <p:nvSpPr>
+          <p:cNvPr id="13" name="TextBox 12"/>
+          <p:cNvSpPr txBox="1"/>
+          <p:nvPr/>
+        </p:nvSpPr>
+        <p:spPr>
+          <a:xfrm>
+            <a:off x="8503920" y="2926080"/>
+            <a:ext cx="2926080" cy="1463040"/>
+          </a:xfrm>
+          <a:prstGeom prst="rect">
+            <a:avLst/>
+          </a:prstGeom>
+          <a:noFill/>
+        </p:spPr>
+        <p:txBody>
+          <a:bodyPr wrap="square" anchor="t" lIns="0" rIns="0" tIns="0" bIns="0"/>
+          <a:lstStyle/>
+          <a:p>
+            <a:pPr algn="l"/>
+            <a:r>
+              <a:rPr sz="2000" b="1" i="0">
+                <a:solidFill>
+                  <a:srgbClr val="FFFFFF"/>
+                </a:solidFill>
+                <a:latin typeface="Cambria"/>
+              </a:rPr>
+              <a:t>Digital Infrastructure - Physical and Virtual Infrastructure</a:t>
+            </a:r>
+          </a:p>
+        </p:txBody>
+      </p:sp>
+      <p:sp>
+        <p:nvSpPr>
+          <p:cNvPr id="14" name="TextBox 13"/>
+          <p:cNvSpPr txBox="1"/>
+          <p:nvPr/>
+        </p:nvSpPr>
+        <p:spPr>
+          <a:xfrm>
+            <a:off x="548640" y="5669280"/>
+            <a:ext cx="11094415" cy="548640"/>
+          </a:xfrm>
+          <a:prstGeom prst="rect">
+            <a:avLst/>
+          </a:prstGeom>
+          <a:noFill/>
+        </p:spPr>
+        <p:txBody>
+          <a:bodyPr wrap="square" anchor="t" lIns="0" rIns="0" tIns="0" bIns="0"/>
+          <a:lstStyle/>
+          <a:p>
+            <a:pPr algn="l"/>
+            <a:r>
+              <a:rPr sz="1200" b="0" i="0">
+                <a:solidFill>
+                  <a:srgbClr val="A9C8F0"/>
+                </a:solidFill>
+                <a:latin typeface="Calibri"/>
+              </a:rPr>
+              <a:t>https://lana6478.github.io/Digital-Suport-and-security-T-levle/#/02-occupational-specialisms/digital-infrastructure/02-physical-and-virtual-infrastructure.md</a:t>
+            </a:r>
+          </a:p>
+        </p:txBody>
+      </p:sp>
+    </p:spTree>
+  </p:cSld>
+  <p:clrMapOvr>
+    <a:masterClrMapping/>
+  </p:clrMapOvr>
+</p:sld>
+</file>
+
 <file path=ppt/slides/slide2.xml><?xml version="1.0" encoding="utf-8"?>
 <p:sld xmlns:a="http://schemas.openxmlformats.org/drawingml/2006/main" xmlns:p="http://schemas.openxmlformats.org/presentationml/2006/main" xmlns:r="http://schemas.openxmlformats.org/officeDocument/2006/relationships">
   <p:cSld>
@@ -4762,8 +7285,8 @@
         </p:nvSpPr>
         <p:spPr>
           <a:xfrm>
-            <a:off x="548640" y="1600200"/>
-            <a:ext cx="6675120" cy="4572000"/>
+            <a:off x="548640" y="1554480"/>
+            <a:ext cx="6720840" cy="4617720"/>
           </a:xfrm>
           <a:prstGeom prst="rect">
             <a:avLst/>
@@ -4776,96 +7299,60 @@
           </a:bodyPr>
           <a:lstStyle/>
           <a:p>
-            <a:pPr marL="274320" indent="-274320">
+            <a:pPr>
               <a:spcAft>
-                <a:spcPts val="1080"/>
+                <a:spcPts val="1200"/>
               </a:spcAft>
-              <a:buClr>
-                <a:srgbClr val="0645AD"/>
-              </a:buClr>
-              <a:buFont typeface="Arial"/>
-              <a:buChar char="•"/>
             </a:pPr>
             <a:r>
-              <a:rPr sz="2400" b="0">
+              <a:rPr sz="2000" b="0">
                 <a:solidFill>
                   <a:srgbClr val="202122"/>
                 </a:solidFill>
                 <a:latin typeface="Calibri"/>
               </a:rPr>
-              <a:t>Limit movement while handling components.</a:t>
-            </a:r>
-          </a:p>
-          <a:p>
-            <a:pPr marL="274320" indent="-274320">
+              <a:t>Electrostatic discharge (ESD) is a sudden flow of static electricity, like the shock from a door handle. A discharge far too small to feel can destroy the tiny circuits in memory, processors and circuit boards.</a:t>
+            </a:r>
+          </a:p>
+          <a:p>
+            <a:pPr>
               <a:spcAft>
-                <a:spcPts val="1080"/>
+                <a:spcPts val="1200"/>
               </a:spcAft>
-              <a:buClr>
-                <a:srgbClr val="0645AD"/>
-              </a:buClr>
-              <a:buFont typeface="Arial"/>
-              <a:buChar char="•"/>
             </a:pPr>
             <a:r>
-              <a:rPr sz="2400" b="0">
+              <a:rPr sz="2000" b="1">
                 <a:solidFill>
                   <a:srgbClr val="202122"/>
                 </a:solidFill>
                 <a:latin typeface="Calibri"/>
               </a:rPr>
-              <a:t>Check temperature and humidity in the work area.</a:t>
-            </a:r>
-          </a:p>
-          <a:p>
-            <a:pPr marL="274320" indent="-274320">
+              <a:t>Damage isn't always obvious:</a:t>
+            </a:r>
+            <a:r>
+              <a:rPr sz="2000" b="0">
+                <a:solidFill>
+                  <a:srgbClr val="202122"/>
+                </a:solidFill>
+                <a:latin typeface="Calibri"/>
+              </a:rPr>
+              <a:t> a component may seem fine then fail weeks later.</a:t>
+            </a:r>
+          </a:p>
+          <a:p>
+            <a:pPr>
               <a:spcAft>
-                <a:spcPts val="1080"/>
+                <a:spcPts val="1200"/>
               </a:spcAft>
-              <a:buClr>
-                <a:srgbClr val="0645AD"/>
-              </a:buClr>
-              <a:buFont typeface="Arial"/>
-              <a:buChar char="•"/>
             </a:pPr>
             <a:r>
-              <a:rPr sz="2400" b="1">
+              <a:rPr sz="2000" b="0">
                 <a:solidFill>
                   <a:srgbClr val="202122"/>
                 </a:solidFill>
                 <a:latin typeface="Calibri"/>
               </a:rPr>
-              <a:t>Use anti-static equipment:</a:t>
-            </a:r>
-            <a:r>
-              <a:rPr sz="2400" b="0">
-                <a:solidFill>
-                  <a:srgbClr val="202122"/>
-                </a:solidFill>
-                <a:latin typeface="Calibri"/>
-              </a:rPr>
-              <a:t> wrist straps, mats and bags.</a:t>
-            </a:r>
-          </a:p>
-          <a:p>
-            <a:pPr marL="274320" indent="-274320">
-              <a:spcAft>
-                <a:spcPts val="1080"/>
-              </a:spcAft>
-              <a:buClr>
-                <a:srgbClr val="0645AD"/>
-              </a:buClr>
-              <a:buFont typeface="Arial"/>
-              <a:buChar char="•"/>
-            </a:pPr>
-            <a:r>
-              <a:rPr sz="2400" b="0">
-                <a:solidFill>
-                  <a:srgbClr val="202122"/>
-                </a:solidFill>
-                <a:latin typeface="Calibri"/>
-              </a:rPr>
-              <a:t>Handle components by the edges and keep them in anti-static bags until needed.</a:t>
+              <a:t>Reduce the risk by limiting movement while handling parts, checking temperature and humidity (static builds up more in dry air), wearing an anti-static wrist strap connected to earth, working on an anti-static mat, holding boards by their edges and keeping components in anti-static bags until needed.</a:t>
             </a:r>
           </a:p>
         </p:txBody>
@@ -4878,8 +7365,8 @@
         </p:nvSpPr>
         <p:spPr>
           <a:xfrm>
-            <a:off x="7772400" y="1600200"/>
-            <a:ext cx="3867912" cy="4434840"/>
+            <a:off x="7772400" y="1554480"/>
+            <a:ext cx="3867912" cy="4526280"/>
           </a:xfrm>
           <a:prstGeom prst="roundRect">
             <a:avLst>
@@ -4922,7 +7409,7 @@
         </p:nvSpPr>
         <p:spPr>
           <a:xfrm>
-            <a:off x="8046720" y="1874519"/>
+            <a:off x="8046720" y="1828800"/>
             <a:ext cx="548640" cy="548640"/>
           </a:xfrm>
           <a:prstGeom prst="ellipse">
@@ -4956,13 +7443,13 @@
           <a:p>
             <a:pPr algn="ctr"/>
             <a:r>
-              <a:rPr sz="2000" b="1">
+              <a:rPr sz="1300" b="1">
                 <a:solidFill>
                   <a:srgbClr val="202122"/>
                 </a:solidFill>
                 <a:latin typeface="Calibri"/>
               </a:rPr>
-              <a:t>!</a:t>
+              <a:t>e.g.</a:t>
             </a:r>
           </a:p>
         </p:txBody>
@@ -4975,7 +7462,7 @@
         </p:nvSpPr>
         <p:spPr>
           <a:xfrm>
-            <a:off x="8046720" y="2606040"/>
+            <a:off x="8046720" y="2560320"/>
             <a:ext cx="3291840" cy="365760"/>
           </a:xfrm>
           <a:prstGeom prst="rect">
@@ -4995,7 +7482,7 @@
                 </a:solidFill>
                 <a:latin typeface="Calibri"/>
               </a:rPr>
-              <a:t>KEY IDEA</a:t>
+              <a:t>EXAMPLE</a:t>
             </a:r>
           </a:p>
         </p:txBody>
@@ -5008,8 +7495,8 @@
         </p:nvSpPr>
         <p:spPr>
           <a:xfrm>
-            <a:off x="8046720" y="3017520"/>
-            <a:ext cx="3291840" cy="2926080"/>
+            <a:off x="8046720" y="2971800"/>
+            <a:ext cx="3291840" cy="2971800"/>
           </a:xfrm>
           <a:prstGeom prst="rect">
             <a:avLst/>
@@ -5022,13 +7509,13 @@
           <a:p>
             <a:pPr algn="l"/>
             <a:r>
-              <a:rPr sz="2200" b="0" i="0">
+              <a:rPr sz="1900" b="0" i="0">
                 <a:solidFill>
                   <a:srgbClr val="FFFFFF"/>
                 </a:solidFill>
                 <a:latin typeface="Cambria"/>
               </a:rPr>
-              <a:t>ESD damage is often invisible. A component can seem fine and fail weeks later.</a:t>
+              <a:t>Upgrading RAM: power off and unplug, clip on the wrist strap, touch the case, then handle the module by its edges only.</a:t>
             </a:r>
           </a:p>
         </p:txBody>
@@ -5120,7 +7607,7 @@
                 </a:solidFill>
                 <a:latin typeface="Cambria"/>
               </a:rPr>
-              <a:t>Risk managing ESD</a:t>
+              <a:t>Preventing electrostatic discharge</a:t>
             </a:r>
           </a:p>
         </p:txBody>
@@ -5193,20 +7680,138 @@
       </p:sp>
       <p:sp>
         <p:nvSpPr>
-          <p:cNvPr id="6" name="Rectangle 5"/>
+          <p:cNvPr id="6" name="TextBox 5"/>
+          <p:cNvSpPr txBox="1"/>
+          <p:nvPr/>
+        </p:nvSpPr>
+        <p:spPr>
+          <a:xfrm>
+            <a:off x="548640" y="1600200"/>
+            <a:ext cx="6675120" cy="4572000"/>
+          </a:xfrm>
+          <a:prstGeom prst="rect">
+            <a:avLst/>
+          </a:prstGeom>
+          <a:noFill/>
+        </p:spPr>
+        <p:txBody>
+          <a:bodyPr wrap="square" lIns="0" rIns="0" tIns="0" bIns="0">
+            <a:spAutoFit/>
+          </a:bodyPr>
+          <a:lstStyle/>
+          <a:p>
+            <a:pPr marL="274320" indent="-274320">
+              <a:spcAft>
+                <a:spcPts val="1080"/>
+              </a:spcAft>
+              <a:buClr>
+                <a:srgbClr val="0645AD"/>
+              </a:buClr>
+              <a:buFont typeface="Arial"/>
+              <a:buChar char="•"/>
+            </a:pPr>
+            <a:r>
+              <a:rPr sz="2400" b="0">
+                <a:solidFill>
+                  <a:srgbClr val="202122"/>
+                </a:solidFill>
+                <a:latin typeface="Calibri"/>
+              </a:rPr>
+              <a:t>Limit movement while handling components.</a:t>
+            </a:r>
+          </a:p>
+          <a:p>
+            <a:pPr marL="274320" indent="-274320">
+              <a:spcAft>
+                <a:spcPts val="1080"/>
+              </a:spcAft>
+              <a:buClr>
+                <a:srgbClr val="0645AD"/>
+              </a:buClr>
+              <a:buFont typeface="Arial"/>
+              <a:buChar char="•"/>
+            </a:pPr>
+            <a:r>
+              <a:rPr sz="2400" b="0">
+                <a:solidFill>
+                  <a:srgbClr val="202122"/>
+                </a:solidFill>
+                <a:latin typeface="Calibri"/>
+              </a:rPr>
+              <a:t>Check temperature and humidity in the work area.</a:t>
+            </a:r>
+          </a:p>
+          <a:p>
+            <a:pPr marL="274320" indent="-274320">
+              <a:spcAft>
+                <a:spcPts val="1080"/>
+              </a:spcAft>
+              <a:buClr>
+                <a:srgbClr val="0645AD"/>
+              </a:buClr>
+              <a:buFont typeface="Arial"/>
+              <a:buChar char="•"/>
+            </a:pPr>
+            <a:r>
+              <a:rPr sz="2400" b="1">
+                <a:solidFill>
+                  <a:srgbClr val="202122"/>
+                </a:solidFill>
+                <a:latin typeface="Calibri"/>
+              </a:rPr>
+              <a:t>Use anti-static equipment:</a:t>
+            </a:r>
+            <a:r>
+              <a:rPr sz="2400" b="0">
+                <a:solidFill>
+                  <a:srgbClr val="202122"/>
+                </a:solidFill>
+                <a:latin typeface="Calibri"/>
+              </a:rPr>
+              <a:t> wrist straps, mats and bags.</a:t>
+            </a:r>
+          </a:p>
+          <a:p>
+            <a:pPr marL="274320" indent="-274320">
+              <a:spcAft>
+                <a:spcPts val="1080"/>
+              </a:spcAft>
+              <a:buClr>
+                <a:srgbClr val="0645AD"/>
+              </a:buClr>
+              <a:buFont typeface="Arial"/>
+              <a:buChar char="•"/>
+            </a:pPr>
+            <a:r>
+              <a:rPr sz="2400" b="0">
+                <a:solidFill>
+                  <a:srgbClr val="202122"/>
+                </a:solidFill>
+                <a:latin typeface="Calibri"/>
+              </a:rPr>
+              <a:t>Handle components by the edges and keep them in anti-static bags until needed.</a:t>
+            </a:r>
+          </a:p>
+        </p:txBody>
+      </p:sp>
+      <p:sp>
+        <p:nvSpPr>
+          <p:cNvPr id="7" name="Rounded Rectangle 6"/>
           <p:cNvSpPr/>
           <p:nvPr/>
         </p:nvSpPr>
         <p:spPr>
           <a:xfrm>
-            <a:off x="1603217" y="2793492"/>
-            <a:ext cx="8985260" cy="36576"/>
-          </a:xfrm>
-          <a:prstGeom prst="rect">
-            <a:avLst/>
+            <a:off x="7772400" y="1600200"/>
+            <a:ext cx="3867912" cy="4434840"/>
+          </a:xfrm>
+          <a:prstGeom prst="roundRect">
+            <a:avLst>
+              <a:gd name="adj" fmla="val 8000"/>
+            </a:avLst>
           </a:prstGeom>
           <a:solidFill>
-            <a:srgbClr val="A9C8F0"/>
+            <a:srgbClr val="03306E"/>
           </a:solidFill>
           <a:ln>
             <a:noFill/>
@@ -5235,14 +7840,14 @@
       </p:sp>
       <p:sp>
         <p:nvSpPr>
-          <p:cNvPr id="7" name="Oval 6"/>
+          <p:cNvPr id="8" name="Oval 7"/>
           <p:cNvSpPr/>
           <p:nvPr/>
         </p:nvSpPr>
         <p:spPr>
           <a:xfrm>
-            <a:off x="1283177" y="2491740"/>
-            <a:ext cx="640080" cy="640080"/>
+            <a:off x="8046720" y="1874519"/>
+            <a:ext cx="548640" cy="548640"/>
           </a:xfrm>
           <a:prstGeom prst="ellipse">
             <a:avLst/>
@@ -5281,21 +7886,21 @@
                 </a:solidFill>
                 <a:latin typeface="Calibri"/>
               </a:rPr>
-              <a:t>1</a:t>
-            </a:r>
-          </a:p>
-        </p:txBody>
-      </p:sp>
-      <p:sp>
-        <p:nvSpPr>
-          <p:cNvPr id="8" name="TextBox 7"/>
+              <a:t>!</a:t>
+            </a:r>
+          </a:p>
+        </p:txBody>
+      </p:sp>
+      <p:sp>
+        <p:nvSpPr>
+          <p:cNvPr id="9" name="TextBox 8"/>
           <p:cNvSpPr txBox="1"/>
           <p:nvPr/>
         </p:nvSpPr>
         <p:spPr>
           <a:xfrm>
-            <a:off x="548640" y="3268979"/>
-            <a:ext cx="2109155" cy="731520"/>
+            <a:off x="8046720" y="2606040"/>
+            <a:ext cx="3291840" cy="365760"/>
           </a:xfrm>
           <a:prstGeom prst="rect">
             <a:avLst/>
@@ -5306,61 +7911,17 @@
           <a:bodyPr wrap="square" anchor="t" lIns="0" rIns="0" tIns="0" bIns="0"/>
           <a:lstStyle/>
           <a:p>
-            <a:pPr algn="ctr"/>
-            <a:r>
-              <a:rPr sz="1700" b="1" i="0">
-                <a:solidFill>
-                  <a:srgbClr val="03306E"/>
-                </a:solidFill>
-                <a:latin typeface="Calibri"/>
-              </a:rPr>
-              <a:t>Identify</a:t>
-            </a:r>
-          </a:p>
-        </p:txBody>
-      </p:sp>
-      <p:sp>
-        <p:nvSpPr>
-          <p:cNvPr id="9" name="Rounded Rectangle 8"/>
-          <p:cNvSpPr/>
-          <p:nvPr/>
-        </p:nvSpPr>
-        <p:spPr>
-          <a:xfrm>
-            <a:off x="548640" y="4046220"/>
-            <a:ext cx="2109155" cy="1234439"/>
-          </a:xfrm>
-          <a:prstGeom prst="roundRect">
-            <a:avLst>
-              <a:gd name="adj" fmla="val 6000"/>
-            </a:avLst>
-          </a:prstGeom>
-          <a:solidFill>
-            <a:srgbClr val="EAF3FF"/>
-          </a:solidFill>
-          <a:ln>
-            <a:noFill/>
-          </a:ln>
-          <a:effectLst/>
-        </p:spPr>
-        <p:style>
-          <a:lnRef idx="1">
-            <a:schemeClr val="accent1"/>
-          </a:lnRef>
-          <a:fillRef idx="3">
-            <a:schemeClr val="accent1"/>
-          </a:fillRef>
-          <a:effectRef idx="2">
-            <a:schemeClr val="accent1"/>
-          </a:effectRef>
-          <a:fontRef idx="minor">
-            <a:schemeClr val="lt1"/>
-          </a:fontRef>
-        </p:style>
-        <p:txBody>
-          <a:bodyPr rtlCol="0" anchor="ctr"/>
-          <a:lstStyle/>
-          <a:p/>
+            <a:pPr algn="l"/>
+            <a:r>
+              <a:rPr sz="1300" b="1" i="0">
+                <a:solidFill>
+                  <a:srgbClr val="A9C8F0"/>
+                </a:solidFill>
+                <a:latin typeface="Calibri"/>
+              </a:rPr>
+              <a:t>KEY IDEA</a:t>
+            </a:r>
+          </a:p>
         </p:txBody>
       </p:sp>
       <p:sp>
@@ -5371,8 +7932,8 @@
         </p:nvSpPr>
         <p:spPr>
           <a:xfrm>
-            <a:off x="685800" y="4183380"/>
-            <a:ext cx="1834835" cy="960119"/>
+            <a:off x="8046720" y="3017520"/>
+            <a:ext cx="3291840" cy="2926080"/>
           </a:xfrm>
           <a:prstGeom prst="rect">
             <a:avLst/>
@@ -5385,665 +7946,13 @@
           <a:p>
             <a:pPr algn="l"/>
             <a:r>
-              <a:rPr sz="1800" b="0" i="0">
-                <a:solidFill>
-                  <a:srgbClr val="202122"/>
-                </a:solidFill>
-                <a:latin typeface="Calibri"/>
-              </a:rPr>
-              <a:t>Risks and their effect on people and kit.</a:t>
-            </a:r>
-          </a:p>
-        </p:txBody>
-      </p:sp>
-      <p:sp>
-        <p:nvSpPr>
-          <p:cNvPr id="11" name="Oval 10"/>
-          <p:cNvSpPr/>
-          <p:nvPr/>
-        </p:nvSpPr>
-        <p:spPr>
-          <a:xfrm>
-            <a:off x="3529492" y="2491740"/>
-            <a:ext cx="640080" cy="640080"/>
-          </a:xfrm>
-          <a:prstGeom prst="ellipse">
-            <a:avLst/>
-          </a:prstGeom>
-          <a:solidFill>
-            <a:srgbClr val="33C17A"/>
-          </a:solidFill>
-          <a:ln>
-            <a:noFill/>
-          </a:ln>
-          <a:effectLst/>
-        </p:spPr>
-        <p:style>
-          <a:lnRef idx="1">
-            <a:schemeClr val="accent1"/>
-          </a:lnRef>
-          <a:fillRef idx="3">
-            <a:schemeClr val="accent1"/>
-          </a:fillRef>
-          <a:effectRef idx="2">
-            <a:schemeClr val="accent1"/>
-          </a:effectRef>
-          <a:fontRef idx="minor">
-            <a:schemeClr val="lt1"/>
-          </a:fontRef>
-        </p:style>
-        <p:txBody>
-          <a:bodyPr rtlCol="0" anchor="ctr" lIns="0" rIns="0" tIns="0" bIns="0"/>
-          <a:lstStyle/>
-          <a:p>
-            <a:pPr algn="ctr"/>
-            <a:r>
-              <a:rPr sz="2000" b="1">
-                <a:solidFill>
-                  <a:srgbClr val="202122"/>
-                </a:solidFill>
-                <a:latin typeface="Calibri"/>
-              </a:rPr>
-              <a:t>2</a:t>
-            </a:r>
-          </a:p>
-        </p:txBody>
-      </p:sp>
-      <p:sp>
-        <p:nvSpPr>
-          <p:cNvPr id="12" name="TextBox 11"/>
-          <p:cNvSpPr txBox="1"/>
-          <p:nvPr/>
-        </p:nvSpPr>
-        <p:spPr>
-          <a:xfrm>
-            <a:off x="2794955" y="3268979"/>
-            <a:ext cx="2109155" cy="731520"/>
-          </a:xfrm>
-          <a:prstGeom prst="rect">
-            <a:avLst/>
-          </a:prstGeom>
-          <a:noFill/>
-        </p:spPr>
-        <p:txBody>
-          <a:bodyPr wrap="square" anchor="t" lIns="0" rIns="0" tIns="0" bIns="0"/>
-          <a:lstStyle/>
-          <a:p>
-            <a:pPr algn="ctr"/>
-            <a:r>
-              <a:rPr sz="1700" b="1" i="0">
-                <a:solidFill>
-                  <a:srgbClr val="03306E"/>
-                </a:solidFill>
-                <a:latin typeface="Calibri"/>
-              </a:rPr>
-              <a:t>Assess</a:t>
-            </a:r>
-          </a:p>
-        </p:txBody>
-      </p:sp>
-      <p:sp>
-        <p:nvSpPr>
-          <p:cNvPr id="13" name="Rounded Rectangle 12"/>
-          <p:cNvSpPr/>
-          <p:nvPr/>
-        </p:nvSpPr>
-        <p:spPr>
-          <a:xfrm>
-            <a:off x="2794955" y="4046220"/>
-            <a:ext cx="2109155" cy="1234439"/>
-          </a:xfrm>
-          <a:prstGeom prst="roundRect">
-            <a:avLst>
-              <a:gd name="adj" fmla="val 6000"/>
-            </a:avLst>
-          </a:prstGeom>
-          <a:solidFill>
-            <a:srgbClr val="EAF3FF"/>
-          </a:solidFill>
-          <a:ln>
-            <a:noFill/>
-          </a:ln>
-          <a:effectLst/>
-        </p:spPr>
-        <p:style>
-          <a:lnRef idx="1">
-            <a:schemeClr val="accent1"/>
-          </a:lnRef>
-          <a:fillRef idx="3">
-            <a:schemeClr val="accent1"/>
-          </a:fillRef>
-          <a:effectRef idx="2">
-            <a:schemeClr val="accent1"/>
-          </a:effectRef>
-          <a:fontRef idx="minor">
-            <a:schemeClr val="lt1"/>
-          </a:fontRef>
-        </p:style>
-        <p:txBody>
-          <a:bodyPr rtlCol="0" anchor="ctr"/>
-          <a:lstStyle/>
-          <a:p/>
-        </p:txBody>
-      </p:sp>
-      <p:sp>
-        <p:nvSpPr>
-          <p:cNvPr id="14" name="TextBox 13"/>
-          <p:cNvSpPr txBox="1"/>
-          <p:nvPr/>
-        </p:nvSpPr>
-        <p:spPr>
-          <a:xfrm>
-            <a:off x="2932115" y="4183380"/>
-            <a:ext cx="1834835" cy="960119"/>
-          </a:xfrm>
-          <a:prstGeom prst="rect">
-            <a:avLst/>
-          </a:prstGeom>
-          <a:noFill/>
-        </p:spPr>
-        <p:txBody>
-          <a:bodyPr wrap="square" anchor="t" lIns="0" rIns="0" tIns="0" bIns="0"/>
-          <a:lstStyle/>
-          <a:p>
-            <a:pPr algn="l"/>
-            <a:r>
-              <a:rPr sz="1800" b="0" i="0">
-                <a:solidFill>
-                  <a:srgbClr val="202122"/>
-                </a:solidFill>
-                <a:latin typeface="Calibri"/>
-              </a:rPr>
-              <a:t>Calculate probability and impact.</a:t>
-            </a:r>
-          </a:p>
-        </p:txBody>
-      </p:sp>
-      <p:sp>
-        <p:nvSpPr>
-          <p:cNvPr id="15" name="Oval 14"/>
-          <p:cNvSpPr/>
-          <p:nvPr/>
-        </p:nvSpPr>
-        <p:spPr>
-          <a:xfrm>
-            <a:off x="5775807" y="2491740"/>
-            <a:ext cx="640080" cy="640080"/>
-          </a:xfrm>
-          <a:prstGeom prst="ellipse">
-            <a:avLst/>
-          </a:prstGeom>
-          <a:solidFill>
-            <a:srgbClr val="33C17A"/>
-          </a:solidFill>
-          <a:ln>
-            <a:noFill/>
-          </a:ln>
-          <a:effectLst/>
-        </p:spPr>
-        <p:style>
-          <a:lnRef idx="1">
-            <a:schemeClr val="accent1"/>
-          </a:lnRef>
-          <a:fillRef idx="3">
-            <a:schemeClr val="accent1"/>
-          </a:fillRef>
-          <a:effectRef idx="2">
-            <a:schemeClr val="accent1"/>
-          </a:effectRef>
-          <a:fontRef idx="minor">
-            <a:schemeClr val="lt1"/>
-          </a:fontRef>
-        </p:style>
-        <p:txBody>
-          <a:bodyPr rtlCol="0" anchor="ctr" lIns="0" rIns="0" tIns="0" bIns="0"/>
-          <a:lstStyle/>
-          <a:p>
-            <a:pPr algn="ctr"/>
-            <a:r>
-              <a:rPr sz="2000" b="1">
-                <a:solidFill>
-                  <a:srgbClr val="202122"/>
-                </a:solidFill>
-                <a:latin typeface="Calibri"/>
-              </a:rPr>
-              <a:t>3</a:t>
-            </a:r>
-          </a:p>
-        </p:txBody>
-      </p:sp>
-      <p:sp>
-        <p:nvSpPr>
-          <p:cNvPr id="16" name="TextBox 15"/>
-          <p:cNvSpPr txBox="1"/>
-          <p:nvPr/>
-        </p:nvSpPr>
-        <p:spPr>
-          <a:xfrm>
-            <a:off x="5041270" y="3268979"/>
-            <a:ext cx="2109155" cy="731520"/>
-          </a:xfrm>
-          <a:prstGeom prst="rect">
-            <a:avLst/>
-          </a:prstGeom>
-          <a:noFill/>
-        </p:spPr>
-        <p:txBody>
-          <a:bodyPr wrap="square" anchor="t" lIns="0" rIns="0" tIns="0" bIns="0"/>
-          <a:lstStyle/>
-          <a:p>
-            <a:pPr algn="ctr"/>
-            <a:r>
-              <a:rPr sz="1700" b="1" i="0">
-                <a:solidFill>
-                  <a:srgbClr val="03306E"/>
-                </a:solidFill>
-                <a:latin typeface="Calibri"/>
-              </a:rPr>
-              <a:t>Prioritise</a:t>
-            </a:r>
-          </a:p>
-        </p:txBody>
-      </p:sp>
-      <p:sp>
-        <p:nvSpPr>
-          <p:cNvPr id="17" name="Rounded Rectangle 16"/>
-          <p:cNvSpPr/>
-          <p:nvPr/>
-        </p:nvSpPr>
-        <p:spPr>
-          <a:xfrm>
-            <a:off x="5041270" y="4046220"/>
-            <a:ext cx="2109155" cy="1234439"/>
-          </a:xfrm>
-          <a:prstGeom prst="roundRect">
-            <a:avLst>
-              <a:gd name="adj" fmla="val 6000"/>
-            </a:avLst>
-          </a:prstGeom>
-          <a:solidFill>
-            <a:srgbClr val="EAF3FF"/>
-          </a:solidFill>
-          <a:ln>
-            <a:noFill/>
-          </a:ln>
-          <a:effectLst/>
-        </p:spPr>
-        <p:style>
-          <a:lnRef idx="1">
-            <a:schemeClr val="accent1"/>
-          </a:lnRef>
-          <a:fillRef idx="3">
-            <a:schemeClr val="accent1"/>
-          </a:fillRef>
-          <a:effectRef idx="2">
-            <a:schemeClr val="accent1"/>
-          </a:effectRef>
-          <a:fontRef idx="minor">
-            <a:schemeClr val="lt1"/>
-          </a:fontRef>
-        </p:style>
-        <p:txBody>
-          <a:bodyPr rtlCol="0" anchor="ctr"/>
-          <a:lstStyle/>
-          <a:p/>
-        </p:txBody>
-      </p:sp>
-      <p:sp>
-        <p:nvSpPr>
-          <p:cNvPr id="18" name="TextBox 17"/>
-          <p:cNvSpPr txBox="1"/>
-          <p:nvPr/>
-        </p:nvSpPr>
-        <p:spPr>
-          <a:xfrm>
-            <a:off x="5178430" y="4183380"/>
-            <a:ext cx="1834835" cy="960119"/>
-          </a:xfrm>
-          <a:prstGeom prst="rect">
-            <a:avLst/>
-          </a:prstGeom>
-          <a:noFill/>
-        </p:spPr>
-        <p:txBody>
-          <a:bodyPr wrap="square" anchor="t" lIns="0" rIns="0" tIns="0" bIns="0"/>
-          <a:lstStyle/>
-          <a:p>
-            <a:pPr algn="l"/>
-            <a:r>
-              <a:rPr sz="1800" b="0" i="0">
-                <a:solidFill>
-                  <a:srgbClr val="202122"/>
-                </a:solidFill>
-                <a:latin typeface="Calibri"/>
-              </a:rPr>
-              <a:t>Rank the risks.</a:t>
-            </a:r>
-          </a:p>
-        </p:txBody>
-      </p:sp>
-      <p:sp>
-        <p:nvSpPr>
-          <p:cNvPr id="19" name="Oval 18"/>
-          <p:cNvSpPr/>
-          <p:nvPr/>
-        </p:nvSpPr>
-        <p:spPr>
-          <a:xfrm>
-            <a:off x="8022122" y="2491740"/>
-            <a:ext cx="640080" cy="640080"/>
-          </a:xfrm>
-          <a:prstGeom prst="ellipse">
-            <a:avLst/>
-          </a:prstGeom>
-          <a:solidFill>
-            <a:srgbClr val="33C17A"/>
-          </a:solidFill>
-          <a:ln>
-            <a:noFill/>
-          </a:ln>
-          <a:effectLst/>
-        </p:spPr>
-        <p:style>
-          <a:lnRef idx="1">
-            <a:schemeClr val="accent1"/>
-          </a:lnRef>
-          <a:fillRef idx="3">
-            <a:schemeClr val="accent1"/>
-          </a:fillRef>
-          <a:effectRef idx="2">
-            <a:schemeClr val="accent1"/>
-          </a:effectRef>
-          <a:fontRef idx="minor">
-            <a:schemeClr val="lt1"/>
-          </a:fontRef>
-        </p:style>
-        <p:txBody>
-          <a:bodyPr rtlCol="0" anchor="ctr" lIns="0" rIns="0" tIns="0" bIns="0"/>
-          <a:lstStyle/>
-          <a:p>
-            <a:pPr algn="ctr"/>
-            <a:r>
-              <a:rPr sz="2000" b="1">
-                <a:solidFill>
-                  <a:srgbClr val="202122"/>
-                </a:solidFill>
-                <a:latin typeface="Calibri"/>
-              </a:rPr>
-              <a:t>4</a:t>
-            </a:r>
-          </a:p>
-        </p:txBody>
-      </p:sp>
-      <p:sp>
-        <p:nvSpPr>
-          <p:cNvPr id="20" name="TextBox 19"/>
-          <p:cNvSpPr txBox="1"/>
-          <p:nvPr/>
-        </p:nvSpPr>
-        <p:spPr>
-          <a:xfrm>
-            <a:off x="7287585" y="3268979"/>
-            <a:ext cx="2109155" cy="731520"/>
-          </a:xfrm>
-          <a:prstGeom prst="rect">
-            <a:avLst/>
-          </a:prstGeom>
-          <a:noFill/>
-        </p:spPr>
-        <p:txBody>
-          <a:bodyPr wrap="square" anchor="t" lIns="0" rIns="0" tIns="0" bIns="0"/>
-          <a:lstStyle/>
-          <a:p>
-            <a:pPr algn="ctr"/>
-            <a:r>
-              <a:rPr sz="1700" b="1" i="0">
-                <a:solidFill>
-                  <a:srgbClr val="03306E"/>
-                </a:solidFill>
-                <a:latin typeface="Calibri"/>
-              </a:rPr>
-              <a:t>Protect</a:t>
-            </a:r>
-          </a:p>
-        </p:txBody>
-      </p:sp>
-      <p:sp>
-        <p:nvSpPr>
-          <p:cNvPr id="21" name="Rounded Rectangle 20"/>
-          <p:cNvSpPr/>
-          <p:nvPr/>
-        </p:nvSpPr>
-        <p:spPr>
-          <a:xfrm>
-            <a:off x="7287585" y="4046220"/>
-            <a:ext cx="2109155" cy="1234439"/>
-          </a:xfrm>
-          <a:prstGeom prst="roundRect">
-            <a:avLst>
-              <a:gd name="adj" fmla="val 6000"/>
-            </a:avLst>
-          </a:prstGeom>
-          <a:solidFill>
-            <a:srgbClr val="EAF3FF"/>
-          </a:solidFill>
-          <a:ln>
-            <a:noFill/>
-          </a:ln>
-          <a:effectLst/>
-        </p:spPr>
-        <p:style>
-          <a:lnRef idx="1">
-            <a:schemeClr val="accent1"/>
-          </a:lnRef>
-          <a:fillRef idx="3">
-            <a:schemeClr val="accent1"/>
-          </a:fillRef>
-          <a:effectRef idx="2">
-            <a:schemeClr val="accent1"/>
-          </a:effectRef>
-          <a:fontRef idx="minor">
-            <a:schemeClr val="lt1"/>
-          </a:fontRef>
-        </p:style>
-        <p:txBody>
-          <a:bodyPr rtlCol="0" anchor="ctr"/>
-          <a:lstStyle/>
-          <a:p/>
-        </p:txBody>
-      </p:sp>
-      <p:sp>
-        <p:nvSpPr>
-          <p:cNvPr id="22" name="TextBox 21"/>
-          <p:cNvSpPr txBox="1"/>
-          <p:nvPr/>
-        </p:nvSpPr>
-        <p:spPr>
-          <a:xfrm>
-            <a:off x="7424745" y="4183380"/>
-            <a:ext cx="1834835" cy="960119"/>
-          </a:xfrm>
-          <a:prstGeom prst="rect">
-            <a:avLst/>
-          </a:prstGeom>
-          <a:noFill/>
-        </p:spPr>
-        <p:txBody>
-          <a:bodyPr wrap="square" anchor="t" lIns="0" rIns="0" tIns="0" bIns="0"/>
-          <a:lstStyle/>
-          <a:p>
-            <a:pPr algn="l"/>
-            <a:r>
-              <a:rPr sz="1800" b="0" i="0">
-                <a:solidFill>
-                  <a:srgbClr val="202122"/>
-                </a:solidFill>
-                <a:latin typeface="Calibri"/>
-              </a:rPr>
-              <a:t>Apply ESD protection.</a:t>
-            </a:r>
-          </a:p>
-        </p:txBody>
-      </p:sp>
-      <p:sp>
-        <p:nvSpPr>
-          <p:cNvPr id="23" name="Oval 22"/>
-          <p:cNvSpPr/>
-          <p:nvPr/>
-        </p:nvSpPr>
-        <p:spPr>
-          <a:xfrm>
-            <a:off x="10268437" y="2491740"/>
-            <a:ext cx="640080" cy="640080"/>
-          </a:xfrm>
-          <a:prstGeom prst="ellipse">
-            <a:avLst/>
-          </a:prstGeom>
-          <a:solidFill>
-            <a:srgbClr val="33C17A"/>
-          </a:solidFill>
-          <a:ln>
-            <a:noFill/>
-          </a:ln>
-          <a:effectLst/>
-        </p:spPr>
-        <p:style>
-          <a:lnRef idx="1">
-            <a:schemeClr val="accent1"/>
-          </a:lnRef>
-          <a:fillRef idx="3">
-            <a:schemeClr val="accent1"/>
-          </a:fillRef>
-          <a:effectRef idx="2">
-            <a:schemeClr val="accent1"/>
-          </a:effectRef>
-          <a:fontRef idx="minor">
-            <a:schemeClr val="lt1"/>
-          </a:fontRef>
-        </p:style>
-        <p:txBody>
-          <a:bodyPr rtlCol="0" anchor="ctr" lIns="0" rIns="0" tIns="0" bIns="0"/>
-          <a:lstStyle/>
-          <a:p>
-            <a:pPr algn="ctr"/>
-            <a:r>
-              <a:rPr sz="2000" b="1">
-                <a:solidFill>
-                  <a:srgbClr val="202122"/>
-                </a:solidFill>
-                <a:latin typeface="Calibri"/>
-              </a:rPr>
-              <a:t>5</a:t>
-            </a:r>
-          </a:p>
-        </p:txBody>
-      </p:sp>
-      <p:sp>
-        <p:nvSpPr>
-          <p:cNvPr id="24" name="TextBox 23"/>
-          <p:cNvSpPr txBox="1"/>
-          <p:nvPr/>
-        </p:nvSpPr>
-        <p:spPr>
-          <a:xfrm>
-            <a:off x="9533900" y="3268979"/>
-            <a:ext cx="2109155" cy="731520"/>
-          </a:xfrm>
-          <a:prstGeom prst="rect">
-            <a:avLst/>
-          </a:prstGeom>
-          <a:noFill/>
-        </p:spPr>
-        <p:txBody>
-          <a:bodyPr wrap="square" anchor="t" lIns="0" rIns="0" tIns="0" bIns="0"/>
-          <a:lstStyle/>
-          <a:p>
-            <a:pPr algn="ctr"/>
-            <a:r>
-              <a:rPr sz="1700" b="1" i="0">
-                <a:solidFill>
-                  <a:srgbClr val="03306E"/>
-                </a:solidFill>
-                <a:latin typeface="Calibri"/>
-              </a:rPr>
-              <a:t>Record</a:t>
-            </a:r>
-          </a:p>
-        </p:txBody>
-      </p:sp>
-      <p:sp>
-        <p:nvSpPr>
-          <p:cNvPr id="25" name="Rounded Rectangle 24"/>
-          <p:cNvSpPr/>
-          <p:nvPr/>
-        </p:nvSpPr>
-        <p:spPr>
-          <a:xfrm>
-            <a:off x="9533900" y="4046220"/>
-            <a:ext cx="2109155" cy="1234439"/>
-          </a:xfrm>
-          <a:prstGeom prst="roundRect">
-            <a:avLst>
-              <a:gd name="adj" fmla="val 6000"/>
-            </a:avLst>
-          </a:prstGeom>
-          <a:solidFill>
-            <a:srgbClr val="EAF3FF"/>
-          </a:solidFill>
-          <a:ln>
-            <a:noFill/>
-          </a:ln>
-          <a:effectLst/>
-        </p:spPr>
-        <p:style>
-          <a:lnRef idx="1">
-            <a:schemeClr val="accent1"/>
-          </a:lnRef>
-          <a:fillRef idx="3">
-            <a:schemeClr val="accent1"/>
-          </a:fillRef>
-          <a:effectRef idx="2">
-            <a:schemeClr val="accent1"/>
-          </a:effectRef>
-          <a:fontRef idx="minor">
-            <a:schemeClr val="lt1"/>
-          </a:fontRef>
-        </p:style>
-        <p:txBody>
-          <a:bodyPr rtlCol="0" anchor="ctr"/>
-          <a:lstStyle/>
-          <a:p/>
-        </p:txBody>
-      </p:sp>
-      <p:sp>
-        <p:nvSpPr>
-          <p:cNvPr id="26" name="TextBox 25"/>
-          <p:cNvSpPr txBox="1"/>
-          <p:nvPr/>
-        </p:nvSpPr>
-        <p:spPr>
-          <a:xfrm>
-            <a:off x="9671060" y="4183380"/>
-            <a:ext cx="1834835" cy="960119"/>
-          </a:xfrm>
-          <a:prstGeom prst="rect">
-            <a:avLst/>
-          </a:prstGeom>
-          <a:noFill/>
-        </p:spPr>
-        <p:txBody>
-          <a:bodyPr wrap="square" anchor="t" lIns="0" rIns="0" tIns="0" bIns="0"/>
-          <a:lstStyle/>
-          <a:p>
-            <a:pPr algn="l"/>
-            <a:r>
-              <a:rPr sz="1800" b="0" i="0">
-                <a:solidFill>
-                  <a:srgbClr val="202122"/>
-                </a:solidFill>
-                <a:latin typeface="Calibri"/>
-              </a:rPr>
-              <a:t>Write up findings; comply with H&amp;S law.</a:t>
+              <a:rPr sz="2200" b="0" i="0">
+                <a:solidFill>
+                  <a:srgbClr val="FFFFFF"/>
+                </a:solidFill>
+                <a:latin typeface="Cambria"/>
+              </a:rPr>
+              <a:t>ESD damage is often invisible. A component can seem fine and fail weeks later.</a:t>
             </a:r>
           </a:p>
         </p:txBody>
@@ -6135,7 +8044,7 @@
                 </a:solidFill>
                 <a:latin typeface="Cambria"/>
               </a:rPr>
-              <a:t>Health and safety legislation</a:t>
+              <a:t>Quick check: Preventing electrostatic discharge</a:t>
             </a:r>
           </a:p>
         </p:txBody>
@@ -6202,6 +8111,1862 @@
                 <a:latin typeface="Calibri"/>
               </a:rPr>
               <a:t>5</a:t>
+            </a:r>
+          </a:p>
+        </p:txBody>
+      </p:sp>
+      <p:sp>
+        <p:nvSpPr>
+          <p:cNvPr id="6" name="Oval 5"/>
+          <p:cNvSpPr/>
+          <p:nvPr/>
+        </p:nvSpPr>
+        <p:spPr>
+          <a:xfrm>
+            <a:off x="548640" y="1691640"/>
+            <a:ext cx="502920" cy="502920"/>
+          </a:xfrm>
+          <a:prstGeom prst="ellipse">
+            <a:avLst/>
+          </a:prstGeom>
+          <a:solidFill>
+            <a:srgbClr val="33C17A"/>
+          </a:solidFill>
+          <a:ln>
+            <a:noFill/>
+          </a:ln>
+          <a:effectLst/>
+        </p:spPr>
+        <p:style>
+          <a:lnRef idx="1">
+            <a:schemeClr val="accent1"/>
+          </a:lnRef>
+          <a:fillRef idx="3">
+            <a:schemeClr val="accent1"/>
+          </a:fillRef>
+          <a:effectRef idx="2">
+            <a:schemeClr val="accent1"/>
+          </a:effectRef>
+          <a:fontRef idx="minor">
+            <a:schemeClr val="lt1"/>
+          </a:fontRef>
+        </p:style>
+        <p:txBody>
+          <a:bodyPr rtlCol="0" anchor="ctr" lIns="0" rIns="0" tIns="0" bIns="0"/>
+          <a:lstStyle/>
+          <a:p>
+            <a:pPr algn="ctr"/>
+            <a:r>
+              <a:rPr sz="1600" b="1">
+                <a:solidFill>
+                  <a:srgbClr val="202122"/>
+                </a:solidFill>
+                <a:latin typeface="Calibri"/>
+              </a:rPr>
+              <a:t>1</a:t>
+            </a:r>
+          </a:p>
+        </p:txBody>
+      </p:sp>
+      <p:sp>
+        <p:nvSpPr>
+          <p:cNvPr id="7" name="TextBox 6"/>
+          <p:cNvSpPr txBox="1"/>
+          <p:nvPr/>
+        </p:nvSpPr>
+        <p:spPr>
+          <a:xfrm>
+            <a:off x="1371600" y="1645920"/>
+            <a:ext cx="10271455" cy="1188720"/>
+          </a:xfrm>
+          <a:prstGeom prst="rect">
+            <a:avLst/>
+          </a:prstGeom>
+          <a:noFill/>
+        </p:spPr>
+        <p:txBody>
+          <a:bodyPr wrap="square" anchor="t" lIns="0" rIns="0" tIns="0" bIns="0"/>
+          <a:lstStyle/>
+          <a:p>
+            <a:pPr algn="l"/>
+            <a:r>
+              <a:rPr sz="2400" b="0" i="0">
+                <a:solidFill>
+                  <a:srgbClr val="202122"/>
+                </a:solidFill>
+                <a:latin typeface="Calibri"/>
+              </a:rPr>
+              <a:t>Why is ESD damage hard to spot?</a:t>
+            </a:r>
+          </a:p>
+        </p:txBody>
+      </p:sp>
+      <p:sp>
+        <p:nvSpPr>
+          <p:cNvPr id="8" name="Oval 7"/>
+          <p:cNvSpPr/>
+          <p:nvPr/>
+        </p:nvSpPr>
+        <p:spPr>
+          <a:xfrm>
+            <a:off x="548640" y="3108960"/>
+            <a:ext cx="502920" cy="502920"/>
+          </a:xfrm>
+          <a:prstGeom prst="ellipse">
+            <a:avLst/>
+          </a:prstGeom>
+          <a:solidFill>
+            <a:srgbClr val="33C17A"/>
+          </a:solidFill>
+          <a:ln>
+            <a:noFill/>
+          </a:ln>
+          <a:effectLst/>
+        </p:spPr>
+        <p:style>
+          <a:lnRef idx="1">
+            <a:schemeClr val="accent1"/>
+          </a:lnRef>
+          <a:fillRef idx="3">
+            <a:schemeClr val="accent1"/>
+          </a:fillRef>
+          <a:effectRef idx="2">
+            <a:schemeClr val="accent1"/>
+          </a:effectRef>
+          <a:fontRef idx="minor">
+            <a:schemeClr val="lt1"/>
+          </a:fontRef>
+        </p:style>
+        <p:txBody>
+          <a:bodyPr rtlCol="0" anchor="ctr" lIns="0" rIns="0" tIns="0" bIns="0"/>
+          <a:lstStyle/>
+          <a:p>
+            <a:pPr algn="ctr"/>
+            <a:r>
+              <a:rPr sz="1600" b="1">
+                <a:solidFill>
+                  <a:srgbClr val="202122"/>
+                </a:solidFill>
+                <a:latin typeface="Calibri"/>
+              </a:rPr>
+              <a:t>2</a:t>
+            </a:r>
+          </a:p>
+        </p:txBody>
+      </p:sp>
+      <p:sp>
+        <p:nvSpPr>
+          <p:cNvPr id="9" name="TextBox 8"/>
+          <p:cNvSpPr txBox="1"/>
+          <p:nvPr/>
+        </p:nvSpPr>
+        <p:spPr>
+          <a:xfrm>
+            <a:off x="1371600" y="3063240"/>
+            <a:ext cx="10271455" cy="1188720"/>
+          </a:xfrm>
+          <a:prstGeom prst="rect">
+            <a:avLst/>
+          </a:prstGeom>
+          <a:noFill/>
+        </p:spPr>
+        <p:txBody>
+          <a:bodyPr wrap="square" anchor="t" lIns="0" rIns="0" tIns="0" bIns="0"/>
+          <a:lstStyle/>
+          <a:p>
+            <a:pPr algn="l"/>
+            <a:r>
+              <a:rPr sz="2400" b="0" i="0">
+                <a:solidFill>
+                  <a:srgbClr val="202122"/>
+                </a:solidFill>
+                <a:latin typeface="Calibri"/>
+              </a:rPr>
+              <a:t>Name two pieces of anti-static equipment.</a:t>
+            </a:r>
+          </a:p>
+        </p:txBody>
+      </p:sp>
+      <p:sp>
+        <p:nvSpPr>
+          <p:cNvPr id="10" name="Oval 9"/>
+          <p:cNvSpPr/>
+          <p:nvPr/>
+        </p:nvSpPr>
+        <p:spPr>
+          <a:xfrm>
+            <a:off x="548640" y="4526280"/>
+            <a:ext cx="502920" cy="502920"/>
+          </a:xfrm>
+          <a:prstGeom prst="ellipse">
+            <a:avLst/>
+          </a:prstGeom>
+          <a:solidFill>
+            <a:srgbClr val="33C17A"/>
+          </a:solidFill>
+          <a:ln>
+            <a:noFill/>
+          </a:ln>
+          <a:effectLst/>
+        </p:spPr>
+        <p:style>
+          <a:lnRef idx="1">
+            <a:schemeClr val="accent1"/>
+          </a:lnRef>
+          <a:fillRef idx="3">
+            <a:schemeClr val="accent1"/>
+          </a:fillRef>
+          <a:effectRef idx="2">
+            <a:schemeClr val="accent1"/>
+          </a:effectRef>
+          <a:fontRef idx="minor">
+            <a:schemeClr val="lt1"/>
+          </a:fontRef>
+        </p:style>
+        <p:txBody>
+          <a:bodyPr rtlCol="0" anchor="ctr" lIns="0" rIns="0" tIns="0" bIns="0"/>
+          <a:lstStyle/>
+          <a:p>
+            <a:pPr algn="ctr"/>
+            <a:r>
+              <a:rPr sz="1600" b="1">
+                <a:solidFill>
+                  <a:srgbClr val="202122"/>
+                </a:solidFill>
+                <a:latin typeface="Calibri"/>
+              </a:rPr>
+              <a:t>3</a:t>
+            </a:r>
+          </a:p>
+        </p:txBody>
+      </p:sp>
+      <p:sp>
+        <p:nvSpPr>
+          <p:cNvPr id="11" name="TextBox 10"/>
+          <p:cNvSpPr txBox="1"/>
+          <p:nvPr/>
+        </p:nvSpPr>
+        <p:spPr>
+          <a:xfrm>
+            <a:off x="1371600" y="4480560"/>
+            <a:ext cx="10271455" cy="1188720"/>
+          </a:xfrm>
+          <a:prstGeom prst="rect">
+            <a:avLst/>
+          </a:prstGeom>
+          <a:noFill/>
+        </p:spPr>
+        <p:txBody>
+          <a:bodyPr wrap="square" anchor="t" lIns="0" rIns="0" tIns="0" bIns="0"/>
+          <a:lstStyle/>
+          <a:p>
+            <a:pPr algn="l"/>
+            <a:r>
+              <a:rPr sz="2400" b="0" i="0">
+                <a:solidFill>
+                  <a:srgbClr val="202122"/>
+                </a:solidFill>
+                <a:latin typeface="Calibri"/>
+              </a:rPr>
+              <a:t>How should circuit boards be held?</a:t>
+            </a:r>
+          </a:p>
+        </p:txBody>
+      </p:sp>
+      <p:sp>
+        <p:nvSpPr>
+          <p:cNvPr id="12" name="TextBox 11"/>
+          <p:cNvSpPr txBox="1"/>
+          <p:nvPr/>
+        </p:nvSpPr>
+        <p:spPr>
+          <a:xfrm>
+            <a:off x="548640" y="5852160"/>
+            <a:ext cx="11094415" cy="365760"/>
+          </a:xfrm>
+          <a:prstGeom prst="rect">
+            <a:avLst/>
+          </a:prstGeom>
+          <a:noFill/>
+        </p:spPr>
+        <p:txBody>
+          <a:bodyPr wrap="square" anchor="t" lIns="0" rIns="0" tIns="0" bIns="0"/>
+          <a:lstStyle/>
+          <a:p>
+            <a:pPr algn="l"/>
+            <a:r>
+              <a:rPr sz="1300" b="0" i="1">
+                <a:solidFill>
+                  <a:srgbClr val="54595D"/>
+                </a:solidFill>
+                <a:latin typeface="Calibri"/>
+              </a:rPr>
+              <a:t>Answer on mini whiteboards or in your book. Answers are in the speaker notes.</a:t>
+            </a:r>
+          </a:p>
+        </p:txBody>
+      </p:sp>
+    </p:spTree>
+  </p:cSld>
+  <p:clrMapOvr>
+    <a:masterClrMapping/>
+  </p:clrMapOvr>
+</p:sld>
+</file>
+
+<file path=ppt/slides/slide6.xml><?xml version="1.0" encoding="utf-8"?>
+<p:sld xmlns:a="http://schemas.openxmlformats.org/drawingml/2006/main" xmlns:p="http://schemas.openxmlformats.org/presentationml/2006/main" xmlns:r="http://schemas.openxmlformats.org/officeDocument/2006/relationships">
+  <p:cSld>
+    <p:bg>
+      <p:bgPr>
+        <a:solidFill>
+          <a:srgbClr val="FFFFFF"/>
+        </a:solidFill>
+        <a:effectLst/>
+      </p:bgPr>
+    </p:bg>
+    <p:spTree>
+      <p:nvGrpSpPr>
+        <p:cNvPr id="1" name=""/>
+        <p:cNvGrpSpPr/>
+        <p:nvPr/>
+      </p:nvGrpSpPr>
+      <p:grpSpPr/>
+      <p:sp>
+        <p:nvSpPr>
+          <p:cNvPr id="2" name="TextBox 1"/>
+          <p:cNvSpPr txBox="1"/>
+          <p:nvPr/>
+        </p:nvSpPr>
+        <p:spPr>
+          <a:xfrm>
+            <a:off x="548640" y="320040"/>
+            <a:ext cx="11094415" cy="274320"/>
+          </a:xfrm>
+          <a:prstGeom prst="rect">
+            <a:avLst/>
+          </a:prstGeom>
+          <a:noFill/>
+        </p:spPr>
+        <p:txBody>
+          <a:bodyPr wrap="square" anchor="t" lIns="0" rIns="0" tIns="0" bIns="0"/>
+          <a:lstStyle/>
+          <a:p>
+            <a:pPr algn="l"/>
+            <a:r>
+              <a:rPr sz="1100" b="1" i="0">
+                <a:solidFill>
+                  <a:srgbClr val="54595D"/>
+                </a:solidFill>
+                <a:latin typeface="Calibri"/>
+              </a:rPr>
+              <a:t>DIGITAL INFRASTRUCTURE  ·  Digital Infrastructure Content Area 2</a:t>
+            </a:r>
+          </a:p>
+        </p:txBody>
+      </p:sp>
+      <p:sp>
+        <p:nvSpPr>
+          <p:cNvPr id="3" name="TextBox 2"/>
+          <p:cNvSpPr txBox="1"/>
+          <p:nvPr/>
+        </p:nvSpPr>
+        <p:spPr>
+          <a:xfrm>
+            <a:off x="548640" y="566928"/>
+            <a:ext cx="11094415" cy="822960"/>
+          </a:xfrm>
+          <a:prstGeom prst="rect">
+            <a:avLst/>
+          </a:prstGeom>
+          <a:noFill/>
+        </p:spPr>
+        <p:txBody>
+          <a:bodyPr wrap="square" anchor="ctr" lIns="0" rIns="0" tIns="0" bIns="0"/>
+          <a:lstStyle/>
+          <a:p>
+            <a:pPr algn="l"/>
+            <a:r>
+              <a:rPr sz="3200" b="1" i="0">
+                <a:solidFill>
+                  <a:srgbClr val="03306E"/>
+                </a:solidFill>
+                <a:latin typeface="Cambria"/>
+              </a:rPr>
+              <a:t>Risk managing ESD</a:t>
+            </a:r>
+          </a:p>
+        </p:txBody>
+      </p:sp>
+      <p:sp>
+        <p:nvSpPr>
+          <p:cNvPr id="4" name="TextBox 3"/>
+          <p:cNvSpPr txBox="1"/>
+          <p:nvPr/>
+        </p:nvSpPr>
+        <p:spPr>
+          <a:xfrm>
+            <a:off x="548640" y="6446520"/>
+            <a:ext cx="8229600" cy="274320"/>
+          </a:xfrm>
+          <a:prstGeom prst="rect">
+            <a:avLst/>
+          </a:prstGeom>
+          <a:noFill/>
+        </p:spPr>
+        <p:txBody>
+          <a:bodyPr wrap="square" anchor="t" lIns="0" rIns="0" tIns="0" bIns="0"/>
+          <a:lstStyle/>
+          <a:p>
+            <a:pPr algn="l"/>
+            <a:r>
+              <a:rPr sz="1000" b="0" i="0">
+                <a:solidFill>
+                  <a:srgbClr val="54595D"/>
+                </a:solidFill>
+                <a:latin typeface="Calibri"/>
+              </a:rPr>
+              <a:t>Digital Support and Security T Level  ·  Health, Safety and ESD in Digital Infrastructure</a:t>
+            </a:r>
+          </a:p>
+        </p:txBody>
+      </p:sp>
+      <p:sp>
+        <p:nvSpPr>
+          <p:cNvPr id="5" name="TextBox 4"/>
+          <p:cNvSpPr txBox="1"/>
+          <p:nvPr/>
+        </p:nvSpPr>
+        <p:spPr>
+          <a:xfrm>
+            <a:off x="10728655" y="6446520"/>
+            <a:ext cx="914400" cy="274320"/>
+          </a:xfrm>
+          <a:prstGeom prst="rect">
+            <a:avLst/>
+          </a:prstGeom>
+          <a:noFill/>
+        </p:spPr>
+        <p:txBody>
+          <a:bodyPr wrap="square" anchor="t" lIns="0" rIns="0" tIns="0" bIns="0"/>
+          <a:lstStyle/>
+          <a:p>
+            <a:pPr algn="r"/>
+            <a:r>
+              <a:rPr sz="1000" b="0" i="0">
+                <a:solidFill>
+                  <a:srgbClr val="54595D"/>
+                </a:solidFill>
+                <a:latin typeface="Calibri"/>
+              </a:rPr>
+              <a:t>6</a:t>
+            </a:r>
+          </a:p>
+        </p:txBody>
+      </p:sp>
+      <p:sp>
+        <p:nvSpPr>
+          <p:cNvPr id="6" name="Rectangle 5"/>
+          <p:cNvSpPr/>
+          <p:nvPr/>
+        </p:nvSpPr>
+        <p:spPr>
+          <a:xfrm>
+            <a:off x="1603217" y="2793492"/>
+            <a:ext cx="8985260" cy="36576"/>
+          </a:xfrm>
+          <a:prstGeom prst="rect">
+            <a:avLst/>
+          </a:prstGeom>
+          <a:solidFill>
+            <a:srgbClr val="A9C8F0"/>
+          </a:solidFill>
+          <a:ln>
+            <a:noFill/>
+          </a:ln>
+          <a:effectLst/>
+        </p:spPr>
+        <p:style>
+          <a:lnRef idx="1">
+            <a:schemeClr val="accent1"/>
+          </a:lnRef>
+          <a:fillRef idx="3">
+            <a:schemeClr val="accent1"/>
+          </a:fillRef>
+          <a:effectRef idx="2">
+            <a:schemeClr val="accent1"/>
+          </a:effectRef>
+          <a:fontRef idx="minor">
+            <a:schemeClr val="lt1"/>
+          </a:fontRef>
+        </p:style>
+        <p:txBody>
+          <a:bodyPr rtlCol="0" anchor="ctr"/>
+          <a:lstStyle/>
+          <a:p/>
+        </p:txBody>
+      </p:sp>
+      <p:sp>
+        <p:nvSpPr>
+          <p:cNvPr id="7" name="Oval 6"/>
+          <p:cNvSpPr/>
+          <p:nvPr/>
+        </p:nvSpPr>
+        <p:spPr>
+          <a:xfrm>
+            <a:off x="1283177" y="2491740"/>
+            <a:ext cx="640080" cy="640080"/>
+          </a:xfrm>
+          <a:prstGeom prst="ellipse">
+            <a:avLst/>
+          </a:prstGeom>
+          <a:solidFill>
+            <a:srgbClr val="33C17A"/>
+          </a:solidFill>
+          <a:ln>
+            <a:noFill/>
+          </a:ln>
+          <a:effectLst/>
+        </p:spPr>
+        <p:style>
+          <a:lnRef idx="1">
+            <a:schemeClr val="accent1"/>
+          </a:lnRef>
+          <a:fillRef idx="3">
+            <a:schemeClr val="accent1"/>
+          </a:fillRef>
+          <a:effectRef idx="2">
+            <a:schemeClr val="accent1"/>
+          </a:effectRef>
+          <a:fontRef idx="minor">
+            <a:schemeClr val="lt1"/>
+          </a:fontRef>
+        </p:style>
+        <p:txBody>
+          <a:bodyPr rtlCol="0" anchor="ctr" lIns="0" rIns="0" tIns="0" bIns="0"/>
+          <a:lstStyle/>
+          <a:p>
+            <a:pPr algn="ctr"/>
+            <a:r>
+              <a:rPr sz="2000" b="1">
+                <a:solidFill>
+                  <a:srgbClr val="202122"/>
+                </a:solidFill>
+                <a:latin typeface="Calibri"/>
+              </a:rPr>
+              <a:t>1</a:t>
+            </a:r>
+          </a:p>
+        </p:txBody>
+      </p:sp>
+      <p:sp>
+        <p:nvSpPr>
+          <p:cNvPr id="8" name="TextBox 7"/>
+          <p:cNvSpPr txBox="1"/>
+          <p:nvPr/>
+        </p:nvSpPr>
+        <p:spPr>
+          <a:xfrm>
+            <a:off x="548640" y="3268979"/>
+            <a:ext cx="2109155" cy="731520"/>
+          </a:xfrm>
+          <a:prstGeom prst="rect">
+            <a:avLst/>
+          </a:prstGeom>
+          <a:noFill/>
+        </p:spPr>
+        <p:txBody>
+          <a:bodyPr wrap="square" anchor="t" lIns="0" rIns="0" tIns="0" bIns="0"/>
+          <a:lstStyle/>
+          <a:p>
+            <a:pPr algn="ctr"/>
+            <a:r>
+              <a:rPr sz="1700" b="1" i="0">
+                <a:solidFill>
+                  <a:srgbClr val="03306E"/>
+                </a:solidFill>
+                <a:latin typeface="Calibri"/>
+              </a:rPr>
+              <a:t>Identify</a:t>
+            </a:r>
+          </a:p>
+        </p:txBody>
+      </p:sp>
+      <p:sp>
+        <p:nvSpPr>
+          <p:cNvPr id="9" name="Rounded Rectangle 8"/>
+          <p:cNvSpPr/>
+          <p:nvPr/>
+        </p:nvSpPr>
+        <p:spPr>
+          <a:xfrm>
+            <a:off x="548640" y="4046220"/>
+            <a:ext cx="2109155" cy="1234439"/>
+          </a:xfrm>
+          <a:prstGeom prst="roundRect">
+            <a:avLst>
+              <a:gd name="adj" fmla="val 6000"/>
+            </a:avLst>
+          </a:prstGeom>
+          <a:solidFill>
+            <a:srgbClr val="EAF3FF"/>
+          </a:solidFill>
+          <a:ln>
+            <a:noFill/>
+          </a:ln>
+          <a:effectLst/>
+        </p:spPr>
+        <p:style>
+          <a:lnRef idx="1">
+            <a:schemeClr val="accent1"/>
+          </a:lnRef>
+          <a:fillRef idx="3">
+            <a:schemeClr val="accent1"/>
+          </a:fillRef>
+          <a:effectRef idx="2">
+            <a:schemeClr val="accent1"/>
+          </a:effectRef>
+          <a:fontRef idx="minor">
+            <a:schemeClr val="lt1"/>
+          </a:fontRef>
+        </p:style>
+        <p:txBody>
+          <a:bodyPr rtlCol="0" anchor="ctr"/>
+          <a:lstStyle/>
+          <a:p/>
+        </p:txBody>
+      </p:sp>
+      <p:sp>
+        <p:nvSpPr>
+          <p:cNvPr id="10" name="TextBox 9"/>
+          <p:cNvSpPr txBox="1"/>
+          <p:nvPr/>
+        </p:nvSpPr>
+        <p:spPr>
+          <a:xfrm>
+            <a:off x="685800" y="4183380"/>
+            <a:ext cx="1834835" cy="960119"/>
+          </a:xfrm>
+          <a:prstGeom prst="rect">
+            <a:avLst/>
+          </a:prstGeom>
+          <a:noFill/>
+        </p:spPr>
+        <p:txBody>
+          <a:bodyPr wrap="square" anchor="t" lIns="0" rIns="0" tIns="0" bIns="0"/>
+          <a:lstStyle/>
+          <a:p>
+            <a:pPr algn="l"/>
+            <a:r>
+              <a:rPr sz="1800" b="0" i="0">
+                <a:solidFill>
+                  <a:srgbClr val="202122"/>
+                </a:solidFill>
+                <a:latin typeface="Calibri"/>
+              </a:rPr>
+              <a:t>Risks and their effect on people and kit.</a:t>
+            </a:r>
+          </a:p>
+        </p:txBody>
+      </p:sp>
+      <p:sp>
+        <p:nvSpPr>
+          <p:cNvPr id="11" name="Oval 10"/>
+          <p:cNvSpPr/>
+          <p:nvPr/>
+        </p:nvSpPr>
+        <p:spPr>
+          <a:xfrm>
+            <a:off x="3529492" y="2491740"/>
+            <a:ext cx="640080" cy="640080"/>
+          </a:xfrm>
+          <a:prstGeom prst="ellipse">
+            <a:avLst/>
+          </a:prstGeom>
+          <a:solidFill>
+            <a:srgbClr val="33C17A"/>
+          </a:solidFill>
+          <a:ln>
+            <a:noFill/>
+          </a:ln>
+          <a:effectLst/>
+        </p:spPr>
+        <p:style>
+          <a:lnRef idx="1">
+            <a:schemeClr val="accent1"/>
+          </a:lnRef>
+          <a:fillRef idx="3">
+            <a:schemeClr val="accent1"/>
+          </a:fillRef>
+          <a:effectRef idx="2">
+            <a:schemeClr val="accent1"/>
+          </a:effectRef>
+          <a:fontRef idx="minor">
+            <a:schemeClr val="lt1"/>
+          </a:fontRef>
+        </p:style>
+        <p:txBody>
+          <a:bodyPr rtlCol="0" anchor="ctr" lIns="0" rIns="0" tIns="0" bIns="0"/>
+          <a:lstStyle/>
+          <a:p>
+            <a:pPr algn="ctr"/>
+            <a:r>
+              <a:rPr sz="2000" b="1">
+                <a:solidFill>
+                  <a:srgbClr val="202122"/>
+                </a:solidFill>
+                <a:latin typeface="Calibri"/>
+              </a:rPr>
+              <a:t>2</a:t>
+            </a:r>
+          </a:p>
+        </p:txBody>
+      </p:sp>
+      <p:sp>
+        <p:nvSpPr>
+          <p:cNvPr id="12" name="TextBox 11"/>
+          <p:cNvSpPr txBox="1"/>
+          <p:nvPr/>
+        </p:nvSpPr>
+        <p:spPr>
+          <a:xfrm>
+            <a:off x="2794955" y="3268979"/>
+            <a:ext cx="2109155" cy="731520"/>
+          </a:xfrm>
+          <a:prstGeom prst="rect">
+            <a:avLst/>
+          </a:prstGeom>
+          <a:noFill/>
+        </p:spPr>
+        <p:txBody>
+          <a:bodyPr wrap="square" anchor="t" lIns="0" rIns="0" tIns="0" bIns="0"/>
+          <a:lstStyle/>
+          <a:p>
+            <a:pPr algn="ctr"/>
+            <a:r>
+              <a:rPr sz="1700" b="1" i="0">
+                <a:solidFill>
+                  <a:srgbClr val="03306E"/>
+                </a:solidFill>
+                <a:latin typeface="Calibri"/>
+              </a:rPr>
+              <a:t>Assess</a:t>
+            </a:r>
+          </a:p>
+        </p:txBody>
+      </p:sp>
+      <p:sp>
+        <p:nvSpPr>
+          <p:cNvPr id="13" name="Rounded Rectangle 12"/>
+          <p:cNvSpPr/>
+          <p:nvPr/>
+        </p:nvSpPr>
+        <p:spPr>
+          <a:xfrm>
+            <a:off x="2794955" y="4046220"/>
+            <a:ext cx="2109155" cy="1234439"/>
+          </a:xfrm>
+          <a:prstGeom prst="roundRect">
+            <a:avLst>
+              <a:gd name="adj" fmla="val 6000"/>
+            </a:avLst>
+          </a:prstGeom>
+          <a:solidFill>
+            <a:srgbClr val="EAF3FF"/>
+          </a:solidFill>
+          <a:ln>
+            <a:noFill/>
+          </a:ln>
+          <a:effectLst/>
+        </p:spPr>
+        <p:style>
+          <a:lnRef idx="1">
+            <a:schemeClr val="accent1"/>
+          </a:lnRef>
+          <a:fillRef idx="3">
+            <a:schemeClr val="accent1"/>
+          </a:fillRef>
+          <a:effectRef idx="2">
+            <a:schemeClr val="accent1"/>
+          </a:effectRef>
+          <a:fontRef idx="minor">
+            <a:schemeClr val="lt1"/>
+          </a:fontRef>
+        </p:style>
+        <p:txBody>
+          <a:bodyPr rtlCol="0" anchor="ctr"/>
+          <a:lstStyle/>
+          <a:p/>
+        </p:txBody>
+      </p:sp>
+      <p:sp>
+        <p:nvSpPr>
+          <p:cNvPr id="14" name="TextBox 13"/>
+          <p:cNvSpPr txBox="1"/>
+          <p:nvPr/>
+        </p:nvSpPr>
+        <p:spPr>
+          <a:xfrm>
+            <a:off x="2932115" y="4183380"/>
+            <a:ext cx="1834835" cy="960119"/>
+          </a:xfrm>
+          <a:prstGeom prst="rect">
+            <a:avLst/>
+          </a:prstGeom>
+          <a:noFill/>
+        </p:spPr>
+        <p:txBody>
+          <a:bodyPr wrap="square" anchor="t" lIns="0" rIns="0" tIns="0" bIns="0"/>
+          <a:lstStyle/>
+          <a:p>
+            <a:pPr algn="l"/>
+            <a:r>
+              <a:rPr sz="1800" b="0" i="0">
+                <a:solidFill>
+                  <a:srgbClr val="202122"/>
+                </a:solidFill>
+                <a:latin typeface="Calibri"/>
+              </a:rPr>
+              <a:t>Calculate probability and impact.</a:t>
+            </a:r>
+          </a:p>
+        </p:txBody>
+      </p:sp>
+      <p:sp>
+        <p:nvSpPr>
+          <p:cNvPr id="15" name="Oval 14"/>
+          <p:cNvSpPr/>
+          <p:nvPr/>
+        </p:nvSpPr>
+        <p:spPr>
+          <a:xfrm>
+            <a:off x="5775807" y="2491740"/>
+            <a:ext cx="640080" cy="640080"/>
+          </a:xfrm>
+          <a:prstGeom prst="ellipse">
+            <a:avLst/>
+          </a:prstGeom>
+          <a:solidFill>
+            <a:srgbClr val="33C17A"/>
+          </a:solidFill>
+          <a:ln>
+            <a:noFill/>
+          </a:ln>
+          <a:effectLst/>
+        </p:spPr>
+        <p:style>
+          <a:lnRef idx="1">
+            <a:schemeClr val="accent1"/>
+          </a:lnRef>
+          <a:fillRef idx="3">
+            <a:schemeClr val="accent1"/>
+          </a:fillRef>
+          <a:effectRef idx="2">
+            <a:schemeClr val="accent1"/>
+          </a:effectRef>
+          <a:fontRef idx="minor">
+            <a:schemeClr val="lt1"/>
+          </a:fontRef>
+        </p:style>
+        <p:txBody>
+          <a:bodyPr rtlCol="0" anchor="ctr" lIns="0" rIns="0" tIns="0" bIns="0"/>
+          <a:lstStyle/>
+          <a:p>
+            <a:pPr algn="ctr"/>
+            <a:r>
+              <a:rPr sz="2000" b="1">
+                <a:solidFill>
+                  <a:srgbClr val="202122"/>
+                </a:solidFill>
+                <a:latin typeface="Calibri"/>
+              </a:rPr>
+              <a:t>3</a:t>
+            </a:r>
+          </a:p>
+        </p:txBody>
+      </p:sp>
+      <p:sp>
+        <p:nvSpPr>
+          <p:cNvPr id="16" name="TextBox 15"/>
+          <p:cNvSpPr txBox="1"/>
+          <p:nvPr/>
+        </p:nvSpPr>
+        <p:spPr>
+          <a:xfrm>
+            <a:off x="5041270" y="3268979"/>
+            <a:ext cx="2109155" cy="731520"/>
+          </a:xfrm>
+          <a:prstGeom prst="rect">
+            <a:avLst/>
+          </a:prstGeom>
+          <a:noFill/>
+        </p:spPr>
+        <p:txBody>
+          <a:bodyPr wrap="square" anchor="t" lIns="0" rIns="0" tIns="0" bIns="0"/>
+          <a:lstStyle/>
+          <a:p>
+            <a:pPr algn="ctr"/>
+            <a:r>
+              <a:rPr sz="1700" b="1" i="0">
+                <a:solidFill>
+                  <a:srgbClr val="03306E"/>
+                </a:solidFill>
+                <a:latin typeface="Calibri"/>
+              </a:rPr>
+              <a:t>Prioritise</a:t>
+            </a:r>
+          </a:p>
+        </p:txBody>
+      </p:sp>
+      <p:sp>
+        <p:nvSpPr>
+          <p:cNvPr id="17" name="Rounded Rectangle 16"/>
+          <p:cNvSpPr/>
+          <p:nvPr/>
+        </p:nvSpPr>
+        <p:spPr>
+          <a:xfrm>
+            <a:off x="5041270" y="4046220"/>
+            <a:ext cx="2109155" cy="1234439"/>
+          </a:xfrm>
+          <a:prstGeom prst="roundRect">
+            <a:avLst>
+              <a:gd name="adj" fmla="val 6000"/>
+            </a:avLst>
+          </a:prstGeom>
+          <a:solidFill>
+            <a:srgbClr val="EAF3FF"/>
+          </a:solidFill>
+          <a:ln>
+            <a:noFill/>
+          </a:ln>
+          <a:effectLst/>
+        </p:spPr>
+        <p:style>
+          <a:lnRef idx="1">
+            <a:schemeClr val="accent1"/>
+          </a:lnRef>
+          <a:fillRef idx="3">
+            <a:schemeClr val="accent1"/>
+          </a:fillRef>
+          <a:effectRef idx="2">
+            <a:schemeClr val="accent1"/>
+          </a:effectRef>
+          <a:fontRef idx="minor">
+            <a:schemeClr val="lt1"/>
+          </a:fontRef>
+        </p:style>
+        <p:txBody>
+          <a:bodyPr rtlCol="0" anchor="ctr"/>
+          <a:lstStyle/>
+          <a:p/>
+        </p:txBody>
+      </p:sp>
+      <p:sp>
+        <p:nvSpPr>
+          <p:cNvPr id="18" name="TextBox 17"/>
+          <p:cNvSpPr txBox="1"/>
+          <p:nvPr/>
+        </p:nvSpPr>
+        <p:spPr>
+          <a:xfrm>
+            <a:off x="5178430" y="4183380"/>
+            <a:ext cx="1834835" cy="960119"/>
+          </a:xfrm>
+          <a:prstGeom prst="rect">
+            <a:avLst/>
+          </a:prstGeom>
+          <a:noFill/>
+        </p:spPr>
+        <p:txBody>
+          <a:bodyPr wrap="square" anchor="t" lIns="0" rIns="0" tIns="0" bIns="0"/>
+          <a:lstStyle/>
+          <a:p>
+            <a:pPr algn="l"/>
+            <a:r>
+              <a:rPr sz="1800" b="0" i="0">
+                <a:solidFill>
+                  <a:srgbClr val="202122"/>
+                </a:solidFill>
+                <a:latin typeface="Calibri"/>
+              </a:rPr>
+              <a:t>Rank the risks.</a:t>
+            </a:r>
+          </a:p>
+        </p:txBody>
+      </p:sp>
+      <p:sp>
+        <p:nvSpPr>
+          <p:cNvPr id="19" name="Oval 18"/>
+          <p:cNvSpPr/>
+          <p:nvPr/>
+        </p:nvSpPr>
+        <p:spPr>
+          <a:xfrm>
+            <a:off x="8022122" y="2491740"/>
+            <a:ext cx="640080" cy="640080"/>
+          </a:xfrm>
+          <a:prstGeom prst="ellipse">
+            <a:avLst/>
+          </a:prstGeom>
+          <a:solidFill>
+            <a:srgbClr val="33C17A"/>
+          </a:solidFill>
+          <a:ln>
+            <a:noFill/>
+          </a:ln>
+          <a:effectLst/>
+        </p:spPr>
+        <p:style>
+          <a:lnRef idx="1">
+            <a:schemeClr val="accent1"/>
+          </a:lnRef>
+          <a:fillRef idx="3">
+            <a:schemeClr val="accent1"/>
+          </a:fillRef>
+          <a:effectRef idx="2">
+            <a:schemeClr val="accent1"/>
+          </a:effectRef>
+          <a:fontRef idx="minor">
+            <a:schemeClr val="lt1"/>
+          </a:fontRef>
+        </p:style>
+        <p:txBody>
+          <a:bodyPr rtlCol="0" anchor="ctr" lIns="0" rIns="0" tIns="0" bIns="0"/>
+          <a:lstStyle/>
+          <a:p>
+            <a:pPr algn="ctr"/>
+            <a:r>
+              <a:rPr sz="2000" b="1">
+                <a:solidFill>
+                  <a:srgbClr val="202122"/>
+                </a:solidFill>
+                <a:latin typeface="Calibri"/>
+              </a:rPr>
+              <a:t>4</a:t>
+            </a:r>
+          </a:p>
+        </p:txBody>
+      </p:sp>
+      <p:sp>
+        <p:nvSpPr>
+          <p:cNvPr id="20" name="TextBox 19"/>
+          <p:cNvSpPr txBox="1"/>
+          <p:nvPr/>
+        </p:nvSpPr>
+        <p:spPr>
+          <a:xfrm>
+            <a:off x="7287585" y="3268979"/>
+            <a:ext cx="2109155" cy="731520"/>
+          </a:xfrm>
+          <a:prstGeom prst="rect">
+            <a:avLst/>
+          </a:prstGeom>
+          <a:noFill/>
+        </p:spPr>
+        <p:txBody>
+          <a:bodyPr wrap="square" anchor="t" lIns="0" rIns="0" tIns="0" bIns="0"/>
+          <a:lstStyle/>
+          <a:p>
+            <a:pPr algn="ctr"/>
+            <a:r>
+              <a:rPr sz="1700" b="1" i="0">
+                <a:solidFill>
+                  <a:srgbClr val="03306E"/>
+                </a:solidFill>
+                <a:latin typeface="Calibri"/>
+              </a:rPr>
+              <a:t>Protect</a:t>
+            </a:r>
+          </a:p>
+        </p:txBody>
+      </p:sp>
+      <p:sp>
+        <p:nvSpPr>
+          <p:cNvPr id="21" name="Rounded Rectangle 20"/>
+          <p:cNvSpPr/>
+          <p:nvPr/>
+        </p:nvSpPr>
+        <p:spPr>
+          <a:xfrm>
+            <a:off x="7287585" y="4046220"/>
+            <a:ext cx="2109155" cy="1234439"/>
+          </a:xfrm>
+          <a:prstGeom prst="roundRect">
+            <a:avLst>
+              <a:gd name="adj" fmla="val 6000"/>
+            </a:avLst>
+          </a:prstGeom>
+          <a:solidFill>
+            <a:srgbClr val="EAF3FF"/>
+          </a:solidFill>
+          <a:ln>
+            <a:noFill/>
+          </a:ln>
+          <a:effectLst/>
+        </p:spPr>
+        <p:style>
+          <a:lnRef idx="1">
+            <a:schemeClr val="accent1"/>
+          </a:lnRef>
+          <a:fillRef idx="3">
+            <a:schemeClr val="accent1"/>
+          </a:fillRef>
+          <a:effectRef idx="2">
+            <a:schemeClr val="accent1"/>
+          </a:effectRef>
+          <a:fontRef idx="minor">
+            <a:schemeClr val="lt1"/>
+          </a:fontRef>
+        </p:style>
+        <p:txBody>
+          <a:bodyPr rtlCol="0" anchor="ctr"/>
+          <a:lstStyle/>
+          <a:p/>
+        </p:txBody>
+      </p:sp>
+      <p:sp>
+        <p:nvSpPr>
+          <p:cNvPr id="22" name="TextBox 21"/>
+          <p:cNvSpPr txBox="1"/>
+          <p:nvPr/>
+        </p:nvSpPr>
+        <p:spPr>
+          <a:xfrm>
+            <a:off x="7424745" y="4183380"/>
+            <a:ext cx="1834835" cy="960119"/>
+          </a:xfrm>
+          <a:prstGeom prst="rect">
+            <a:avLst/>
+          </a:prstGeom>
+          <a:noFill/>
+        </p:spPr>
+        <p:txBody>
+          <a:bodyPr wrap="square" anchor="t" lIns="0" rIns="0" tIns="0" bIns="0"/>
+          <a:lstStyle/>
+          <a:p>
+            <a:pPr algn="l"/>
+            <a:r>
+              <a:rPr sz="1800" b="0" i="0">
+                <a:solidFill>
+                  <a:srgbClr val="202122"/>
+                </a:solidFill>
+                <a:latin typeface="Calibri"/>
+              </a:rPr>
+              <a:t>Apply ESD protection.</a:t>
+            </a:r>
+          </a:p>
+        </p:txBody>
+      </p:sp>
+      <p:sp>
+        <p:nvSpPr>
+          <p:cNvPr id="23" name="Oval 22"/>
+          <p:cNvSpPr/>
+          <p:nvPr/>
+        </p:nvSpPr>
+        <p:spPr>
+          <a:xfrm>
+            <a:off x="10268437" y="2491740"/>
+            <a:ext cx="640080" cy="640080"/>
+          </a:xfrm>
+          <a:prstGeom prst="ellipse">
+            <a:avLst/>
+          </a:prstGeom>
+          <a:solidFill>
+            <a:srgbClr val="33C17A"/>
+          </a:solidFill>
+          <a:ln>
+            <a:noFill/>
+          </a:ln>
+          <a:effectLst/>
+        </p:spPr>
+        <p:style>
+          <a:lnRef idx="1">
+            <a:schemeClr val="accent1"/>
+          </a:lnRef>
+          <a:fillRef idx="3">
+            <a:schemeClr val="accent1"/>
+          </a:fillRef>
+          <a:effectRef idx="2">
+            <a:schemeClr val="accent1"/>
+          </a:effectRef>
+          <a:fontRef idx="minor">
+            <a:schemeClr val="lt1"/>
+          </a:fontRef>
+        </p:style>
+        <p:txBody>
+          <a:bodyPr rtlCol="0" anchor="ctr" lIns="0" rIns="0" tIns="0" bIns="0"/>
+          <a:lstStyle/>
+          <a:p>
+            <a:pPr algn="ctr"/>
+            <a:r>
+              <a:rPr sz="2000" b="1">
+                <a:solidFill>
+                  <a:srgbClr val="202122"/>
+                </a:solidFill>
+                <a:latin typeface="Calibri"/>
+              </a:rPr>
+              <a:t>5</a:t>
+            </a:r>
+          </a:p>
+        </p:txBody>
+      </p:sp>
+      <p:sp>
+        <p:nvSpPr>
+          <p:cNvPr id="24" name="TextBox 23"/>
+          <p:cNvSpPr txBox="1"/>
+          <p:nvPr/>
+        </p:nvSpPr>
+        <p:spPr>
+          <a:xfrm>
+            <a:off x="9533900" y="3268979"/>
+            <a:ext cx="2109155" cy="731520"/>
+          </a:xfrm>
+          <a:prstGeom prst="rect">
+            <a:avLst/>
+          </a:prstGeom>
+          <a:noFill/>
+        </p:spPr>
+        <p:txBody>
+          <a:bodyPr wrap="square" anchor="t" lIns="0" rIns="0" tIns="0" bIns="0"/>
+          <a:lstStyle/>
+          <a:p>
+            <a:pPr algn="ctr"/>
+            <a:r>
+              <a:rPr sz="1700" b="1" i="0">
+                <a:solidFill>
+                  <a:srgbClr val="03306E"/>
+                </a:solidFill>
+                <a:latin typeface="Calibri"/>
+              </a:rPr>
+              <a:t>Record</a:t>
+            </a:r>
+          </a:p>
+        </p:txBody>
+      </p:sp>
+      <p:sp>
+        <p:nvSpPr>
+          <p:cNvPr id="25" name="Rounded Rectangle 24"/>
+          <p:cNvSpPr/>
+          <p:nvPr/>
+        </p:nvSpPr>
+        <p:spPr>
+          <a:xfrm>
+            <a:off x="9533900" y="4046220"/>
+            <a:ext cx="2109155" cy="1234439"/>
+          </a:xfrm>
+          <a:prstGeom prst="roundRect">
+            <a:avLst>
+              <a:gd name="adj" fmla="val 6000"/>
+            </a:avLst>
+          </a:prstGeom>
+          <a:solidFill>
+            <a:srgbClr val="EAF3FF"/>
+          </a:solidFill>
+          <a:ln>
+            <a:noFill/>
+          </a:ln>
+          <a:effectLst/>
+        </p:spPr>
+        <p:style>
+          <a:lnRef idx="1">
+            <a:schemeClr val="accent1"/>
+          </a:lnRef>
+          <a:fillRef idx="3">
+            <a:schemeClr val="accent1"/>
+          </a:fillRef>
+          <a:effectRef idx="2">
+            <a:schemeClr val="accent1"/>
+          </a:effectRef>
+          <a:fontRef idx="minor">
+            <a:schemeClr val="lt1"/>
+          </a:fontRef>
+        </p:style>
+        <p:txBody>
+          <a:bodyPr rtlCol="0" anchor="ctr"/>
+          <a:lstStyle/>
+          <a:p/>
+        </p:txBody>
+      </p:sp>
+      <p:sp>
+        <p:nvSpPr>
+          <p:cNvPr id="26" name="TextBox 25"/>
+          <p:cNvSpPr txBox="1"/>
+          <p:nvPr/>
+        </p:nvSpPr>
+        <p:spPr>
+          <a:xfrm>
+            <a:off x="9671060" y="4183380"/>
+            <a:ext cx="1834835" cy="960119"/>
+          </a:xfrm>
+          <a:prstGeom prst="rect">
+            <a:avLst/>
+          </a:prstGeom>
+          <a:noFill/>
+        </p:spPr>
+        <p:txBody>
+          <a:bodyPr wrap="square" anchor="t" lIns="0" rIns="0" tIns="0" bIns="0"/>
+          <a:lstStyle/>
+          <a:p>
+            <a:pPr algn="l"/>
+            <a:r>
+              <a:rPr sz="1800" b="0" i="0">
+                <a:solidFill>
+                  <a:srgbClr val="202122"/>
+                </a:solidFill>
+                <a:latin typeface="Calibri"/>
+              </a:rPr>
+              <a:t>Write up findings; comply with H&amp;S law.</a:t>
+            </a:r>
+          </a:p>
+        </p:txBody>
+      </p:sp>
+    </p:spTree>
+  </p:cSld>
+  <p:clrMapOvr>
+    <a:masterClrMapping/>
+  </p:clrMapOvr>
+</p:sld>
+</file>
+
+<file path=ppt/slides/slide7.xml><?xml version="1.0" encoding="utf-8"?>
+<p:sld xmlns:a="http://schemas.openxmlformats.org/drawingml/2006/main" xmlns:p="http://schemas.openxmlformats.org/presentationml/2006/main" xmlns:r="http://schemas.openxmlformats.org/officeDocument/2006/relationships">
+  <p:cSld>
+    <p:bg>
+      <p:bgPr>
+        <a:solidFill>
+          <a:srgbClr val="FFFFFF"/>
+        </a:solidFill>
+        <a:effectLst/>
+      </p:bgPr>
+    </p:bg>
+    <p:spTree>
+      <p:nvGrpSpPr>
+        <p:cNvPr id="1" name=""/>
+        <p:cNvGrpSpPr/>
+        <p:nvPr/>
+      </p:nvGrpSpPr>
+      <p:grpSpPr/>
+      <p:sp>
+        <p:nvSpPr>
+          <p:cNvPr id="2" name="TextBox 1"/>
+          <p:cNvSpPr txBox="1"/>
+          <p:nvPr/>
+        </p:nvSpPr>
+        <p:spPr>
+          <a:xfrm>
+            <a:off x="548640" y="320040"/>
+            <a:ext cx="11094415" cy="274320"/>
+          </a:xfrm>
+          <a:prstGeom prst="rect">
+            <a:avLst/>
+          </a:prstGeom>
+          <a:noFill/>
+        </p:spPr>
+        <p:txBody>
+          <a:bodyPr wrap="square" anchor="t" lIns="0" rIns="0" tIns="0" bIns="0"/>
+          <a:lstStyle/>
+          <a:p>
+            <a:pPr algn="l"/>
+            <a:r>
+              <a:rPr sz="1100" b="1" i="0">
+                <a:solidFill>
+                  <a:srgbClr val="54595D"/>
+                </a:solidFill>
+                <a:latin typeface="Calibri"/>
+              </a:rPr>
+              <a:t>DIGITAL INFRASTRUCTURE  ·  Digital Infrastructure Content Area 2</a:t>
+            </a:r>
+          </a:p>
+        </p:txBody>
+      </p:sp>
+      <p:sp>
+        <p:nvSpPr>
+          <p:cNvPr id="3" name="TextBox 2"/>
+          <p:cNvSpPr txBox="1"/>
+          <p:nvPr/>
+        </p:nvSpPr>
+        <p:spPr>
+          <a:xfrm>
+            <a:off x="548640" y="566928"/>
+            <a:ext cx="11094415" cy="822960"/>
+          </a:xfrm>
+          <a:prstGeom prst="rect">
+            <a:avLst/>
+          </a:prstGeom>
+          <a:noFill/>
+        </p:spPr>
+        <p:txBody>
+          <a:bodyPr wrap="square" anchor="ctr" lIns="0" rIns="0" tIns="0" bIns="0"/>
+          <a:lstStyle/>
+          <a:p>
+            <a:pPr algn="l"/>
+            <a:r>
+              <a:rPr sz="3200" b="1" i="0">
+                <a:solidFill>
+                  <a:srgbClr val="03306E"/>
+                </a:solidFill>
+                <a:latin typeface="Cambria"/>
+              </a:rPr>
+              <a:t>Health and safety legislation</a:t>
+            </a:r>
+          </a:p>
+        </p:txBody>
+      </p:sp>
+      <p:sp>
+        <p:nvSpPr>
+          <p:cNvPr id="4" name="TextBox 3"/>
+          <p:cNvSpPr txBox="1"/>
+          <p:nvPr/>
+        </p:nvSpPr>
+        <p:spPr>
+          <a:xfrm>
+            <a:off x="548640" y="6446520"/>
+            <a:ext cx="8229600" cy="274320"/>
+          </a:xfrm>
+          <a:prstGeom prst="rect">
+            <a:avLst/>
+          </a:prstGeom>
+          <a:noFill/>
+        </p:spPr>
+        <p:txBody>
+          <a:bodyPr wrap="square" anchor="t" lIns="0" rIns="0" tIns="0" bIns="0"/>
+          <a:lstStyle/>
+          <a:p>
+            <a:pPr algn="l"/>
+            <a:r>
+              <a:rPr sz="1000" b="0" i="0">
+                <a:solidFill>
+                  <a:srgbClr val="54595D"/>
+                </a:solidFill>
+                <a:latin typeface="Calibri"/>
+              </a:rPr>
+              <a:t>Digital Support and Security T Level  ·  Health, Safety and ESD in Digital Infrastructure</a:t>
+            </a:r>
+          </a:p>
+        </p:txBody>
+      </p:sp>
+      <p:sp>
+        <p:nvSpPr>
+          <p:cNvPr id="5" name="TextBox 4"/>
+          <p:cNvSpPr txBox="1"/>
+          <p:nvPr/>
+        </p:nvSpPr>
+        <p:spPr>
+          <a:xfrm>
+            <a:off x="10728655" y="6446520"/>
+            <a:ext cx="914400" cy="274320"/>
+          </a:xfrm>
+          <a:prstGeom prst="rect">
+            <a:avLst/>
+          </a:prstGeom>
+          <a:noFill/>
+        </p:spPr>
+        <p:txBody>
+          <a:bodyPr wrap="square" anchor="t" lIns="0" rIns="0" tIns="0" bIns="0"/>
+          <a:lstStyle/>
+          <a:p>
+            <a:pPr algn="r"/>
+            <a:r>
+              <a:rPr sz="1000" b="0" i="0">
+                <a:solidFill>
+                  <a:srgbClr val="54595D"/>
+                </a:solidFill>
+                <a:latin typeface="Calibri"/>
+              </a:rPr>
+              <a:t>7</a:t>
+            </a:r>
+          </a:p>
+        </p:txBody>
+      </p:sp>
+      <p:sp>
+        <p:nvSpPr>
+          <p:cNvPr id="6" name="TextBox 5"/>
+          <p:cNvSpPr txBox="1"/>
+          <p:nvPr/>
+        </p:nvSpPr>
+        <p:spPr>
+          <a:xfrm>
+            <a:off x="548640" y="1554480"/>
+            <a:ext cx="6720840" cy="4617720"/>
+          </a:xfrm>
+          <a:prstGeom prst="rect">
+            <a:avLst/>
+          </a:prstGeom>
+          <a:noFill/>
+        </p:spPr>
+        <p:txBody>
+          <a:bodyPr wrap="square" lIns="0" rIns="0" tIns="0" bIns="0">
+            <a:spAutoFit/>
+          </a:bodyPr>
+          <a:lstStyle/>
+          <a:p>
+            <a:pPr>
+              <a:spcAft>
+                <a:spcPts val="1260"/>
+              </a:spcAft>
+            </a:pPr>
+            <a:r>
+              <a:rPr sz="2100" b="0">
+                <a:solidFill>
+                  <a:srgbClr val="202122"/>
+                </a:solidFill>
+                <a:latin typeface="Calibri"/>
+              </a:rPr>
+              <a:t>Infrastructure work is covered by several health and safety laws.</a:t>
+            </a:r>
+          </a:p>
+          <a:p>
+            <a:pPr>
+              <a:spcAft>
+                <a:spcPts val="1260"/>
+              </a:spcAft>
+            </a:pPr>
+            <a:r>
+              <a:rPr sz="2100" b="0">
+                <a:solidFill>
+                  <a:srgbClr val="202122"/>
+                </a:solidFill>
+                <a:latin typeface="Calibri"/>
+              </a:rPr>
+              <a:t>The Health and Safety at Work etc. Act 1974 sets the employer's general duty of care, including PPE. The Manual Handling Operations Regulations 1992 cover lifting servers and network kit. The Display Screen Equipment Regulations cover workstation set-up and screen breaks.</a:t>
+            </a:r>
+          </a:p>
+          <a:p>
+            <a:pPr>
+              <a:spcAft>
+                <a:spcPts val="1260"/>
+              </a:spcAft>
+            </a:pPr>
+            <a:r>
+              <a:rPr sz="2100" b="0">
+                <a:solidFill>
+                  <a:srgbClr val="202122"/>
+                </a:solidFill>
+                <a:latin typeface="Calibri"/>
+              </a:rPr>
+              <a:t>COSHH covers hazardous substances such as printer toner. The Control of Major Accident Hazards Regulations 2015 include earthing. The WEEE Directive 2013 covers disposing of old hardware responsibly.</a:t>
+            </a:r>
+          </a:p>
+        </p:txBody>
+      </p:sp>
+      <p:sp>
+        <p:nvSpPr>
+          <p:cNvPr id="7" name="Rounded Rectangle 6"/>
+          <p:cNvSpPr/>
+          <p:nvPr/>
+        </p:nvSpPr>
+        <p:spPr>
+          <a:xfrm>
+            <a:off x="7772400" y="1554480"/>
+            <a:ext cx="3867912" cy="4526280"/>
+          </a:xfrm>
+          <a:prstGeom prst="roundRect">
+            <a:avLst>
+              <a:gd name="adj" fmla="val 8000"/>
+            </a:avLst>
+          </a:prstGeom>
+          <a:solidFill>
+            <a:srgbClr val="03306E"/>
+          </a:solidFill>
+          <a:ln>
+            <a:noFill/>
+          </a:ln>
+          <a:effectLst/>
+        </p:spPr>
+        <p:style>
+          <a:lnRef idx="1">
+            <a:schemeClr val="accent1"/>
+          </a:lnRef>
+          <a:fillRef idx="3">
+            <a:schemeClr val="accent1"/>
+          </a:fillRef>
+          <a:effectRef idx="2">
+            <a:schemeClr val="accent1"/>
+          </a:effectRef>
+          <a:fontRef idx="minor">
+            <a:schemeClr val="lt1"/>
+          </a:fontRef>
+        </p:style>
+        <p:txBody>
+          <a:bodyPr rtlCol="0" anchor="ctr"/>
+          <a:lstStyle/>
+          <a:p/>
+        </p:txBody>
+      </p:sp>
+      <p:sp>
+        <p:nvSpPr>
+          <p:cNvPr id="8" name="Oval 7"/>
+          <p:cNvSpPr/>
+          <p:nvPr/>
+        </p:nvSpPr>
+        <p:spPr>
+          <a:xfrm>
+            <a:off x="8046720" y="1828800"/>
+            <a:ext cx="548640" cy="548640"/>
+          </a:xfrm>
+          <a:prstGeom prst="ellipse">
+            <a:avLst/>
+          </a:prstGeom>
+          <a:solidFill>
+            <a:srgbClr val="33C17A"/>
+          </a:solidFill>
+          <a:ln>
+            <a:noFill/>
+          </a:ln>
+          <a:effectLst/>
+        </p:spPr>
+        <p:style>
+          <a:lnRef idx="1">
+            <a:schemeClr val="accent1"/>
+          </a:lnRef>
+          <a:fillRef idx="3">
+            <a:schemeClr val="accent1"/>
+          </a:fillRef>
+          <a:effectRef idx="2">
+            <a:schemeClr val="accent1"/>
+          </a:effectRef>
+          <a:fontRef idx="minor">
+            <a:schemeClr val="lt1"/>
+          </a:fontRef>
+        </p:style>
+        <p:txBody>
+          <a:bodyPr rtlCol="0" anchor="ctr" lIns="0" rIns="0" tIns="0" bIns="0"/>
+          <a:lstStyle/>
+          <a:p>
+            <a:pPr algn="ctr"/>
+            <a:r>
+              <a:rPr sz="1300" b="1">
+                <a:solidFill>
+                  <a:srgbClr val="202122"/>
+                </a:solidFill>
+                <a:latin typeface="Calibri"/>
+              </a:rPr>
+              <a:t>e.g.</a:t>
+            </a:r>
+          </a:p>
+        </p:txBody>
+      </p:sp>
+      <p:sp>
+        <p:nvSpPr>
+          <p:cNvPr id="9" name="TextBox 8"/>
+          <p:cNvSpPr txBox="1"/>
+          <p:nvPr/>
+        </p:nvSpPr>
+        <p:spPr>
+          <a:xfrm>
+            <a:off x="8046720" y="2560320"/>
+            <a:ext cx="3291840" cy="365760"/>
+          </a:xfrm>
+          <a:prstGeom prst="rect">
+            <a:avLst/>
+          </a:prstGeom>
+          <a:noFill/>
+        </p:spPr>
+        <p:txBody>
+          <a:bodyPr wrap="square" anchor="t" lIns="0" rIns="0" tIns="0" bIns="0"/>
+          <a:lstStyle/>
+          <a:p>
+            <a:pPr algn="l"/>
+            <a:r>
+              <a:rPr sz="1300" b="1" i="0">
+                <a:solidFill>
+                  <a:srgbClr val="A9C8F0"/>
+                </a:solidFill>
+                <a:latin typeface="Calibri"/>
+              </a:rPr>
+              <a:t>EXAMPLE</a:t>
+            </a:r>
+          </a:p>
+        </p:txBody>
+      </p:sp>
+      <p:sp>
+        <p:nvSpPr>
+          <p:cNvPr id="10" name="TextBox 9"/>
+          <p:cNvSpPr txBox="1"/>
+          <p:nvPr/>
+        </p:nvSpPr>
+        <p:spPr>
+          <a:xfrm>
+            <a:off x="8046720" y="2971800"/>
+            <a:ext cx="3291840" cy="2971800"/>
+          </a:xfrm>
+          <a:prstGeom prst="rect">
+            <a:avLst/>
+          </a:prstGeom>
+          <a:noFill/>
+        </p:spPr>
+        <p:txBody>
+          <a:bodyPr wrap="square" anchor="t" lIns="0" rIns="0" tIns="0" bIns="0"/>
+          <a:lstStyle/>
+          <a:p>
+            <a:pPr algn="l"/>
+            <a:r>
+              <a:rPr sz="1900" b="0" i="0">
+                <a:solidFill>
+                  <a:srgbClr val="FFFFFF"/>
+                </a:solidFill>
+                <a:latin typeface="Cambria"/>
+              </a:rPr>
+              <a:t>Replacing a UPS battery: manual handling (it's heavy), COSHH (battery acid) and WEEE (disposal) all apply.</a:t>
+            </a:r>
+          </a:p>
+        </p:txBody>
+      </p:sp>
+    </p:spTree>
+  </p:cSld>
+  <p:clrMapOvr>
+    <a:masterClrMapping/>
+  </p:clrMapOvr>
+</p:sld>
+</file>
+
+<file path=ppt/slides/slide8.xml><?xml version="1.0" encoding="utf-8"?>
+<p:sld xmlns:a="http://schemas.openxmlformats.org/drawingml/2006/main" xmlns:p="http://schemas.openxmlformats.org/presentationml/2006/main" xmlns:r="http://schemas.openxmlformats.org/officeDocument/2006/relationships">
+  <p:cSld>
+    <p:bg>
+      <p:bgPr>
+        <a:solidFill>
+          <a:srgbClr val="FFFFFF"/>
+        </a:solidFill>
+        <a:effectLst/>
+      </p:bgPr>
+    </p:bg>
+    <p:spTree>
+      <p:nvGrpSpPr>
+        <p:cNvPr id="1" name=""/>
+        <p:cNvGrpSpPr/>
+        <p:nvPr/>
+      </p:nvGrpSpPr>
+      <p:grpSpPr/>
+      <p:sp>
+        <p:nvSpPr>
+          <p:cNvPr id="2" name="TextBox 1"/>
+          <p:cNvSpPr txBox="1"/>
+          <p:nvPr/>
+        </p:nvSpPr>
+        <p:spPr>
+          <a:xfrm>
+            <a:off x="548640" y="320040"/>
+            <a:ext cx="11094415" cy="274320"/>
+          </a:xfrm>
+          <a:prstGeom prst="rect">
+            <a:avLst/>
+          </a:prstGeom>
+          <a:noFill/>
+        </p:spPr>
+        <p:txBody>
+          <a:bodyPr wrap="square" anchor="t" lIns="0" rIns="0" tIns="0" bIns="0"/>
+          <a:lstStyle/>
+          <a:p>
+            <a:pPr algn="l"/>
+            <a:r>
+              <a:rPr sz="1100" b="1" i="0">
+                <a:solidFill>
+                  <a:srgbClr val="54595D"/>
+                </a:solidFill>
+                <a:latin typeface="Calibri"/>
+              </a:rPr>
+              <a:t>DIGITAL INFRASTRUCTURE  ·  Digital Infrastructure Content Area 2</a:t>
+            </a:r>
+          </a:p>
+        </p:txBody>
+      </p:sp>
+      <p:sp>
+        <p:nvSpPr>
+          <p:cNvPr id="3" name="TextBox 2"/>
+          <p:cNvSpPr txBox="1"/>
+          <p:nvPr/>
+        </p:nvSpPr>
+        <p:spPr>
+          <a:xfrm>
+            <a:off x="548640" y="566928"/>
+            <a:ext cx="11094415" cy="822960"/>
+          </a:xfrm>
+          <a:prstGeom prst="rect">
+            <a:avLst/>
+          </a:prstGeom>
+          <a:noFill/>
+        </p:spPr>
+        <p:txBody>
+          <a:bodyPr wrap="square" anchor="ctr" lIns="0" rIns="0" tIns="0" bIns="0"/>
+          <a:lstStyle/>
+          <a:p>
+            <a:pPr algn="l"/>
+            <a:r>
+              <a:rPr sz="3200" b="1" i="0">
+                <a:solidFill>
+                  <a:srgbClr val="03306E"/>
+                </a:solidFill>
+                <a:latin typeface="Cambria"/>
+              </a:rPr>
+              <a:t>Health and safety legislation</a:t>
+            </a:r>
+          </a:p>
+        </p:txBody>
+      </p:sp>
+      <p:sp>
+        <p:nvSpPr>
+          <p:cNvPr id="4" name="TextBox 3"/>
+          <p:cNvSpPr txBox="1"/>
+          <p:nvPr/>
+        </p:nvSpPr>
+        <p:spPr>
+          <a:xfrm>
+            <a:off x="548640" y="6446520"/>
+            <a:ext cx="8229600" cy="274320"/>
+          </a:xfrm>
+          <a:prstGeom prst="rect">
+            <a:avLst/>
+          </a:prstGeom>
+          <a:noFill/>
+        </p:spPr>
+        <p:txBody>
+          <a:bodyPr wrap="square" anchor="t" lIns="0" rIns="0" tIns="0" bIns="0"/>
+          <a:lstStyle/>
+          <a:p>
+            <a:pPr algn="l"/>
+            <a:r>
+              <a:rPr sz="1000" b="0" i="0">
+                <a:solidFill>
+                  <a:srgbClr val="54595D"/>
+                </a:solidFill>
+                <a:latin typeface="Calibri"/>
+              </a:rPr>
+              <a:t>Digital Support and Security T Level  ·  Health, Safety and ESD in Digital Infrastructure</a:t>
+            </a:r>
+          </a:p>
+        </p:txBody>
+      </p:sp>
+      <p:sp>
+        <p:nvSpPr>
+          <p:cNvPr id="5" name="TextBox 4"/>
+          <p:cNvSpPr txBox="1"/>
+          <p:nvPr/>
+        </p:nvSpPr>
+        <p:spPr>
+          <a:xfrm>
+            <a:off x="10728655" y="6446520"/>
+            <a:ext cx="914400" cy="274320"/>
+          </a:xfrm>
+          <a:prstGeom prst="rect">
+            <a:avLst/>
+          </a:prstGeom>
+          <a:noFill/>
+        </p:spPr>
+        <p:txBody>
+          <a:bodyPr wrap="square" anchor="t" lIns="0" rIns="0" tIns="0" bIns="0"/>
+          <a:lstStyle/>
+          <a:p>
+            <a:pPr algn="r"/>
+            <a:r>
+              <a:rPr sz="1000" b="0" i="0">
+                <a:solidFill>
+                  <a:srgbClr val="54595D"/>
+                </a:solidFill>
+                <a:latin typeface="Calibri"/>
+              </a:rPr>
+              <a:t>8</a:t>
             </a:r>
           </a:p>
         </p:txBody>
@@ -6562,7 +10327,7 @@
 </p:sld>
 </file>
 
-<file path=ppt/slides/slide6.xml><?xml version="1.0" encoding="utf-8"?>
+<file path=ppt/slides/slide9.xml><?xml version="1.0" encoding="utf-8"?>
 <p:sld xmlns:a="http://schemas.openxmlformats.org/drawingml/2006/main" xmlns:p="http://schemas.openxmlformats.org/presentationml/2006/main" xmlns:r="http://schemas.openxmlformats.org/officeDocument/2006/relationships">
   <p:cSld>
     <p:bg>
@@ -6641,7 +10406,7 @@
                 </a:solidFill>
                 <a:latin typeface="Cambria"/>
               </a:rPr>
-              <a:t>Check your understanding</a:t>
+              <a:t>Quick check: Health and safety legislation</a:t>
             </a:r>
           </a:p>
         </p:txBody>
@@ -6707,7 +10472,7 @@
                 </a:solidFill>
                 <a:latin typeface="Calibri"/>
               </a:rPr>
-              <a:t>6</a:t>
+              <a:t>9</a:t>
             </a:r>
           </a:p>
         </p:txBody>
@@ -6720,8 +10485,8 @@
         </p:nvSpPr>
         <p:spPr>
           <a:xfrm>
-            <a:off x="548640" y="1618488"/>
-            <a:ext cx="411480" cy="411480"/>
+            <a:off x="548640" y="1691640"/>
+            <a:ext cx="502920" cy="502920"/>
           </a:xfrm>
           <a:prstGeom prst="ellipse">
             <a:avLst/>
@@ -6754,7 +10519,7 @@
           <a:p>
             <a:pPr algn="ctr"/>
             <a:r>
-              <a:rPr sz="1400" b="1">
+              <a:rPr sz="1600" b="1">
                 <a:solidFill>
                   <a:srgbClr val="202122"/>
                 </a:solidFill>
@@ -6773,8 +10538,8 @@
         </p:nvSpPr>
         <p:spPr>
           <a:xfrm>
-            <a:off x="1234440" y="1600200"/>
-            <a:ext cx="10408615" cy="1030986"/>
+            <a:off x="1371600" y="1645920"/>
+            <a:ext cx="10271455" cy="1188720"/>
           </a:xfrm>
           <a:prstGeom prst="rect">
             <a:avLst/>
@@ -6787,13 +10552,13 @@
           <a:p>
             <a:pPr algn="l"/>
             <a:r>
-              <a:rPr sz="2200" b="0" i="0">
+              <a:rPr sz="2400" b="0" i="0">
                 <a:solidFill>
                   <a:srgbClr val="202122"/>
                 </a:solidFill>
                 <a:latin typeface="Calibri"/>
               </a:rPr>
-              <a:t>Name two pieces of anti-static equipment.</a:t>
+              <a:t>Which regulations cover lifting heavy servers?</a:t>
             </a:r>
           </a:p>
         </p:txBody>
@@ -6806,8 +10571,8 @@
         </p:nvSpPr>
         <p:spPr>
           <a:xfrm>
-            <a:off x="548640" y="2814066"/>
-            <a:ext cx="411480" cy="411480"/>
+            <a:off x="548640" y="3108960"/>
+            <a:ext cx="502920" cy="502920"/>
           </a:xfrm>
           <a:prstGeom prst="ellipse">
             <a:avLst/>
@@ -6840,7 +10605,7 @@
           <a:p>
             <a:pPr algn="ctr"/>
             <a:r>
-              <a:rPr sz="1400" b="1">
+              <a:rPr sz="1600" b="1">
                 <a:solidFill>
                   <a:srgbClr val="202122"/>
                 </a:solidFill>
@@ -6859,8 +10624,8 @@
         </p:nvSpPr>
         <p:spPr>
           <a:xfrm>
-            <a:off x="1234440" y="2795778"/>
-            <a:ext cx="10408615" cy="1030986"/>
+            <a:off x="1371600" y="3063240"/>
+            <a:ext cx="10271455" cy="1188720"/>
           </a:xfrm>
           <a:prstGeom prst="rect">
             <a:avLst/>
@@ -6873,13 +10638,13 @@
           <a:p>
             <a:pPr algn="l"/>
             <a:r>
-              <a:rPr sz="2200" b="0" i="0">
+              <a:rPr sz="2400" b="0" i="0">
                 <a:solidFill>
                   <a:srgbClr val="202122"/>
                 </a:solidFill>
                 <a:latin typeface="Calibri"/>
               </a:rPr>
-              <a:t>Why is ESD damage dangerous even if nothing seems wrong?</a:t>
+              <a:t>What does COSHH cover?</a:t>
             </a:r>
           </a:p>
         </p:txBody>
@@ -6892,8 +10657,8 @@
         </p:nvSpPr>
         <p:spPr>
           <a:xfrm>
-            <a:off x="548640" y="4009644"/>
-            <a:ext cx="411480" cy="411480"/>
+            <a:off x="548640" y="4526280"/>
+            <a:ext cx="502920" cy="502920"/>
           </a:xfrm>
           <a:prstGeom prst="ellipse">
             <a:avLst/>
@@ -6926,7 +10691,7 @@
           <a:p>
             <a:pPr algn="ctr"/>
             <a:r>
-              <a:rPr sz="1400" b="1">
+              <a:rPr sz="1600" b="1">
                 <a:solidFill>
                   <a:srgbClr val="202122"/>
                 </a:solidFill>
@@ -6945,8 +10710,8 @@
         </p:nvSpPr>
         <p:spPr>
           <a:xfrm>
-            <a:off x="1234440" y="3991356"/>
-            <a:ext cx="10408615" cy="1030986"/>
+            <a:off x="1371600" y="4480560"/>
+            <a:ext cx="10271455" cy="1188720"/>
           </a:xfrm>
           <a:prstGeom prst="rect">
             <a:avLst/>
@@ -6959,1052 +10724,13 @@
           <a:p>
             <a:pPr algn="l"/>
             <a:r>
-              <a:rPr sz="2200" b="0" i="0">
+              <a:rPr sz="2400" b="0" i="0">
                 <a:solidFill>
                   <a:srgbClr val="202122"/>
                 </a:solidFill>
                 <a:latin typeface="Calibri"/>
               </a:rPr>
-              <a:t>Which regulations cover chemicals such as toner?</a:t>
-            </a:r>
-          </a:p>
-        </p:txBody>
-      </p:sp>
-      <p:sp>
-        <p:nvSpPr>
-          <p:cNvPr id="12" name="Oval 11"/>
-          <p:cNvSpPr/>
-          <p:nvPr/>
-        </p:nvSpPr>
-        <p:spPr>
-          <a:xfrm>
-            <a:off x="548640" y="5205221"/>
-            <a:ext cx="411480" cy="411480"/>
-          </a:xfrm>
-          <a:prstGeom prst="ellipse">
-            <a:avLst/>
-          </a:prstGeom>
-          <a:solidFill>
-            <a:srgbClr val="33C17A"/>
-          </a:solidFill>
-          <a:ln>
-            <a:noFill/>
-          </a:ln>
-          <a:effectLst/>
-        </p:spPr>
-        <p:style>
-          <a:lnRef idx="1">
-            <a:schemeClr val="accent1"/>
-          </a:lnRef>
-          <a:fillRef idx="3">
-            <a:schemeClr val="accent1"/>
-          </a:fillRef>
-          <a:effectRef idx="2">
-            <a:schemeClr val="accent1"/>
-          </a:effectRef>
-          <a:fontRef idx="minor">
-            <a:schemeClr val="lt1"/>
-          </a:fontRef>
-        </p:style>
-        <p:txBody>
-          <a:bodyPr rtlCol="0" anchor="ctr" lIns="0" rIns="0" tIns="0" bIns="0"/>
-          <a:lstStyle/>
-          <a:p>
-            <a:pPr algn="ctr"/>
-            <a:r>
-              <a:rPr sz="1400" b="1">
-                <a:solidFill>
-                  <a:srgbClr val="202122"/>
-                </a:solidFill>
-                <a:latin typeface="Calibri"/>
-              </a:rPr>
-              <a:t>4</a:t>
-            </a:r>
-          </a:p>
-        </p:txBody>
-      </p:sp>
-      <p:sp>
-        <p:nvSpPr>
-          <p:cNvPr id="13" name="TextBox 12"/>
-          <p:cNvSpPr txBox="1"/>
-          <p:nvPr/>
-        </p:nvSpPr>
-        <p:spPr>
-          <a:xfrm>
-            <a:off x="1234440" y="5186933"/>
-            <a:ext cx="10408615" cy="1030986"/>
-          </a:xfrm>
-          <a:prstGeom prst="rect">
-            <a:avLst/>
-          </a:prstGeom>
-          <a:noFill/>
-        </p:spPr>
-        <p:txBody>
-          <a:bodyPr wrap="square" anchor="t" lIns="0" rIns="0" tIns="0" bIns="0"/>
-          <a:lstStyle/>
-          <a:p>
-            <a:pPr algn="l"/>
-            <a:r>
-              <a:rPr sz="2200" b="0" i="0">
-                <a:solidFill>
-                  <a:srgbClr val="202122"/>
-                </a:solidFill>
-                <a:latin typeface="Calibri"/>
-              </a:rPr>
-              <a:t>Which law covers disposing of old switches?</a:t>
-            </a:r>
-          </a:p>
-        </p:txBody>
-      </p:sp>
-    </p:spTree>
-  </p:cSld>
-  <p:clrMapOvr>
-    <a:masterClrMapping/>
-  </p:clrMapOvr>
-</p:sld>
-</file>
-
-<file path=ppt/slides/slide7.xml><?xml version="1.0" encoding="utf-8"?>
-<p:sld xmlns:a="http://schemas.openxmlformats.org/drawingml/2006/main" xmlns:p="http://schemas.openxmlformats.org/presentationml/2006/main" xmlns:r="http://schemas.openxmlformats.org/officeDocument/2006/relationships">
-  <p:cSld>
-    <p:bg>
-      <p:bgPr>
-        <a:solidFill>
-          <a:srgbClr val="FFFFFF"/>
-        </a:solidFill>
-        <a:effectLst/>
-      </p:bgPr>
-    </p:bg>
-    <p:spTree>
-      <p:nvGrpSpPr>
-        <p:cNvPr id="1" name=""/>
-        <p:cNvGrpSpPr/>
-        <p:nvPr/>
-      </p:nvGrpSpPr>
-      <p:grpSpPr/>
-      <p:sp>
-        <p:nvSpPr>
-          <p:cNvPr id="2" name="TextBox 1"/>
-          <p:cNvSpPr txBox="1"/>
-          <p:nvPr/>
-        </p:nvSpPr>
-        <p:spPr>
-          <a:xfrm>
-            <a:off x="548640" y="320040"/>
-            <a:ext cx="11094415" cy="274320"/>
-          </a:xfrm>
-          <a:prstGeom prst="rect">
-            <a:avLst/>
-          </a:prstGeom>
-          <a:noFill/>
-        </p:spPr>
-        <p:txBody>
-          <a:bodyPr wrap="square" anchor="t" lIns="0" rIns="0" tIns="0" bIns="0"/>
-          <a:lstStyle/>
-          <a:p>
-            <a:pPr algn="l"/>
-            <a:r>
-              <a:rPr sz="1100" b="1" i="0">
-                <a:solidFill>
-                  <a:srgbClr val="54595D"/>
-                </a:solidFill>
-                <a:latin typeface="Calibri"/>
-              </a:rPr>
-              <a:t>DIGITAL INFRASTRUCTURE  ·  Digital Infrastructure Content Area 2</a:t>
-            </a:r>
-          </a:p>
-        </p:txBody>
-      </p:sp>
-      <p:sp>
-        <p:nvSpPr>
-          <p:cNvPr id="3" name="TextBox 2"/>
-          <p:cNvSpPr txBox="1"/>
-          <p:nvPr/>
-        </p:nvSpPr>
-        <p:spPr>
-          <a:xfrm>
-            <a:off x="548640" y="566928"/>
-            <a:ext cx="11094415" cy="822960"/>
-          </a:xfrm>
-          <a:prstGeom prst="rect">
-            <a:avLst/>
-          </a:prstGeom>
-          <a:noFill/>
-        </p:spPr>
-        <p:txBody>
-          <a:bodyPr wrap="square" anchor="ctr" lIns="0" rIns="0" tIns="0" bIns="0"/>
-          <a:lstStyle/>
-          <a:p>
-            <a:pPr algn="l"/>
-            <a:r>
-              <a:rPr sz="3200" b="1" i="0">
-                <a:solidFill>
-                  <a:srgbClr val="03306E"/>
-                </a:solidFill>
-                <a:latin typeface="Cambria"/>
-              </a:rPr>
-              <a:t>Answers</a:t>
-            </a:r>
-          </a:p>
-        </p:txBody>
-      </p:sp>
-      <p:sp>
-        <p:nvSpPr>
-          <p:cNvPr id="4" name="TextBox 3"/>
-          <p:cNvSpPr txBox="1"/>
-          <p:nvPr/>
-        </p:nvSpPr>
-        <p:spPr>
-          <a:xfrm>
-            <a:off x="548640" y="6446520"/>
-            <a:ext cx="8229600" cy="274320"/>
-          </a:xfrm>
-          <a:prstGeom prst="rect">
-            <a:avLst/>
-          </a:prstGeom>
-          <a:noFill/>
-        </p:spPr>
-        <p:txBody>
-          <a:bodyPr wrap="square" anchor="t" lIns="0" rIns="0" tIns="0" bIns="0"/>
-          <a:lstStyle/>
-          <a:p>
-            <a:pPr algn="l"/>
-            <a:r>
-              <a:rPr sz="1000" b="0" i="0">
-                <a:solidFill>
-                  <a:srgbClr val="54595D"/>
-                </a:solidFill>
-                <a:latin typeface="Calibri"/>
-              </a:rPr>
-              <a:t>Digital Support and Security T Level  ·  Health, Safety and ESD in Digital Infrastructure</a:t>
-            </a:r>
-          </a:p>
-        </p:txBody>
-      </p:sp>
-      <p:sp>
-        <p:nvSpPr>
-          <p:cNvPr id="5" name="TextBox 4"/>
-          <p:cNvSpPr txBox="1"/>
-          <p:nvPr/>
-        </p:nvSpPr>
-        <p:spPr>
-          <a:xfrm>
-            <a:off x="10728655" y="6446520"/>
-            <a:ext cx="914400" cy="274320"/>
-          </a:xfrm>
-          <a:prstGeom prst="rect">
-            <a:avLst/>
-          </a:prstGeom>
-          <a:noFill/>
-        </p:spPr>
-        <p:txBody>
-          <a:bodyPr wrap="square" anchor="t" lIns="0" rIns="0" tIns="0" bIns="0"/>
-          <a:lstStyle/>
-          <a:p>
-            <a:pPr algn="r"/>
-            <a:r>
-              <a:rPr sz="1000" b="0" i="0">
-                <a:solidFill>
-                  <a:srgbClr val="54595D"/>
-                </a:solidFill>
-                <a:latin typeface="Calibri"/>
-              </a:rPr>
-              <a:t>7</a:t>
-            </a:r>
-          </a:p>
-        </p:txBody>
-      </p:sp>
-      <p:sp>
-        <p:nvSpPr>
-          <p:cNvPr id="6" name="Oval 5"/>
-          <p:cNvSpPr/>
-          <p:nvPr/>
-        </p:nvSpPr>
-        <p:spPr>
-          <a:xfrm>
-            <a:off x="548640" y="1618488"/>
-            <a:ext cx="411480" cy="411480"/>
-          </a:xfrm>
-          <a:prstGeom prst="ellipse">
-            <a:avLst/>
-          </a:prstGeom>
-          <a:solidFill>
-            <a:srgbClr val="33C17A"/>
-          </a:solidFill>
-          <a:ln>
-            <a:noFill/>
-          </a:ln>
-          <a:effectLst/>
-        </p:spPr>
-        <p:style>
-          <a:lnRef idx="1">
-            <a:schemeClr val="accent1"/>
-          </a:lnRef>
-          <a:fillRef idx="3">
-            <a:schemeClr val="accent1"/>
-          </a:fillRef>
-          <a:effectRef idx="2">
-            <a:schemeClr val="accent1"/>
-          </a:effectRef>
-          <a:fontRef idx="minor">
-            <a:schemeClr val="lt1"/>
-          </a:fontRef>
-        </p:style>
-        <p:txBody>
-          <a:bodyPr rtlCol="0" anchor="ctr" lIns="0" rIns="0" tIns="0" bIns="0"/>
-          <a:lstStyle/>
-          <a:p>
-            <a:pPr algn="ctr"/>
-            <a:r>
-              <a:rPr sz="1400" b="1">
-                <a:solidFill>
-                  <a:srgbClr val="202122"/>
-                </a:solidFill>
-                <a:latin typeface="Calibri"/>
-              </a:rPr>
-              <a:t>1</a:t>
-            </a:r>
-          </a:p>
-        </p:txBody>
-      </p:sp>
-      <p:sp>
-        <p:nvSpPr>
-          <p:cNvPr id="7" name="TextBox 6"/>
-          <p:cNvSpPr txBox="1"/>
-          <p:nvPr/>
-        </p:nvSpPr>
-        <p:spPr>
-          <a:xfrm>
-            <a:off x="1234440" y="1600200"/>
-            <a:ext cx="10408615" cy="1030986"/>
-          </a:xfrm>
-          <a:prstGeom prst="rect">
-            <a:avLst/>
-          </a:prstGeom>
-          <a:noFill/>
-        </p:spPr>
-        <p:txBody>
-          <a:bodyPr wrap="square" anchor="t" lIns="0" rIns="0" tIns="0" bIns="0"/>
-          <a:lstStyle/>
-          <a:p>
-            <a:pPr algn="l"/>
-            <a:r>
-              <a:rPr sz="1800" b="0" i="0">
-                <a:solidFill>
-                  <a:srgbClr val="54595D"/>
-                </a:solidFill>
-                <a:latin typeface="Calibri"/>
-              </a:rPr>
-              <a:t>Name two pieces of anti-static equipment.</a:t>
-            </a:r>
-          </a:p>
-          <a:p>
-            <a:r>
-              <a:rPr sz="1800" b="1">
-                <a:solidFill>
-                  <a:srgbClr val="03306E"/>
-                </a:solidFill>
-                <a:latin typeface="Calibri"/>
-              </a:rPr>
-              <a:t>Any two of: wrist strap, mat, anti-static bag.</a:t>
-            </a:r>
-          </a:p>
-        </p:txBody>
-      </p:sp>
-      <p:sp>
-        <p:nvSpPr>
-          <p:cNvPr id="8" name="Oval 7"/>
-          <p:cNvSpPr/>
-          <p:nvPr/>
-        </p:nvSpPr>
-        <p:spPr>
-          <a:xfrm>
-            <a:off x="548640" y="2814066"/>
-            <a:ext cx="411480" cy="411480"/>
-          </a:xfrm>
-          <a:prstGeom prst="ellipse">
-            <a:avLst/>
-          </a:prstGeom>
-          <a:solidFill>
-            <a:srgbClr val="33C17A"/>
-          </a:solidFill>
-          <a:ln>
-            <a:noFill/>
-          </a:ln>
-          <a:effectLst/>
-        </p:spPr>
-        <p:style>
-          <a:lnRef idx="1">
-            <a:schemeClr val="accent1"/>
-          </a:lnRef>
-          <a:fillRef idx="3">
-            <a:schemeClr val="accent1"/>
-          </a:fillRef>
-          <a:effectRef idx="2">
-            <a:schemeClr val="accent1"/>
-          </a:effectRef>
-          <a:fontRef idx="minor">
-            <a:schemeClr val="lt1"/>
-          </a:fontRef>
-        </p:style>
-        <p:txBody>
-          <a:bodyPr rtlCol="0" anchor="ctr" lIns="0" rIns="0" tIns="0" bIns="0"/>
-          <a:lstStyle/>
-          <a:p>
-            <a:pPr algn="ctr"/>
-            <a:r>
-              <a:rPr sz="1400" b="1">
-                <a:solidFill>
-                  <a:srgbClr val="202122"/>
-                </a:solidFill>
-                <a:latin typeface="Calibri"/>
-              </a:rPr>
-              <a:t>2</a:t>
-            </a:r>
-          </a:p>
-        </p:txBody>
-      </p:sp>
-      <p:sp>
-        <p:nvSpPr>
-          <p:cNvPr id="9" name="TextBox 8"/>
-          <p:cNvSpPr txBox="1"/>
-          <p:nvPr/>
-        </p:nvSpPr>
-        <p:spPr>
-          <a:xfrm>
-            <a:off x="1234440" y="2795778"/>
-            <a:ext cx="10408615" cy="1030986"/>
-          </a:xfrm>
-          <a:prstGeom prst="rect">
-            <a:avLst/>
-          </a:prstGeom>
-          <a:noFill/>
-        </p:spPr>
-        <p:txBody>
-          <a:bodyPr wrap="square" anchor="t" lIns="0" rIns="0" tIns="0" bIns="0"/>
-          <a:lstStyle/>
-          <a:p>
-            <a:pPr algn="l"/>
-            <a:r>
-              <a:rPr sz="1800" b="0" i="0">
-                <a:solidFill>
-                  <a:srgbClr val="54595D"/>
-                </a:solidFill>
-                <a:latin typeface="Calibri"/>
-              </a:rPr>
-              <a:t>Why is ESD damage dangerous even if nothing seems wrong?</a:t>
-            </a:r>
-          </a:p>
-          <a:p>
-            <a:r>
-              <a:rPr sz="1800" b="1">
-                <a:solidFill>
-                  <a:srgbClr val="03306E"/>
-                </a:solidFill>
-                <a:latin typeface="Calibri"/>
-              </a:rPr>
-              <a:t>Components can be weakened and fail later.</a:t>
-            </a:r>
-          </a:p>
-        </p:txBody>
-      </p:sp>
-      <p:sp>
-        <p:nvSpPr>
-          <p:cNvPr id="10" name="Oval 9"/>
-          <p:cNvSpPr/>
-          <p:nvPr/>
-        </p:nvSpPr>
-        <p:spPr>
-          <a:xfrm>
-            <a:off x="548640" y="4009644"/>
-            <a:ext cx="411480" cy="411480"/>
-          </a:xfrm>
-          <a:prstGeom prst="ellipse">
-            <a:avLst/>
-          </a:prstGeom>
-          <a:solidFill>
-            <a:srgbClr val="33C17A"/>
-          </a:solidFill>
-          <a:ln>
-            <a:noFill/>
-          </a:ln>
-          <a:effectLst/>
-        </p:spPr>
-        <p:style>
-          <a:lnRef idx="1">
-            <a:schemeClr val="accent1"/>
-          </a:lnRef>
-          <a:fillRef idx="3">
-            <a:schemeClr val="accent1"/>
-          </a:fillRef>
-          <a:effectRef idx="2">
-            <a:schemeClr val="accent1"/>
-          </a:effectRef>
-          <a:fontRef idx="minor">
-            <a:schemeClr val="lt1"/>
-          </a:fontRef>
-        </p:style>
-        <p:txBody>
-          <a:bodyPr rtlCol="0" anchor="ctr" lIns="0" rIns="0" tIns="0" bIns="0"/>
-          <a:lstStyle/>
-          <a:p>
-            <a:pPr algn="ctr"/>
-            <a:r>
-              <a:rPr sz="1400" b="1">
-                <a:solidFill>
-                  <a:srgbClr val="202122"/>
-                </a:solidFill>
-                <a:latin typeface="Calibri"/>
-              </a:rPr>
-              <a:t>3</a:t>
-            </a:r>
-          </a:p>
-        </p:txBody>
-      </p:sp>
-      <p:sp>
-        <p:nvSpPr>
-          <p:cNvPr id="11" name="TextBox 10"/>
-          <p:cNvSpPr txBox="1"/>
-          <p:nvPr/>
-        </p:nvSpPr>
-        <p:spPr>
-          <a:xfrm>
-            <a:off x="1234440" y="3991356"/>
-            <a:ext cx="10408615" cy="1030986"/>
-          </a:xfrm>
-          <a:prstGeom prst="rect">
-            <a:avLst/>
-          </a:prstGeom>
-          <a:noFill/>
-        </p:spPr>
-        <p:txBody>
-          <a:bodyPr wrap="square" anchor="t" lIns="0" rIns="0" tIns="0" bIns="0"/>
-          <a:lstStyle/>
-          <a:p>
-            <a:pPr algn="l"/>
-            <a:r>
-              <a:rPr sz="1800" b="0" i="0">
-                <a:solidFill>
-                  <a:srgbClr val="54595D"/>
-                </a:solidFill>
-                <a:latin typeface="Calibri"/>
-              </a:rPr>
-              <a:t>Which regulations cover chemicals such as toner?</a:t>
-            </a:r>
-          </a:p>
-          <a:p>
-            <a:r>
-              <a:rPr sz="1800" b="1">
-                <a:solidFill>
-                  <a:srgbClr val="03306E"/>
-                </a:solidFill>
-                <a:latin typeface="Calibri"/>
-              </a:rPr>
-              <a:t>COSHH Regulations 2002.</a:t>
-            </a:r>
-          </a:p>
-        </p:txBody>
-      </p:sp>
-      <p:sp>
-        <p:nvSpPr>
-          <p:cNvPr id="12" name="Oval 11"/>
-          <p:cNvSpPr/>
-          <p:nvPr/>
-        </p:nvSpPr>
-        <p:spPr>
-          <a:xfrm>
-            <a:off x="548640" y="5205221"/>
-            <a:ext cx="411480" cy="411480"/>
-          </a:xfrm>
-          <a:prstGeom prst="ellipse">
-            <a:avLst/>
-          </a:prstGeom>
-          <a:solidFill>
-            <a:srgbClr val="33C17A"/>
-          </a:solidFill>
-          <a:ln>
-            <a:noFill/>
-          </a:ln>
-          <a:effectLst/>
-        </p:spPr>
-        <p:style>
-          <a:lnRef idx="1">
-            <a:schemeClr val="accent1"/>
-          </a:lnRef>
-          <a:fillRef idx="3">
-            <a:schemeClr val="accent1"/>
-          </a:fillRef>
-          <a:effectRef idx="2">
-            <a:schemeClr val="accent1"/>
-          </a:effectRef>
-          <a:fontRef idx="minor">
-            <a:schemeClr val="lt1"/>
-          </a:fontRef>
-        </p:style>
-        <p:txBody>
-          <a:bodyPr rtlCol="0" anchor="ctr" lIns="0" rIns="0" tIns="0" bIns="0"/>
-          <a:lstStyle/>
-          <a:p>
-            <a:pPr algn="ctr"/>
-            <a:r>
-              <a:rPr sz="1400" b="1">
-                <a:solidFill>
-                  <a:srgbClr val="202122"/>
-                </a:solidFill>
-                <a:latin typeface="Calibri"/>
-              </a:rPr>
-              <a:t>4</a:t>
-            </a:r>
-          </a:p>
-        </p:txBody>
-      </p:sp>
-      <p:sp>
-        <p:nvSpPr>
-          <p:cNvPr id="13" name="TextBox 12"/>
-          <p:cNvSpPr txBox="1"/>
-          <p:nvPr/>
-        </p:nvSpPr>
-        <p:spPr>
-          <a:xfrm>
-            <a:off x="1234440" y="5186933"/>
-            <a:ext cx="10408615" cy="1030986"/>
-          </a:xfrm>
-          <a:prstGeom prst="rect">
-            <a:avLst/>
-          </a:prstGeom>
-          <a:noFill/>
-        </p:spPr>
-        <p:txBody>
-          <a:bodyPr wrap="square" anchor="t" lIns="0" rIns="0" tIns="0" bIns="0"/>
-          <a:lstStyle/>
-          <a:p>
-            <a:pPr algn="l"/>
-            <a:r>
-              <a:rPr sz="1800" b="0" i="0">
-                <a:solidFill>
-                  <a:srgbClr val="54595D"/>
-                </a:solidFill>
-                <a:latin typeface="Calibri"/>
-              </a:rPr>
-              <a:t>Which law covers disposing of old switches?</a:t>
-            </a:r>
-          </a:p>
-          <a:p>
-            <a:r>
-              <a:rPr sz="1800" b="1">
-                <a:solidFill>
-                  <a:srgbClr val="03306E"/>
-                </a:solidFill>
-                <a:latin typeface="Calibri"/>
-              </a:rPr>
-              <a:t>WEEE Directive 2013.</a:t>
-            </a:r>
-          </a:p>
-        </p:txBody>
-      </p:sp>
-    </p:spTree>
-  </p:cSld>
-  <p:clrMapOvr>
-    <a:masterClrMapping/>
-  </p:clrMapOvr>
-</p:sld>
-</file>
-
-<file path=ppt/slides/slide8.xml><?xml version="1.0" encoding="utf-8"?>
-<p:sld xmlns:a="http://schemas.openxmlformats.org/drawingml/2006/main" xmlns:p="http://schemas.openxmlformats.org/presentationml/2006/main" xmlns:r="http://schemas.openxmlformats.org/officeDocument/2006/relationships">
-  <p:cSld>
-    <p:bg>
-      <p:bgPr>
-        <a:solidFill>
-          <a:srgbClr val="FFFFFF"/>
-        </a:solidFill>
-        <a:effectLst/>
-      </p:bgPr>
-    </p:bg>
-    <p:spTree>
-      <p:nvGrpSpPr>
-        <p:cNvPr id="1" name=""/>
-        <p:cNvGrpSpPr/>
-        <p:nvPr/>
-      </p:nvGrpSpPr>
-      <p:grpSpPr/>
-      <p:sp>
-        <p:nvSpPr>
-          <p:cNvPr id="2" name="TextBox 1"/>
-          <p:cNvSpPr txBox="1"/>
-          <p:nvPr/>
-        </p:nvSpPr>
-        <p:spPr>
-          <a:xfrm>
-            <a:off x="548640" y="320040"/>
-            <a:ext cx="11094415" cy="274320"/>
-          </a:xfrm>
-          <a:prstGeom prst="rect">
-            <a:avLst/>
-          </a:prstGeom>
-          <a:noFill/>
-        </p:spPr>
-        <p:txBody>
-          <a:bodyPr wrap="square" anchor="t" lIns="0" rIns="0" tIns="0" bIns="0"/>
-          <a:lstStyle/>
-          <a:p>
-            <a:pPr algn="l"/>
-            <a:r>
-              <a:rPr sz="1100" b="1" i="0">
-                <a:solidFill>
-                  <a:srgbClr val="54595D"/>
-                </a:solidFill>
-                <a:latin typeface="Calibri"/>
-              </a:rPr>
-              <a:t>DIGITAL INFRASTRUCTURE  ·  Digital Infrastructure Content Area 2</a:t>
-            </a:r>
-          </a:p>
-        </p:txBody>
-      </p:sp>
-      <p:sp>
-        <p:nvSpPr>
-          <p:cNvPr id="3" name="TextBox 2"/>
-          <p:cNvSpPr txBox="1"/>
-          <p:nvPr/>
-        </p:nvSpPr>
-        <p:spPr>
-          <a:xfrm>
-            <a:off x="548640" y="566928"/>
-            <a:ext cx="11094415" cy="822960"/>
-          </a:xfrm>
-          <a:prstGeom prst="rect">
-            <a:avLst/>
-          </a:prstGeom>
-          <a:noFill/>
-        </p:spPr>
-        <p:txBody>
-          <a:bodyPr wrap="square" anchor="ctr" lIns="0" rIns="0" tIns="0" bIns="0"/>
-          <a:lstStyle/>
-          <a:p>
-            <a:pPr algn="l"/>
-            <a:r>
-              <a:rPr sz="3200" b="1" i="0">
-                <a:solidFill>
-                  <a:srgbClr val="03306E"/>
-                </a:solidFill>
-                <a:latin typeface="Cambria"/>
-              </a:rPr>
-              <a:t>Activity: ESD risk assessment and RAM swap</a:t>
-            </a:r>
-          </a:p>
-        </p:txBody>
-      </p:sp>
-      <p:sp>
-        <p:nvSpPr>
-          <p:cNvPr id="4" name="TextBox 3"/>
-          <p:cNvSpPr txBox="1"/>
-          <p:nvPr/>
-        </p:nvSpPr>
-        <p:spPr>
-          <a:xfrm>
-            <a:off x="548640" y="6446520"/>
-            <a:ext cx="8229600" cy="274320"/>
-          </a:xfrm>
-          <a:prstGeom prst="rect">
-            <a:avLst/>
-          </a:prstGeom>
-          <a:noFill/>
-        </p:spPr>
-        <p:txBody>
-          <a:bodyPr wrap="square" anchor="t" lIns="0" rIns="0" tIns="0" bIns="0"/>
-          <a:lstStyle/>
-          <a:p>
-            <a:pPr algn="l"/>
-            <a:r>
-              <a:rPr sz="1000" b="0" i="0">
-                <a:solidFill>
-                  <a:srgbClr val="54595D"/>
-                </a:solidFill>
-                <a:latin typeface="Calibri"/>
-              </a:rPr>
-              <a:t>Digital Support and Security T Level  ·  Health, Safety and ESD in Digital Infrastructure</a:t>
-            </a:r>
-          </a:p>
-        </p:txBody>
-      </p:sp>
-      <p:sp>
-        <p:nvSpPr>
-          <p:cNvPr id="5" name="TextBox 4"/>
-          <p:cNvSpPr txBox="1"/>
-          <p:nvPr/>
-        </p:nvSpPr>
-        <p:spPr>
-          <a:xfrm>
-            <a:off x="10728655" y="6446520"/>
-            <a:ext cx="914400" cy="274320"/>
-          </a:xfrm>
-          <a:prstGeom prst="rect">
-            <a:avLst/>
-          </a:prstGeom>
-          <a:noFill/>
-        </p:spPr>
-        <p:txBody>
-          <a:bodyPr wrap="square" anchor="t" lIns="0" rIns="0" tIns="0" bIns="0"/>
-          <a:lstStyle/>
-          <a:p>
-            <a:pPr algn="r"/>
-            <a:r>
-              <a:rPr sz="1000" b="0" i="0">
-                <a:solidFill>
-                  <a:srgbClr val="54595D"/>
-                </a:solidFill>
-                <a:latin typeface="Calibri"/>
-              </a:rPr>
-              <a:t>8</a:t>
-            </a:r>
-          </a:p>
-        </p:txBody>
-      </p:sp>
-      <p:sp>
-        <p:nvSpPr>
-          <p:cNvPr id="6" name="Rounded Rectangle 5"/>
-          <p:cNvSpPr/>
-          <p:nvPr/>
-        </p:nvSpPr>
-        <p:spPr>
-          <a:xfrm>
-            <a:off x="548640" y="1508760"/>
-            <a:ext cx="2011680" cy="457200"/>
-          </a:xfrm>
-          <a:prstGeom prst="roundRect">
-            <a:avLst>
-              <a:gd name="adj" fmla="val 50000"/>
-            </a:avLst>
-          </a:prstGeom>
-          <a:solidFill>
-            <a:srgbClr val="33C17A"/>
-          </a:solidFill>
-          <a:ln>
-            <a:noFill/>
-          </a:ln>
-          <a:effectLst/>
-        </p:spPr>
-        <p:style>
-          <a:lnRef idx="1">
-            <a:schemeClr val="accent1"/>
-          </a:lnRef>
-          <a:fillRef idx="3">
-            <a:schemeClr val="accent1"/>
-          </a:fillRef>
-          <a:effectRef idx="2">
-            <a:schemeClr val="accent1"/>
-          </a:effectRef>
-          <a:fontRef idx="minor">
-            <a:schemeClr val="lt1"/>
-          </a:fontRef>
-        </p:style>
-        <p:txBody>
-          <a:bodyPr rtlCol="0" anchor="ctr"/>
-          <a:lstStyle/>
-          <a:p/>
-        </p:txBody>
-      </p:sp>
-      <p:sp>
-        <p:nvSpPr>
-          <p:cNvPr id="7" name="TextBox 6"/>
-          <p:cNvSpPr txBox="1"/>
-          <p:nvPr/>
-        </p:nvSpPr>
-        <p:spPr>
-          <a:xfrm>
-            <a:off x="548640" y="1508760"/>
-            <a:ext cx="2011680" cy="457200"/>
-          </a:xfrm>
-          <a:prstGeom prst="rect">
-            <a:avLst/>
-          </a:prstGeom>
-          <a:noFill/>
-        </p:spPr>
-        <p:txBody>
-          <a:bodyPr wrap="square" anchor="ctr" lIns="0" rIns="0" tIns="0" bIns="0"/>
-          <a:lstStyle/>
-          <a:p>
-            <a:pPr algn="ctr"/>
-            <a:r>
-              <a:rPr sz="1400" b="1" i="0">
-                <a:solidFill>
-                  <a:srgbClr val="202122"/>
-                </a:solidFill>
-                <a:latin typeface="Calibri"/>
-              </a:rPr>
-              <a:t>30 minutes</a:t>
-            </a:r>
-          </a:p>
-        </p:txBody>
-      </p:sp>
-      <p:sp>
-        <p:nvSpPr>
-          <p:cNvPr id="8" name="TextBox 7"/>
-          <p:cNvSpPr txBox="1"/>
-          <p:nvPr/>
-        </p:nvSpPr>
-        <p:spPr>
-          <a:xfrm>
-            <a:off x="2743200" y="1508760"/>
-            <a:ext cx="4754880" cy="457200"/>
-          </a:xfrm>
-          <a:prstGeom prst="rect">
-            <a:avLst/>
-          </a:prstGeom>
-          <a:noFill/>
-        </p:spPr>
-        <p:txBody>
-          <a:bodyPr wrap="square" anchor="ctr" lIns="0" rIns="0" tIns="0" bIns="0"/>
-          <a:lstStyle/>
-          <a:p>
-            <a:pPr algn="l"/>
-            <a:r>
-              <a:rPr sz="1400" b="0" i="1">
-                <a:solidFill>
-                  <a:srgbClr val="54595D"/>
-                </a:solidFill>
-                <a:latin typeface="Calibri"/>
-              </a:rPr>
-              <a:t>Pairs, practical</a:t>
-            </a:r>
-          </a:p>
-        </p:txBody>
-      </p:sp>
-      <p:sp>
-        <p:nvSpPr>
-          <p:cNvPr id="9" name="Oval 8"/>
-          <p:cNvSpPr/>
-          <p:nvPr/>
-        </p:nvSpPr>
-        <p:spPr>
-          <a:xfrm>
-            <a:off x="548640" y="2482596"/>
-            <a:ext cx="384048" cy="384048"/>
-          </a:xfrm>
-          <a:prstGeom prst="ellipse">
-            <a:avLst/>
-          </a:prstGeom>
-          <a:solidFill>
-            <a:srgbClr val="0645AD"/>
-          </a:solidFill>
-          <a:ln>
-            <a:noFill/>
-          </a:ln>
-          <a:effectLst/>
-        </p:spPr>
-        <p:style>
-          <a:lnRef idx="1">
-            <a:schemeClr val="accent1"/>
-          </a:lnRef>
-          <a:fillRef idx="3">
-            <a:schemeClr val="accent1"/>
-          </a:fillRef>
-          <a:effectRef idx="2">
-            <a:schemeClr val="accent1"/>
-          </a:effectRef>
-          <a:fontRef idx="minor">
-            <a:schemeClr val="lt1"/>
-          </a:fontRef>
-        </p:style>
-        <p:txBody>
-          <a:bodyPr rtlCol="0" anchor="ctr" lIns="0" rIns="0" tIns="0" bIns="0"/>
-          <a:lstStyle/>
-          <a:p>
-            <a:pPr algn="ctr"/>
-            <a:r>
-              <a:rPr sz="1300" b="1">
-                <a:solidFill>
-                  <a:srgbClr val="FFFFFF"/>
-                </a:solidFill>
-                <a:latin typeface="Calibri"/>
-              </a:rPr>
-              <a:t>1</a:t>
-            </a:r>
-          </a:p>
-        </p:txBody>
-      </p:sp>
-      <p:sp>
-        <p:nvSpPr>
-          <p:cNvPr id="10" name="TextBox 9"/>
-          <p:cNvSpPr txBox="1"/>
-          <p:nvPr/>
-        </p:nvSpPr>
-        <p:spPr>
-          <a:xfrm>
-            <a:off x="1143000" y="2240280"/>
-            <a:ext cx="5943600" cy="868680"/>
-          </a:xfrm>
-          <a:prstGeom prst="rect">
-            <a:avLst/>
-          </a:prstGeom>
-          <a:noFill/>
-        </p:spPr>
-        <p:txBody>
-          <a:bodyPr wrap="square" anchor="ctr" lIns="0" rIns="0" tIns="0" bIns="0"/>
-          <a:lstStyle/>
-          <a:p>
-            <a:pPr algn="l"/>
-            <a:r>
-              <a:rPr sz="1700" b="0" i="0">
-                <a:solidFill>
-                  <a:srgbClr val="202122"/>
-                </a:solidFill>
-                <a:latin typeface="Calibri"/>
-              </a:rPr>
-              <a:t>Complete an ESD risk assessment for upgrading RAM in a lab PC.</a:t>
-            </a:r>
-          </a:p>
-        </p:txBody>
-      </p:sp>
-      <p:sp>
-        <p:nvSpPr>
-          <p:cNvPr id="11" name="Oval 10"/>
-          <p:cNvSpPr/>
-          <p:nvPr/>
-        </p:nvSpPr>
-        <p:spPr>
-          <a:xfrm>
-            <a:off x="548640" y="3461004"/>
-            <a:ext cx="384048" cy="384048"/>
-          </a:xfrm>
-          <a:prstGeom prst="ellipse">
-            <a:avLst/>
-          </a:prstGeom>
-          <a:solidFill>
-            <a:srgbClr val="0645AD"/>
-          </a:solidFill>
-          <a:ln>
-            <a:noFill/>
-          </a:ln>
-          <a:effectLst/>
-        </p:spPr>
-        <p:style>
-          <a:lnRef idx="1">
-            <a:schemeClr val="accent1"/>
-          </a:lnRef>
-          <a:fillRef idx="3">
-            <a:schemeClr val="accent1"/>
-          </a:fillRef>
-          <a:effectRef idx="2">
-            <a:schemeClr val="accent1"/>
-          </a:effectRef>
-          <a:fontRef idx="minor">
-            <a:schemeClr val="lt1"/>
-          </a:fontRef>
-        </p:style>
-        <p:txBody>
-          <a:bodyPr rtlCol="0" anchor="ctr" lIns="0" rIns="0" tIns="0" bIns="0"/>
-          <a:lstStyle/>
-          <a:p>
-            <a:pPr algn="ctr"/>
-            <a:r>
-              <a:rPr sz="1300" b="1">
-                <a:solidFill>
-                  <a:srgbClr val="FFFFFF"/>
-                </a:solidFill>
-                <a:latin typeface="Calibri"/>
-              </a:rPr>
-              <a:t>2</a:t>
+              <a:t>Which law covers disposing of old network kit?</a:t>
             </a:r>
           </a:p>
         </p:txBody>
@@ -8017,8 +10743,8 @@
         </p:nvSpPr>
         <p:spPr>
           <a:xfrm>
-            <a:off x="1143000" y="3218688"/>
-            <a:ext cx="5943600" cy="868680"/>
+            <a:off x="548640" y="5852160"/>
+            <a:ext cx="11094415" cy="365760"/>
           </a:xfrm>
           <a:prstGeom prst="rect">
             <a:avLst/>
@@ -8026,879 +10752,18 @@
           <a:noFill/>
         </p:spPr>
         <p:txBody>
-          <a:bodyPr wrap="square" anchor="ctr" lIns="0" rIns="0" tIns="0" bIns="0"/>
+          <a:bodyPr wrap="square" anchor="t" lIns="0" rIns="0" tIns="0" bIns="0"/>
           <a:lstStyle/>
           <a:p>
             <a:pPr algn="l"/>
             <a:r>
-              <a:rPr sz="1700" b="0" i="0">
-                <a:solidFill>
-                  <a:srgbClr val="202122"/>
-                </a:solidFill>
-                <a:latin typeface="Calibri"/>
-              </a:rPr>
-              <a:t>Set up the anti-static workstation.</a:t>
-            </a:r>
-          </a:p>
-        </p:txBody>
-      </p:sp>
-      <p:sp>
-        <p:nvSpPr>
-          <p:cNvPr id="13" name="Oval 12"/>
-          <p:cNvSpPr/>
-          <p:nvPr/>
-        </p:nvSpPr>
-        <p:spPr>
-          <a:xfrm>
-            <a:off x="548640" y="4439412"/>
-            <a:ext cx="384048" cy="384048"/>
-          </a:xfrm>
-          <a:prstGeom prst="ellipse">
-            <a:avLst/>
-          </a:prstGeom>
-          <a:solidFill>
-            <a:srgbClr val="0645AD"/>
-          </a:solidFill>
-          <a:ln>
-            <a:noFill/>
-          </a:ln>
-          <a:effectLst/>
-        </p:spPr>
-        <p:style>
-          <a:lnRef idx="1">
-            <a:schemeClr val="accent1"/>
-          </a:lnRef>
-          <a:fillRef idx="3">
-            <a:schemeClr val="accent1"/>
-          </a:fillRef>
-          <a:effectRef idx="2">
-            <a:schemeClr val="accent1"/>
-          </a:effectRef>
-          <a:fontRef idx="minor">
-            <a:schemeClr val="lt1"/>
-          </a:fontRef>
-        </p:style>
-        <p:txBody>
-          <a:bodyPr rtlCol="0" anchor="ctr" lIns="0" rIns="0" tIns="0" bIns="0"/>
-          <a:lstStyle/>
-          <a:p>
-            <a:pPr algn="ctr"/>
-            <a:r>
-              <a:rPr sz="1300" b="1">
-                <a:solidFill>
-                  <a:srgbClr val="FFFFFF"/>
-                </a:solidFill>
-                <a:latin typeface="Calibri"/>
-              </a:rPr>
-              <a:t>3</a:t>
-            </a:r>
-          </a:p>
-        </p:txBody>
-      </p:sp>
-      <p:sp>
-        <p:nvSpPr>
-          <p:cNvPr id="14" name="TextBox 13"/>
-          <p:cNvSpPr txBox="1"/>
-          <p:nvPr/>
-        </p:nvSpPr>
-        <p:spPr>
-          <a:xfrm>
-            <a:off x="1143000" y="4197096"/>
-            <a:ext cx="5943600" cy="868680"/>
-          </a:xfrm>
-          <a:prstGeom prst="rect">
-            <a:avLst/>
-          </a:prstGeom>
-          <a:noFill/>
-        </p:spPr>
-        <p:txBody>
-          <a:bodyPr wrap="square" anchor="ctr" lIns="0" rIns="0" tIns="0" bIns="0"/>
-          <a:lstStyle/>
-          <a:p>
-            <a:pPr algn="l"/>
-            <a:r>
-              <a:rPr sz="1700" b="0" i="0">
-                <a:solidFill>
-                  <a:srgbClr val="202122"/>
-                </a:solidFill>
-                <a:latin typeface="Calibri"/>
-              </a:rPr>
-              <a:t>Remove and replace the RAM following your assessment.</a:t>
-            </a:r>
-          </a:p>
-        </p:txBody>
-      </p:sp>
-      <p:sp>
-        <p:nvSpPr>
-          <p:cNvPr id="15" name="Oval 14"/>
-          <p:cNvSpPr/>
-          <p:nvPr/>
-        </p:nvSpPr>
-        <p:spPr>
-          <a:xfrm>
-            <a:off x="548640" y="5417820"/>
-            <a:ext cx="384048" cy="384048"/>
-          </a:xfrm>
-          <a:prstGeom prst="ellipse">
-            <a:avLst/>
-          </a:prstGeom>
-          <a:solidFill>
-            <a:srgbClr val="0645AD"/>
-          </a:solidFill>
-          <a:ln>
-            <a:noFill/>
-          </a:ln>
-          <a:effectLst/>
-        </p:spPr>
-        <p:style>
-          <a:lnRef idx="1">
-            <a:schemeClr val="accent1"/>
-          </a:lnRef>
-          <a:fillRef idx="3">
-            <a:schemeClr val="accent1"/>
-          </a:fillRef>
-          <a:effectRef idx="2">
-            <a:schemeClr val="accent1"/>
-          </a:effectRef>
-          <a:fontRef idx="minor">
-            <a:schemeClr val="lt1"/>
-          </a:fontRef>
-        </p:style>
-        <p:txBody>
-          <a:bodyPr rtlCol="0" anchor="ctr" lIns="0" rIns="0" tIns="0" bIns="0"/>
-          <a:lstStyle/>
-          <a:p>
-            <a:pPr algn="ctr"/>
-            <a:r>
-              <a:rPr sz="1300" b="1">
-                <a:solidFill>
-                  <a:srgbClr val="FFFFFF"/>
-                </a:solidFill>
-                <a:latin typeface="Calibri"/>
-              </a:rPr>
-              <a:t>4</a:t>
-            </a:r>
-          </a:p>
-        </p:txBody>
-      </p:sp>
-      <p:sp>
-        <p:nvSpPr>
-          <p:cNvPr id="16" name="TextBox 15"/>
-          <p:cNvSpPr txBox="1"/>
-          <p:nvPr/>
-        </p:nvSpPr>
-        <p:spPr>
-          <a:xfrm>
-            <a:off x="1143000" y="5175504"/>
-            <a:ext cx="5943600" cy="868680"/>
-          </a:xfrm>
-          <a:prstGeom prst="rect">
-            <a:avLst/>
-          </a:prstGeom>
-          <a:noFill/>
-        </p:spPr>
-        <p:txBody>
-          <a:bodyPr wrap="square" anchor="ctr" lIns="0" rIns="0" tIns="0" bIns="0"/>
-          <a:lstStyle/>
-          <a:p>
-            <a:pPr algn="l"/>
-            <a:r>
-              <a:rPr sz="1700" b="0" i="0">
-                <a:solidFill>
-                  <a:srgbClr val="202122"/>
-                </a:solidFill>
-                <a:latin typeface="Calibri"/>
-              </a:rPr>
-              <a:t>Record the outcome and any issues.</a:t>
-            </a:r>
-          </a:p>
-        </p:txBody>
-      </p:sp>
-      <p:sp>
-        <p:nvSpPr>
-          <p:cNvPr id="17" name="Rounded Rectangle 16"/>
-          <p:cNvSpPr/>
-          <p:nvPr/>
-        </p:nvSpPr>
-        <p:spPr>
-          <a:xfrm>
-            <a:off x="7772400" y="1508760"/>
-            <a:ext cx="3867912" cy="4572000"/>
-          </a:xfrm>
-          <a:prstGeom prst="roundRect">
-            <a:avLst>
-              <a:gd name="adj" fmla="val 8000"/>
-            </a:avLst>
-          </a:prstGeom>
-          <a:solidFill>
-            <a:srgbClr val="EAF3FF"/>
-          </a:solidFill>
-          <a:ln>
-            <a:noFill/>
-          </a:ln>
-          <a:effectLst/>
-        </p:spPr>
-        <p:style>
-          <a:lnRef idx="1">
-            <a:schemeClr val="accent1"/>
-          </a:lnRef>
-          <a:fillRef idx="3">
-            <a:schemeClr val="accent1"/>
-          </a:fillRef>
-          <a:effectRef idx="2">
-            <a:schemeClr val="accent1"/>
-          </a:effectRef>
-          <a:fontRef idx="minor">
-            <a:schemeClr val="lt1"/>
-          </a:fontRef>
-        </p:style>
-        <p:txBody>
-          <a:bodyPr rtlCol="0" anchor="ctr"/>
-          <a:lstStyle/>
-          <a:p/>
-        </p:txBody>
-      </p:sp>
-      <p:sp>
-        <p:nvSpPr>
-          <p:cNvPr id="18" name="TextBox 17"/>
-          <p:cNvSpPr txBox="1"/>
-          <p:nvPr/>
-        </p:nvSpPr>
-        <p:spPr>
-          <a:xfrm>
-            <a:off x="8046720" y="1737360"/>
-            <a:ext cx="3291840" cy="365760"/>
-          </a:xfrm>
-          <a:prstGeom prst="rect">
-            <a:avLst/>
-          </a:prstGeom>
-          <a:noFill/>
-        </p:spPr>
-        <p:txBody>
-          <a:bodyPr wrap="square" anchor="t" lIns="0" rIns="0" tIns="0" bIns="0"/>
-          <a:lstStyle/>
-          <a:p>
-            <a:pPr algn="l"/>
-            <a:r>
-              <a:rPr sz="1300" b="1" i="0">
-                <a:solidFill>
-                  <a:srgbClr val="0645AD"/>
-                </a:solidFill>
-                <a:latin typeface="Calibri"/>
-              </a:rPr>
-              <a:t>SUCCESS CRITERIA</a:t>
-            </a:r>
-          </a:p>
-        </p:txBody>
-      </p:sp>
-      <p:sp>
-        <p:nvSpPr>
-          <p:cNvPr id="19" name="TextBox 18"/>
-          <p:cNvSpPr txBox="1"/>
-          <p:nvPr/>
-        </p:nvSpPr>
-        <p:spPr>
-          <a:xfrm>
-            <a:off x="8046720" y="2240280"/>
-            <a:ext cx="3337560" cy="3657600"/>
-          </a:xfrm>
-          <a:prstGeom prst="rect">
-            <a:avLst/>
-          </a:prstGeom>
-          <a:noFill/>
-        </p:spPr>
-        <p:txBody>
-          <a:bodyPr wrap="square" lIns="0" rIns="0" tIns="0" bIns="0">
-            <a:spAutoFit/>
-          </a:bodyPr>
-          <a:lstStyle/>
-          <a:p>
-            <a:pPr marL="274320" indent="-274320">
-              <a:spcAft>
-                <a:spcPts val="810"/>
-              </a:spcAft>
-              <a:buClr>
-                <a:srgbClr val="0645AD"/>
-              </a:buClr>
-              <a:buFont typeface="Arial"/>
-              <a:buChar char="•"/>
-            </a:pPr>
-            <a:r>
-              <a:rPr sz="1800" b="0">
-                <a:solidFill>
-                  <a:srgbClr val="202122"/>
-                </a:solidFill>
-                <a:latin typeface="Calibri"/>
-              </a:rPr>
-              <a:t>Risk assessment completed before starting</a:t>
-            </a:r>
-          </a:p>
-          <a:p>
-            <a:pPr marL="274320" indent="-274320">
-              <a:spcAft>
-                <a:spcPts val="810"/>
-              </a:spcAft>
-              <a:buClr>
-                <a:srgbClr val="0645AD"/>
-              </a:buClr>
-              <a:buFont typeface="Arial"/>
-              <a:buChar char="•"/>
-            </a:pPr>
-            <a:r>
-              <a:rPr sz="1800" b="0">
-                <a:solidFill>
-                  <a:srgbClr val="202122"/>
-                </a:solidFill>
-                <a:latin typeface="Calibri"/>
-              </a:rPr>
-              <a:t>Wrist strap used correctly</a:t>
-            </a:r>
-          </a:p>
-          <a:p>
-            <a:pPr marL="274320" indent="-274320">
-              <a:spcAft>
-                <a:spcPts val="810"/>
-              </a:spcAft>
-              <a:buClr>
-                <a:srgbClr val="0645AD"/>
-              </a:buClr>
-              <a:buFont typeface="Arial"/>
-              <a:buChar char="•"/>
-            </a:pPr>
-            <a:r>
-              <a:rPr sz="1800" b="0">
-                <a:solidFill>
-                  <a:srgbClr val="202122"/>
-                </a:solidFill>
-                <a:latin typeface="Calibri"/>
-              </a:rPr>
-              <a:t>PC boots and detects the RAM</a:t>
-            </a:r>
-          </a:p>
-        </p:txBody>
-      </p:sp>
-    </p:spTree>
-  </p:cSld>
-  <p:clrMapOvr>
-    <a:masterClrMapping/>
-  </p:clrMapOvr>
-</p:sld>
-</file>
-
-<file path=ppt/slides/slide9.xml><?xml version="1.0" encoding="utf-8"?>
-<p:sld xmlns:a="http://schemas.openxmlformats.org/drawingml/2006/main" xmlns:p="http://schemas.openxmlformats.org/presentationml/2006/main" xmlns:r="http://schemas.openxmlformats.org/officeDocument/2006/relationships">
-  <p:cSld>
-    <p:bg>
-      <p:bgPr>
-        <a:solidFill>
-          <a:srgbClr val="03306E"/>
-        </a:solidFill>
-        <a:effectLst/>
-      </p:bgPr>
-    </p:bg>
-    <p:spTree>
-      <p:nvGrpSpPr>
-        <p:cNvPr id="1" name=""/>
-        <p:cNvGrpSpPr/>
-        <p:nvPr/>
-      </p:nvGrpSpPr>
-      <p:grpSpPr/>
-      <p:sp>
-        <p:nvSpPr>
-          <p:cNvPr id="2" name="TextBox 1"/>
-          <p:cNvSpPr txBox="1"/>
-          <p:nvPr/>
-        </p:nvSpPr>
-        <p:spPr>
-          <a:xfrm>
-            <a:off x="548640" y="320040"/>
-            <a:ext cx="11094415" cy="274320"/>
-          </a:xfrm>
-          <a:prstGeom prst="rect">
-            <a:avLst/>
-          </a:prstGeom>
-          <a:noFill/>
-        </p:spPr>
-        <p:txBody>
-          <a:bodyPr wrap="square" anchor="t" lIns="0" rIns="0" tIns="0" bIns="0"/>
-          <a:lstStyle/>
-          <a:p>
-            <a:pPr algn="l"/>
-            <a:r>
-              <a:rPr sz="1100" b="1" i="0">
-                <a:solidFill>
-                  <a:srgbClr val="A9C8F0"/>
-                </a:solidFill>
-                <a:latin typeface="Calibri"/>
-              </a:rPr>
-              <a:t>DIGITAL INFRASTRUCTURE  ·  Digital Infrastructure Content Area 2</a:t>
-            </a:r>
-          </a:p>
-        </p:txBody>
-      </p:sp>
-      <p:sp>
-        <p:nvSpPr>
-          <p:cNvPr id="3" name="TextBox 2"/>
-          <p:cNvSpPr txBox="1"/>
-          <p:nvPr/>
-        </p:nvSpPr>
-        <p:spPr>
-          <a:xfrm>
-            <a:off x="548640" y="566928"/>
-            <a:ext cx="11094415" cy="822960"/>
-          </a:xfrm>
-          <a:prstGeom prst="rect">
-            <a:avLst/>
-          </a:prstGeom>
-          <a:noFill/>
-        </p:spPr>
-        <p:txBody>
-          <a:bodyPr wrap="square" anchor="ctr" lIns="0" rIns="0" tIns="0" bIns="0"/>
-          <a:lstStyle/>
-          <a:p>
-            <a:pPr algn="l"/>
-            <a:r>
-              <a:rPr sz="3200" b="1" i="0">
-                <a:solidFill>
-                  <a:srgbClr val="FFFFFF"/>
-                </a:solidFill>
-                <a:latin typeface="Cambria"/>
-              </a:rPr>
-              <a:t>Exit ticket</a:t>
-            </a:r>
-          </a:p>
-        </p:txBody>
-      </p:sp>
-      <p:sp>
-        <p:nvSpPr>
-          <p:cNvPr id="4" name="Oval 3"/>
-          <p:cNvSpPr/>
-          <p:nvPr/>
-        </p:nvSpPr>
-        <p:spPr>
-          <a:xfrm>
-            <a:off x="548640" y="1737360"/>
-            <a:ext cx="502920" cy="502920"/>
-          </a:xfrm>
-          <a:prstGeom prst="ellipse">
-            <a:avLst/>
-          </a:prstGeom>
-          <a:solidFill>
-            <a:srgbClr val="33C17A"/>
-          </a:solidFill>
-          <a:ln>
-            <a:noFill/>
-          </a:ln>
-          <a:effectLst/>
-        </p:spPr>
-        <p:style>
-          <a:lnRef idx="1">
-            <a:schemeClr val="accent1"/>
-          </a:lnRef>
-          <a:fillRef idx="3">
-            <a:schemeClr val="accent1"/>
-          </a:fillRef>
-          <a:effectRef idx="2">
-            <a:schemeClr val="accent1"/>
-          </a:effectRef>
-          <a:fontRef idx="minor">
-            <a:schemeClr val="lt1"/>
-          </a:fontRef>
-        </p:style>
-        <p:txBody>
-          <a:bodyPr rtlCol="0" anchor="ctr" lIns="0" rIns="0" tIns="0" bIns="0"/>
-          <a:lstStyle/>
-          <a:p>
-            <a:pPr algn="ctr"/>
-            <a:r>
-              <a:rPr sz="1700" b="1">
-                <a:solidFill>
-                  <a:srgbClr val="202122"/>
-                </a:solidFill>
-                <a:latin typeface="Calibri"/>
-              </a:rPr>
-              <a:t>1</a:t>
-            </a:r>
-          </a:p>
-        </p:txBody>
-      </p:sp>
-      <p:sp>
-        <p:nvSpPr>
-          <p:cNvPr id="5" name="TextBox 4"/>
-          <p:cNvSpPr txBox="1"/>
-          <p:nvPr/>
-        </p:nvSpPr>
-        <p:spPr>
-          <a:xfrm>
-            <a:off x="1325880" y="1645920"/>
-            <a:ext cx="6583680" cy="822960"/>
-          </a:xfrm>
-          <a:prstGeom prst="rect">
-            <a:avLst/>
-          </a:prstGeom>
-          <a:noFill/>
-        </p:spPr>
-        <p:txBody>
-          <a:bodyPr wrap="square" anchor="ctr" lIns="0" rIns="0" tIns="0" bIns="0"/>
-          <a:lstStyle/>
-          <a:p>
-            <a:pPr algn="l"/>
-            <a:r>
-              <a:rPr sz="2000" b="0" i="0">
-                <a:solidFill>
-                  <a:srgbClr val="FFFFFF"/>
-                </a:solidFill>
-                <a:latin typeface="Calibri"/>
-              </a:rPr>
-              <a:t>Name one environmental factor that affects static.</a:t>
-            </a:r>
-          </a:p>
-        </p:txBody>
-      </p:sp>
-      <p:sp>
-        <p:nvSpPr>
-          <p:cNvPr id="6" name="Oval 5"/>
-          <p:cNvSpPr/>
-          <p:nvPr/>
-        </p:nvSpPr>
-        <p:spPr>
-          <a:xfrm>
-            <a:off x="548640" y="2697480"/>
-            <a:ext cx="502920" cy="502920"/>
-          </a:xfrm>
-          <a:prstGeom prst="ellipse">
-            <a:avLst/>
-          </a:prstGeom>
-          <a:solidFill>
-            <a:srgbClr val="33C17A"/>
-          </a:solidFill>
-          <a:ln>
-            <a:noFill/>
-          </a:ln>
-          <a:effectLst/>
-        </p:spPr>
-        <p:style>
-          <a:lnRef idx="1">
-            <a:schemeClr val="accent1"/>
-          </a:lnRef>
-          <a:fillRef idx="3">
-            <a:schemeClr val="accent1"/>
-          </a:fillRef>
-          <a:effectRef idx="2">
-            <a:schemeClr val="accent1"/>
-          </a:effectRef>
-          <a:fontRef idx="minor">
-            <a:schemeClr val="lt1"/>
-          </a:fontRef>
-        </p:style>
-        <p:txBody>
-          <a:bodyPr rtlCol="0" anchor="ctr" lIns="0" rIns="0" tIns="0" bIns="0"/>
-          <a:lstStyle/>
-          <a:p>
-            <a:pPr algn="ctr"/>
-            <a:r>
-              <a:rPr sz="1700" b="1">
-                <a:solidFill>
-                  <a:srgbClr val="202122"/>
-                </a:solidFill>
-                <a:latin typeface="Calibri"/>
-              </a:rPr>
-              <a:t>2</a:t>
-            </a:r>
-          </a:p>
-        </p:txBody>
-      </p:sp>
-      <p:sp>
-        <p:nvSpPr>
-          <p:cNvPr id="7" name="TextBox 6"/>
-          <p:cNvSpPr txBox="1"/>
-          <p:nvPr/>
-        </p:nvSpPr>
-        <p:spPr>
-          <a:xfrm>
-            <a:off x="1325880" y="2606040"/>
-            <a:ext cx="6583680" cy="822960"/>
-          </a:xfrm>
-          <a:prstGeom prst="rect">
-            <a:avLst/>
-          </a:prstGeom>
-          <a:noFill/>
-        </p:spPr>
-        <p:txBody>
-          <a:bodyPr wrap="square" anchor="ctr" lIns="0" rIns="0" tIns="0" bIns="0"/>
-          <a:lstStyle/>
-          <a:p>
-            <a:pPr algn="l"/>
-            <a:r>
-              <a:rPr sz="2000" b="0" i="0">
-                <a:solidFill>
-                  <a:srgbClr val="FFFFFF"/>
-                </a:solidFill>
-                <a:latin typeface="Calibri"/>
-              </a:rPr>
-              <a:t>Which Act sets out the employer's duty of care?</a:t>
-            </a:r>
-          </a:p>
-        </p:txBody>
-      </p:sp>
-      <p:sp>
-        <p:nvSpPr>
-          <p:cNvPr id="8" name="Oval 7"/>
-          <p:cNvSpPr/>
-          <p:nvPr/>
-        </p:nvSpPr>
-        <p:spPr>
-          <a:xfrm>
-            <a:off x="548640" y="3657600"/>
-            <a:ext cx="502920" cy="502920"/>
-          </a:xfrm>
-          <a:prstGeom prst="ellipse">
-            <a:avLst/>
-          </a:prstGeom>
-          <a:solidFill>
-            <a:srgbClr val="33C17A"/>
-          </a:solidFill>
-          <a:ln>
-            <a:noFill/>
-          </a:ln>
-          <a:effectLst/>
-        </p:spPr>
-        <p:style>
-          <a:lnRef idx="1">
-            <a:schemeClr val="accent1"/>
-          </a:lnRef>
-          <a:fillRef idx="3">
-            <a:schemeClr val="accent1"/>
-          </a:fillRef>
-          <a:effectRef idx="2">
-            <a:schemeClr val="accent1"/>
-          </a:effectRef>
-          <a:fontRef idx="minor">
-            <a:schemeClr val="lt1"/>
-          </a:fontRef>
-        </p:style>
-        <p:txBody>
-          <a:bodyPr rtlCol="0" anchor="ctr" lIns="0" rIns="0" tIns="0" bIns="0"/>
-          <a:lstStyle/>
-          <a:p>
-            <a:pPr algn="ctr"/>
-            <a:r>
-              <a:rPr sz="1700" b="1">
-                <a:solidFill>
-                  <a:srgbClr val="202122"/>
-                </a:solidFill>
-                <a:latin typeface="Calibri"/>
-              </a:rPr>
-              <a:t>3</a:t>
-            </a:r>
-          </a:p>
-        </p:txBody>
-      </p:sp>
-      <p:sp>
-        <p:nvSpPr>
-          <p:cNvPr id="9" name="TextBox 8"/>
-          <p:cNvSpPr txBox="1"/>
-          <p:nvPr/>
-        </p:nvSpPr>
-        <p:spPr>
-          <a:xfrm>
-            <a:off x="1325880" y="3566160"/>
-            <a:ext cx="6583680" cy="822960"/>
-          </a:xfrm>
-          <a:prstGeom prst="rect">
-            <a:avLst/>
-          </a:prstGeom>
-          <a:noFill/>
-        </p:spPr>
-        <p:txBody>
-          <a:bodyPr wrap="square" anchor="ctr" lIns="0" rIns="0" tIns="0" bIns="0"/>
-          <a:lstStyle/>
-          <a:p>
-            <a:pPr algn="l"/>
-            <a:r>
-              <a:rPr sz="2000" b="0" i="0">
-                <a:solidFill>
-                  <a:srgbClr val="FFFFFF"/>
-                </a:solidFill>
-                <a:latin typeface="Calibri"/>
-              </a:rPr>
-              <a:t>What should you do before opening a PC case?</a:t>
-            </a:r>
-          </a:p>
-        </p:txBody>
-      </p:sp>
-      <p:sp>
-        <p:nvSpPr>
-          <p:cNvPr id="10" name="Rounded Rectangle 9"/>
-          <p:cNvSpPr/>
-          <p:nvPr/>
-        </p:nvSpPr>
-        <p:spPr>
-          <a:xfrm>
-            <a:off x="8229600" y="1645920"/>
-            <a:ext cx="3410712" cy="2926080"/>
-          </a:xfrm>
-          <a:prstGeom prst="roundRect">
-            <a:avLst>
-              <a:gd name="adj" fmla="val 8000"/>
-            </a:avLst>
-          </a:prstGeom>
-          <a:solidFill>
-            <a:srgbClr val="0645AD"/>
-          </a:solidFill>
-          <a:ln>
-            <a:noFill/>
-          </a:ln>
-          <a:effectLst/>
-        </p:spPr>
-        <p:style>
-          <a:lnRef idx="1">
-            <a:schemeClr val="accent1"/>
-          </a:lnRef>
-          <a:fillRef idx="3">
-            <a:schemeClr val="accent1"/>
-          </a:fillRef>
-          <a:effectRef idx="2">
-            <a:schemeClr val="accent1"/>
-          </a:effectRef>
-          <a:fontRef idx="minor">
-            <a:schemeClr val="lt1"/>
-          </a:fontRef>
-        </p:style>
-        <p:txBody>
-          <a:bodyPr rtlCol="0" anchor="ctr"/>
-          <a:lstStyle/>
-          <a:p/>
-        </p:txBody>
-      </p:sp>
-      <p:sp>
-        <p:nvSpPr>
-          <p:cNvPr id="11" name="TextBox 10"/>
-          <p:cNvSpPr txBox="1"/>
-          <p:nvPr/>
-        </p:nvSpPr>
-        <p:spPr>
-          <a:xfrm>
-            <a:off x="8503920" y="1874519"/>
-            <a:ext cx="2926080" cy="365760"/>
-          </a:xfrm>
-          <a:prstGeom prst="rect">
-            <a:avLst/>
-          </a:prstGeom>
-          <a:noFill/>
-        </p:spPr>
-        <p:txBody>
-          <a:bodyPr wrap="square" anchor="t" lIns="0" rIns="0" tIns="0" bIns="0"/>
-          <a:lstStyle/>
-          <a:p>
-            <a:pPr algn="l"/>
-            <a:r>
-              <a:rPr sz="1300" b="1" i="0">
-                <a:solidFill>
-                  <a:srgbClr val="A9C8F0"/>
-                </a:solidFill>
-                <a:latin typeface="Calibri"/>
-              </a:rPr>
-              <a:t>REVISE THIS TOPIC</a:t>
-            </a:r>
-          </a:p>
-        </p:txBody>
-      </p:sp>
-      <p:sp>
-        <p:nvSpPr>
-          <p:cNvPr id="12" name="TextBox 11"/>
-          <p:cNvSpPr txBox="1"/>
-          <p:nvPr/>
-        </p:nvSpPr>
-        <p:spPr>
-          <a:xfrm>
-            <a:off x="8503920" y="2286000"/>
-            <a:ext cx="2926080" cy="548640"/>
-          </a:xfrm>
-          <a:prstGeom prst="rect">
-            <a:avLst/>
-          </a:prstGeom>
-          <a:noFill/>
-        </p:spPr>
-        <p:txBody>
-          <a:bodyPr wrap="square" anchor="t" lIns="0" rIns="0" tIns="0" bIns="0"/>
-          <a:lstStyle/>
-          <a:p>
-            <a:pPr algn="l"/>
-            <a:r>
-              <a:rPr sz="1400" b="0" i="0">
-                <a:solidFill>
-                  <a:srgbClr val="FFFFFF"/>
-                </a:solidFill>
-                <a:latin typeface="Calibri"/>
-              </a:rPr>
-              <a:t>Revision notes for this lesson are on the study wiki:</a:t>
-            </a:r>
-          </a:p>
-        </p:txBody>
-      </p:sp>
-      <p:sp>
-        <p:nvSpPr>
-          <p:cNvPr id="13" name="TextBox 12"/>
-          <p:cNvSpPr txBox="1"/>
-          <p:nvPr/>
-        </p:nvSpPr>
-        <p:spPr>
-          <a:xfrm>
-            <a:off x="8503920" y="2926080"/>
-            <a:ext cx="2926080" cy="1463040"/>
-          </a:xfrm>
-          <a:prstGeom prst="rect">
-            <a:avLst/>
-          </a:prstGeom>
-          <a:noFill/>
-        </p:spPr>
-        <p:txBody>
-          <a:bodyPr wrap="square" anchor="t" lIns="0" rIns="0" tIns="0" bIns="0"/>
-          <a:lstStyle/>
-          <a:p>
-            <a:pPr algn="l"/>
-            <a:r>
-              <a:rPr sz="2000" b="1" i="0">
-                <a:solidFill>
-                  <a:srgbClr val="FFFFFF"/>
-                </a:solidFill>
-                <a:latin typeface="Cambria"/>
-              </a:rPr>
-              <a:t>Digital Infrastructure - Physical and Virtual Infrastructure</a:t>
-            </a:r>
-          </a:p>
-        </p:txBody>
-      </p:sp>
-      <p:sp>
-        <p:nvSpPr>
-          <p:cNvPr id="14" name="TextBox 13"/>
-          <p:cNvSpPr txBox="1"/>
-          <p:nvPr/>
-        </p:nvSpPr>
-        <p:spPr>
-          <a:xfrm>
-            <a:off x="548640" y="5669280"/>
-            <a:ext cx="11094415" cy="548640"/>
-          </a:xfrm>
-          <a:prstGeom prst="rect">
-            <a:avLst/>
-          </a:prstGeom>
-          <a:noFill/>
-        </p:spPr>
-        <p:txBody>
-          <a:bodyPr wrap="square" anchor="t" lIns="0" rIns="0" tIns="0" bIns="0"/>
-          <a:lstStyle/>
-          <a:p>
-            <a:pPr algn="l"/>
-            <a:r>
-              <a:rPr sz="1200" b="0" i="0">
-                <a:solidFill>
-                  <a:srgbClr val="A9C8F0"/>
-                </a:solidFill>
-                <a:latin typeface="Calibri"/>
-              </a:rPr>
-              <a:t>https://lana6478.github.io/Digital-Suport-and-security-T-levle/#/02-occupational-specialisms/digital-infrastructure/02-physical-and-virtual-infrastructure.md</a:t>
+              <a:rPr sz="1300" b="0" i="1">
+                <a:solidFill>
+                  <a:srgbClr val="54595D"/>
+                </a:solidFill>
+                <a:latin typeface="Calibri"/>
+              </a:rPr>
+              <a:t>Answer on mini whiteboards or in your book. Answers are in the speaker notes.</a:t>
             </a:r>
           </a:p>
         </p:txBody>
